--- a/report/powerpoint/LibraryManagementSystem.pptx
+++ b/report/powerpoint/LibraryManagementSystem.pptx
@@ -73,24 +73,25 @@
             <a:noAutofit/>
           </a:bodyPr>
           <a:p>
+            <a:pPr algn="ctr"/>
             <a:r>
-              <a:rPr lang="en-US" sz="1800" b="0" u="none" strike="noStrike">
-                <a:solidFill>
-                  <a:schemeClr val="dk1"/>
-                </a:solidFill>
-                <a:effectLst/>
-                <a:uFillTx/>
-                <a:latin typeface="Calibri"/>
+              <a:rPr lang="en-US" sz="4400" b="0" u="none" strike="noStrike">
+                <a:solidFill>
+                  <a:srgbClr val="000000"/>
+                </a:solidFill>
+                <a:effectLst/>
+                <a:uFillTx/>
+                <a:latin typeface="Arial"/>
               </a:rPr>
               <a:t>Click to move the slide</a:t>
             </a:r>
-            <a:endParaRPr lang="en-US" sz="1800" b="0" u="none" strike="noStrike">
-              <a:solidFill>
-                <a:schemeClr val="dk1"/>
-              </a:solidFill>
-              <a:effectLst/>
-              <a:uFillTx/>
-              <a:latin typeface="Calibri"/>
+            <a:endParaRPr lang="en-US" sz="4400" b="0" u="none" strike="noStrike">
+              <a:solidFill>
+                <a:srgbClr val="000000"/>
+              </a:solidFill>
+              <a:effectLst/>
+              <a:uFillTx/>
+              <a:latin typeface="Arial"/>
             </a:endParaRPr>
           </a:p>
         </p:txBody>
@@ -135,84 +136,7 @@
                 <a:uFillTx/>
                 <a:latin typeface="Arial"/>
               </a:rPr>
-              <a:t>Clic</a:t>
-            </a:r>
-            <a:r>
-              <a:rPr lang="en-US" sz="2000" b="0" u="none" strike="noStrike">
-                <a:solidFill>
-                  <a:srgbClr val="000000"/>
-                </a:solidFill>
-                <a:effectLst/>
-                <a:uFillTx/>
-                <a:latin typeface="Arial"/>
-              </a:rPr>
-              <a:t>k to </a:t>
-            </a:r>
-            <a:r>
-              <a:rPr lang="en-US" sz="2000" b="0" u="none" strike="noStrike">
-                <a:solidFill>
-                  <a:srgbClr val="000000"/>
-                </a:solidFill>
-                <a:effectLst/>
-                <a:uFillTx/>
-                <a:latin typeface="Arial"/>
-              </a:rPr>
-              <a:t>edit </a:t>
-            </a:r>
-            <a:r>
-              <a:rPr lang="en-US" sz="2000" b="0" u="none" strike="noStrike">
-                <a:solidFill>
-                  <a:srgbClr val="000000"/>
-                </a:solidFill>
-                <a:effectLst/>
-                <a:uFillTx/>
-                <a:latin typeface="Arial"/>
-              </a:rPr>
-              <a:t>the </a:t>
-            </a:r>
-            <a:r>
-              <a:rPr lang="en-US" sz="2000" b="0" u="none" strike="noStrike">
-                <a:solidFill>
-                  <a:srgbClr val="000000"/>
-                </a:solidFill>
-                <a:effectLst/>
-                <a:uFillTx/>
-                <a:latin typeface="Arial"/>
-              </a:rPr>
-              <a:t>note</a:t>
-            </a:r>
-            <a:r>
-              <a:rPr lang="en-US" sz="2000" b="0" u="none" strike="noStrike">
-                <a:solidFill>
-                  <a:srgbClr val="000000"/>
-                </a:solidFill>
-                <a:effectLst/>
-                <a:uFillTx/>
-                <a:latin typeface="Arial"/>
-              </a:rPr>
-              <a:t>s </a:t>
-            </a:r>
-            <a:r>
-              <a:rPr lang="en-US" sz="2000" b="0" u="none" strike="noStrike">
-                <a:solidFill>
-                  <a:srgbClr val="000000"/>
-                </a:solidFill>
-                <a:effectLst/>
-                <a:uFillTx/>
-                <a:latin typeface="Arial"/>
-              </a:rPr>
-              <a:t>for</a:t>
-            </a:r>
-            <a:r>
-              <a:rPr lang="en-US" sz="2000" b="0" u="none" strike="noStrike">
-                <a:solidFill>
-                  <a:srgbClr val="000000"/>
-                </a:solidFill>
-                <a:effectLst/>
-                <a:uFillTx/>
-                <a:latin typeface="Arial"/>
-              </a:rPr>
-              <a:t>mat</a:t>
+              <a:t>Click to edit the notes format</a:t>
             </a:r>
             <a:endParaRPr lang="en-US" sz="2000" b="0" u="none" strike="noStrike">
               <a:solidFill>
@@ -331,7 +255,7 @@
                 <a:uFillTx/>
                 <a:latin typeface="Times New Roman"/>
               </a:rPr>
-              <a:t>&lt;date/time&gt;</a:t>
+              <a:t> </a:t>
             </a:r>
             <a:endParaRPr lang="en-US" sz="1400" b="0" u="none" strike="noStrike">
               <a:solidFill>
@@ -397,7 +321,7 @@
                 <a:uFillTx/>
                 <a:latin typeface="Times New Roman"/>
               </a:rPr>
-              <a:t>&lt;footer&gt;</a:t>
+              <a:t> </a:t>
             </a:r>
             <a:endParaRPr lang="en-US" sz="1400" b="0" u="none" strike="noStrike">
               <a:solidFill>
@@ -454,7 +378,7 @@
             <a:pPr indent="0" algn="r">
               <a:buNone/>
             </a:pPr>
-            <a:fld id="{47ADDF03-1E9E-4A18-9DF9-AB48FA3D1919}" type="slidenum">
+            <a:fld id="{A7A1D12F-745C-4372-9AF5-10F86D675060}" type="slidenum">
               <a:rPr lang="en-US" sz="1400" b="0" u="none" strike="noStrike">
                 <a:solidFill>
                   <a:srgbClr val="000000"/>
@@ -463,7 +387,7 @@
                 <a:uFillTx/>
                 <a:latin typeface="Times New Roman"/>
               </a:rPr>
-              <a:t>&lt;number&gt;</a:t>
+              <a:t>1</a:t>
             </a:fld>
             <a:endParaRPr lang="en-US" sz="1400" b="0" u="none" strike="noStrike">
               <a:solidFill>
@@ -512,7 +436,7 @@
         <p:spPr>
           <a:xfrm>
             <a:off x="685800" y="1143000"/>
-            <a:ext cx="5486040" cy="3085920"/>
+            <a:ext cx="5485680" cy="3085560"/>
           </a:xfrm>
           <a:prstGeom prst="rect">
             <a:avLst/>
@@ -535,7 +459,7 @@
         <p:spPr>
           <a:xfrm>
             <a:off x="685800" y="4400640"/>
-            <a:ext cx="5486040" cy="3600000"/>
+            <a:ext cx="5485680" cy="3599640"/>
           </a:xfrm>
           <a:prstGeom prst="rect">
             <a:avLst/>
@@ -577,7 +501,7 @@
         <p:spPr>
           <a:xfrm>
             <a:off x="3884760" y="8685360"/>
-            <a:ext cx="2971440" cy="458280"/>
+            <a:ext cx="2971080" cy="457920"/>
           </a:xfrm>
           <a:prstGeom prst="rect">
             <a:avLst/>
@@ -597,6 +521,9 @@
                 <a:spcPct val="100000"/>
               </a:lnSpc>
               <a:buNone/>
+              <a:tabLst>
+                <a:tab algn="l" pos="0"/>
+              </a:tabLst>
               <a:defRPr lang="en-US" sz="1200" b="0" u="none" strike="noStrike">
                 <a:solidFill>
                   <a:schemeClr val="dk1"/>
@@ -614,8 +541,11 @@
                 <a:spcPct val="100000"/>
               </a:lnSpc>
               <a:buNone/>
-            </a:pPr>
-            <a:fld id="{BDC82A67-6EBF-4C7F-9139-FB2D7E3B099B}" type="slidenum">
+              <a:tabLst>
+                <a:tab algn="l" pos="0"/>
+              </a:tabLst>
+            </a:pPr>
+            <a:fld id="{A1A9D055-2F1F-4C13-9018-5ABC7437E925}" type="slidenum">
               <a:rPr lang="en-US" sz="1200" b="0" u="none" strike="noStrike">
                 <a:solidFill>
                   <a:schemeClr val="dk1"/>
@@ -625,7 +555,7 @@
                 <a:latin typeface="+mn-lt"/>
                 <a:ea typeface="+mn-ea"/>
               </a:rPr>
-              <a:t>&lt;number&gt;</a:t>
+              <a:t>1</a:t>
             </a:fld>
             <a:endParaRPr lang="en-US" sz="1200" b="0" u="none" strike="noStrike">
               <a:solidFill>
@@ -673,7 +603,7 @@
         <p:spPr>
           <a:xfrm>
             <a:off x="685800" y="1143000"/>
-            <a:ext cx="5486040" cy="3085920"/>
+            <a:ext cx="5485680" cy="3085560"/>
           </a:xfrm>
           <a:prstGeom prst="rect">
             <a:avLst/>
@@ -696,7 +626,7 @@
         <p:spPr>
           <a:xfrm>
             <a:off x="685800" y="4400640"/>
-            <a:ext cx="5486040" cy="3600000"/>
+            <a:ext cx="5485680" cy="3599640"/>
           </a:xfrm>
           <a:prstGeom prst="rect">
             <a:avLst/>
@@ -738,7 +668,7 @@
         <p:spPr>
           <a:xfrm>
             <a:off x="3884760" y="8685360"/>
-            <a:ext cx="2971440" cy="458280"/>
+            <a:ext cx="2971080" cy="457920"/>
           </a:xfrm>
           <a:prstGeom prst="rect">
             <a:avLst/>
@@ -758,6 +688,9 @@
                 <a:spcPct val="100000"/>
               </a:lnSpc>
               <a:buNone/>
+              <a:tabLst>
+                <a:tab algn="l" pos="0"/>
+              </a:tabLst>
               <a:defRPr lang="en-US" sz="1200" b="0" u="none" strike="noStrike">
                 <a:solidFill>
                   <a:schemeClr val="dk1"/>
@@ -775,8 +708,11 @@
                 <a:spcPct val="100000"/>
               </a:lnSpc>
               <a:buNone/>
-            </a:pPr>
-            <a:fld id="{D3A6EA60-0F08-4426-BF47-E49565E5C06E}" type="slidenum">
+              <a:tabLst>
+                <a:tab algn="l" pos="0"/>
+              </a:tabLst>
+            </a:pPr>
+            <a:fld id="{EC75DCA9-4A32-4D7D-9B79-3C4DC41D1753}" type="slidenum">
               <a:rPr lang="en-US" sz="1200" b="0" u="none" strike="noStrike">
                 <a:solidFill>
                   <a:schemeClr val="dk1"/>
@@ -786,7 +722,7 @@
                 <a:latin typeface="+mn-lt"/>
                 <a:ea typeface="+mn-ea"/>
               </a:rPr>
-              <a:t>&lt;number&gt;</a:t>
+              <a:t>1</a:t>
             </a:fld>
             <a:endParaRPr lang="en-US" sz="1200" b="0" u="none" strike="noStrike">
               <a:solidFill>
@@ -834,7 +770,7 @@
         <p:spPr>
           <a:xfrm>
             <a:off x="685800" y="1143000"/>
-            <a:ext cx="5486040" cy="3085920"/>
+            <a:ext cx="5485680" cy="3085560"/>
           </a:xfrm>
           <a:prstGeom prst="rect">
             <a:avLst/>
@@ -857,7 +793,7 @@
         <p:spPr>
           <a:xfrm>
             <a:off x="685800" y="4400640"/>
-            <a:ext cx="5486040" cy="3600000"/>
+            <a:ext cx="5485680" cy="3599640"/>
           </a:xfrm>
           <a:prstGeom prst="rect">
             <a:avLst/>
@@ -899,7 +835,7 @@
         <p:spPr>
           <a:xfrm>
             <a:off x="3884760" y="8685360"/>
-            <a:ext cx="2971440" cy="458280"/>
+            <a:ext cx="2971080" cy="457920"/>
           </a:xfrm>
           <a:prstGeom prst="rect">
             <a:avLst/>
@@ -919,6 +855,9 @@
                 <a:spcPct val="100000"/>
               </a:lnSpc>
               <a:buNone/>
+              <a:tabLst>
+                <a:tab algn="l" pos="0"/>
+              </a:tabLst>
               <a:defRPr lang="en-US" sz="1200" b="0" u="none" strike="noStrike">
                 <a:solidFill>
                   <a:schemeClr val="dk1"/>
@@ -936,8 +875,11 @@
                 <a:spcPct val="100000"/>
               </a:lnSpc>
               <a:buNone/>
-            </a:pPr>
-            <a:fld id="{1470C9D3-C539-4630-8451-7AB819AA5451}" type="slidenum">
+              <a:tabLst>
+                <a:tab algn="l" pos="0"/>
+              </a:tabLst>
+            </a:pPr>
+            <a:fld id="{FEC6A68B-522A-4B97-A2F5-5CFE1C127884}" type="slidenum">
               <a:rPr lang="en-US" sz="1200" b="0" u="none" strike="noStrike">
                 <a:solidFill>
                   <a:schemeClr val="dk1"/>
@@ -947,7 +889,7 @@
                 <a:latin typeface="+mn-lt"/>
                 <a:ea typeface="+mn-ea"/>
               </a:rPr>
-              <a:t>&lt;number&gt;</a:t>
+              <a:t>1</a:t>
             </a:fld>
             <a:endParaRPr lang="en-US" sz="1200" b="0" u="none" strike="noStrike">
               <a:solidFill>
@@ -995,7 +937,7 @@
         <p:spPr>
           <a:xfrm>
             <a:off x="685800" y="1143000"/>
-            <a:ext cx="5486040" cy="3085920"/>
+            <a:ext cx="5485680" cy="3085560"/>
           </a:xfrm>
           <a:prstGeom prst="rect">
             <a:avLst/>
@@ -1018,7 +960,7 @@
         <p:spPr>
           <a:xfrm>
             <a:off x="685800" y="4400640"/>
-            <a:ext cx="5486040" cy="3600000"/>
+            <a:ext cx="5485680" cy="3599640"/>
           </a:xfrm>
           <a:prstGeom prst="rect">
             <a:avLst/>
@@ -1060,7 +1002,7 @@
         <p:spPr>
           <a:xfrm>
             <a:off x="3884760" y="8685360"/>
-            <a:ext cx="2971440" cy="458280"/>
+            <a:ext cx="2971080" cy="457920"/>
           </a:xfrm>
           <a:prstGeom prst="rect">
             <a:avLst/>
@@ -1080,6 +1022,9 @@
                 <a:spcPct val="100000"/>
               </a:lnSpc>
               <a:buNone/>
+              <a:tabLst>
+                <a:tab algn="l" pos="0"/>
+              </a:tabLst>
               <a:defRPr lang="en-US" sz="1200" b="0" u="none" strike="noStrike">
                 <a:solidFill>
                   <a:schemeClr val="dk1"/>
@@ -1097,8 +1042,11 @@
                 <a:spcPct val="100000"/>
               </a:lnSpc>
               <a:buNone/>
-            </a:pPr>
-            <a:fld id="{9E336774-88BD-4D39-B2AE-18E6220ECDD5}" type="slidenum">
+              <a:tabLst>
+                <a:tab algn="l" pos="0"/>
+              </a:tabLst>
+            </a:pPr>
+            <a:fld id="{60A5C3AA-14E6-4F77-BE92-390D9D5F3B73}" type="slidenum">
               <a:rPr lang="en-US" sz="1200" b="0" u="none" strike="noStrike">
                 <a:solidFill>
                   <a:schemeClr val="dk1"/>
@@ -1108,7 +1056,7 @@
                 <a:latin typeface="+mn-lt"/>
                 <a:ea typeface="+mn-ea"/>
               </a:rPr>
-              <a:t>&lt;number&gt;</a:t>
+              <a:t>1</a:t>
             </a:fld>
             <a:endParaRPr lang="en-US" sz="1200" b="0" u="none" strike="noStrike">
               <a:solidFill>
@@ -1156,7 +1104,7 @@
         <p:spPr>
           <a:xfrm>
             <a:off x="685800" y="1143000"/>
-            <a:ext cx="5486040" cy="3085920"/>
+            <a:ext cx="5485680" cy="3085560"/>
           </a:xfrm>
           <a:prstGeom prst="rect">
             <a:avLst/>
@@ -1179,7 +1127,7 @@
         <p:spPr>
           <a:xfrm>
             <a:off x="685800" y="4400640"/>
-            <a:ext cx="5486040" cy="3600000"/>
+            <a:ext cx="5485680" cy="3599640"/>
           </a:xfrm>
           <a:prstGeom prst="rect">
             <a:avLst/>
@@ -1221,7 +1169,7 @@
         <p:spPr>
           <a:xfrm>
             <a:off x="3884760" y="8685360"/>
-            <a:ext cx="2971440" cy="458280"/>
+            <a:ext cx="2971080" cy="457920"/>
           </a:xfrm>
           <a:prstGeom prst="rect">
             <a:avLst/>
@@ -1241,6 +1189,9 @@
                 <a:spcPct val="100000"/>
               </a:lnSpc>
               <a:buNone/>
+              <a:tabLst>
+                <a:tab algn="l" pos="0"/>
+              </a:tabLst>
               <a:defRPr lang="en-US" sz="1200" b="0" u="none" strike="noStrike">
                 <a:solidFill>
                   <a:schemeClr val="dk1"/>
@@ -1258,8 +1209,11 @@
                 <a:spcPct val="100000"/>
               </a:lnSpc>
               <a:buNone/>
-            </a:pPr>
-            <a:fld id="{C7EA9707-A698-4EDB-A9B1-E5F883838F5D}" type="slidenum">
+              <a:tabLst>
+                <a:tab algn="l" pos="0"/>
+              </a:tabLst>
+            </a:pPr>
+            <a:fld id="{21EC8B23-DEAE-487A-99C8-F081879B76B7}" type="slidenum">
               <a:rPr lang="en-US" sz="1200" b="0" u="none" strike="noStrike">
                 <a:solidFill>
                   <a:schemeClr val="dk1"/>
@@ -1269,7 +1223,7 @@
                 <a:latin typeface="+mn-lt"/>
                 <a:ea typeface="+mn-ea"/>
               </a:rPr>
-              <a:t>&lt;number&gt;</a:t>
+              <a:t>1</a:t>
             </a:fld>
             <a:endParaRPr lang="en-US" sz="1200" b="0" u="none" strike="noStrike">
               <a:solidFill>
@@ -1317,7 +1271,7 @@
         <p:spPr>
           <a:xfrm>
             <a:off x="685800" y="1143000"/>
-            <a:ext cx="5486040" cy="3085920"/>
+            <a:ext cx="5485680" cy="3085560"/>
           </a:xfrm>
           <a:prstGeom prst="rect">
             <a:avLst/>
@@ -1340,7 +1294,7 @@
         <p:spPr>
           <a:xfrm>
             <a:off x="685800" y="4400640"/>
-            <a:ext cx="5486040" cy="3600000"/>
+            <a:ext cx="5485680" cy="3599640"/>
           </a:xfrm>
           <a:prstGeom prst="rect">
             <a:avLst/>
@@ -1382,7 +1336,7 @@
         <p:spPr>
           <a:xfrm>
             <a:off x="3884760" y="8685360"/>
-            <a:ext cx="2971440" cy="458280"/>
+            <a:ext cx="2971080" cy="457920"/>
           </a:xfrm>
           <a:prstGeom prst="rect">
             <a:avLst/>
@@ -1402,6 +1356,9 @@
                 <a:spcPct val="100000"/>
               </a:lnSpc>
               <a:buNone/>
+              <a:tabLst>
+                <a:tab algn="l" pos="0"/>
+              </a:tabLst>
               <a:defRPr lang="en-US" sz="1200" b="0" u="none" strike="noStrike">
                 <a:solidFill>
                   <a:schemeClr val="dk1"/>
@@ -1419,8 +1376,11 @@
                 <a:spcPct val="100000"/>
               </a:lnSpc>
               <a:buNone/>
-            </a:pPr>
-            <a:fld id="{AD43385F-FAAA-417F-BEE0-7CFAB639D459}" type="slidenum">
+              <a:tabLst>
+                <a:tab algn="l" pos="0"/>
+              </a:tabLst>
+            </a:pPr>
+            <a:fld id="{EB213776-EA36-4E06-AF8C-D17241B725FB}" type="slidenum">
               <a:rPr lang="en-US" sz="1200" b="0" u="none" strike="noStrike">
                 <a:solidFill>
                   <a:schemeClr val="dk1"/>
@@ -1478,7 +1438,7 @@
         <p:spPr>
           <a:xfrm>
             <a:off x="685800" y="1143000"/>
-            <a:ext cx="5486040" cy="3085920"/>
+            <a:ext cx="5485680" cy="3085560"/>
           </a:xfrm>
           <a:prstGeom prst="rect">
             <a:avLst/>
@@ -1501,7 +1461,7 @@
         <p:spPr>
           <a:xfrm>
             <a:off x="685800" y="4400640"/>
-            <a:ext cx="5486040" cy="3600000"/>
+            <a:ext cx="5485680" cy="3599640"/>
           </a:xfrm>
           <a:prstGeom prst="rect">
             <a:avLst/>
@@ -1543,7 +1503,7 @@
         <p:spPr>
           <a:xfrm>
             <a:off x="3884760" y="8685360"/>
-            <a:ext cx="2971440" cy="458280"/>
+            <a:ext cx="2971080" cy="457920"/>
           </a:xfrm>
           <a:prstGeom prst="rect">
             <a:avLst/>
@@ -1563,6 +1523,9 @@
                 <a:spcPct val="100000"/>
               </a:lnSpc>
               <a:buNone/>
+              <a:tabLst>
+                <a:tab algn="l" pos="0"/>
+              </a:tabLst>
               <a:defRPr lang="en-US" sz="1200" b="0" u="none" strike="noStrike">
                 <a:solidFill>
                   <a:schemeClr val="dk1"/>
@@ -1580,8 +1543,11 @@
                 <a:spcPct val="100000"/>
               </a:lnSpc>
               <a:buNone/>
-            </a:pPr>
-            <a:fld id="{A562BE02-9AC8-4C5C-80F4-9AF359115490}" type="slidenum">
+              <a:tabLst>
+                <a:tab algn="l" pos="0"/>
+              </a:tabLst>
+            </a:pPr>
+            <a:fld id="{E1CA2149-9DB3-41AD-A039-3C0D9D53D00D}" type="slidenum">
               <a:rPr lang="en-US" sz="1200" b="0" u="none" strike="noStrike">
                 <a:solidFill>
                   <a:schemeClr val="dk1"/>
@@ -1591,7 +1557,7 @@
                 <a:latin typeface="+mn-lt"/>
                 <a:ea typeface="+mn-ea"/>
               </a:rPr>
-              <a:t>&lt;number&gt;</a:t>
+              <a:t>1</a:t>
             </a:fld>
             <a:endParaRPr lang="en-US" sz="1200" b="0" u="none" strike="noStrike">
               <a:solidFill>
@@ -1639,7 +1605,7 @@
         <p:spPr>
           <a:xfrm>
             <a:off x="685800" y="1143000"/>
-            <a:ext cx="5486040" cy="3085920"/>
+            <a:ext cx="5485680" cy="3085560"/>
           </a:xfrm>
           <a:prstGeom prst="rect">
             <a:avLst/>
@@ -1662,7 +1628,7 @@
         <p:spPr>
           <a:xfrm>
             <a:off x="685800" y="4400640"/>
-            <a:ext cx="5486040" cy="3600000"/>
+            <a:ext cx="5485680" cy="3599640"/>
           </a:xfrm>
           <a:prstGeom prst="rect">
             <a:avLst/>
@@ -1704,7 +1670,7 @@
         <p:spPr>
           <a:xfrm>
             <a:off x="3884760" y="8685360"/>
-            <a:ext cx="2971440" cy="458280"/>
+            <a:ext cx="2971080" cy="457920"/>
           </a:xfrm>
           <a:prstGeom prst="rect">
             <a:avLst/>
@@ -1724,6 +1690,9 @@
                 <a:spcPct val="100000"/>
               </a:lnSpc>
               <a:buNone/>
+              <a:tabLst>
+                <a:tab algn="l" pos="0"/>
+              </a:tabLst>
               <a:defRPr lang="en-US" sz="1200" b="0" u="none" strike="noStrike">
                 <a:solidFill>
                   <a:schemeClr val="dk1"/>
@@ -1741,8 +1710,11 @@
                 <a:spcPct val="100000"/>
               </a:lnSpc>
               <a:buNone/>
-            </a:pPr>
-            <a:fld id="{04A9DCC7-9BA2-42F9-87AB-7DE2D38FC38A}" type="slidenum">
+              <a:tabLst>
+                <a:tab algn="l" pos="0"/>
+              </a:tabLst>
+            </a:pPr>
+            <a:fld id="{A4FC9400-F1B3-4A38-BEB3-379E47D9E88A}" type="slidenum">
               <a:rPr lang="en-US" sz="1200" b="0" u="none" strike="noStrike">
                 <a:solidFill>
                   <a:schemeClr val="dk1"/>
@@ -1752,7 +1724,7 @@
                 <a:latin typeface="+mn-lt"/>
                 <a:ea typeface="+mn-ea"/>
               </a:rPr>
-              <a:t>&lt;number&gt;</a:t>
+              <a:t>1</a:t>
             </a:fld>
             <a:endParaRPr lang="en-US" sz="1200" b="0" u="none" strike="noStrike">
               <a:solidFill>
@@ -1800,7 +1772,7 @@
         <p:spPr>
           <a:xfrm>
             <a:off x="685800" y="1143000"/>
-            <a:ext cx="5486040" cy="3085920"/>
+            <a:ext cx="5485680" cy="3085560"/>
           </a:xfrm>
           <a:prstGeom prst="rect">
             <a:avLst/>
@@ -1823,7 +1795,7 @@
         <p:spPr>
           <a:xfrm>
             <a:off x="685800" y="4400640"/>
-            <a:ext cx="5486040" cy="3600000"/>
+            <a:ext cx="5485680" cy="3599640"/>
           </a:xfrm>
           <a:prstGeom prst="rect">
             <a:avLst/>
@@ -1865,7 +1837,7 @@
         <p:spPr>
           <a:xfrm>
             <a:off x="3884760" y="8685360"/>
-            <a:ext cx="2971440" cy="458280"/>
+            <a:ext cx="2971080" cy="457920"/>
           </a:xfrm>
           <a:prstGeom prst="rect">
             <a:avLst/>
@@ -1885,6 +1857,9 @@
                 <a:spcPct val="100000"/>
               </a:lnSpc>
               <a:buNone/>
+              <a:tabLst>
+                <a:tab algn="l" pos="0"/>
+              </a:tabLst>
               <a:defRPr lang="en-US" sz="1200" b="0" u="none" strike="noStrike">
                 <a:solidFill>
                   <a:schemeClr val="dk1"/>
@@ -1902,8 +1877,11 @@
                 <a:spcPct val="100000"/>
               </a:lnSpc>
               <a:buNone/>
-            </a:pPr>
-            <a:fld id="{C39D4038-E424-4403-BB41-073B094FD0CF}" type="slidenum">
+              <a:tabLst>
+                <a:tab algn="l" pos="0"/>
+              </a:tabLst>
+            </a:pPr>
+            <a:fld id="{35855D3C-88EB-4E11-856C-E8E91E82E062}" type="slidenum">
               <a:rPr lang="en-US" sz="1200" b="0" u="none" strike="noStrike">
                 <a:solidFill>
                   <a:schemeClr val="dk1"/>
@@ -1913,7 +1891,7 @@
                 <a:latin typeface="+mn-lt"/>
                 <a:ea typeface="+mn-ea"/>
               </a:rPr>
-              <a:t>&lt;number&gt;</a:t>
+              <a:t>1</a:t>
             </a:fld>
             <a:endParaRPr lang="en-US" sz="1200" b="0" u="none" strike="noStrike">
               <a:solidFill>
@@ -1961,7 +1939,7 @@
         <p:spPr>
           <a:xfrm>
             <a:off x="685800" y="1143000"/>
-            <a:ext cx="5486040" cy="3085920"/>
+            <a:ext cx="5485680" cy="3085560"/>
           </a:xfrm>
           <a:prstGeom prst="rect">
             <a:avLst/>
@@ -1984,7 +1962,7 @@
         <p:spPr>
           <a:xfrm>
             <a:off x="685800" y="4400640"/>
-            <a:ext cx="5486040" cy="3600000"/>
+            <a:ext cx="5485680" cy="3599640"/>
           </a:xfrm>
           <a:prstGeom prst="rect">
             <a:avLst/>
@@ -2026,7 +2004,7 @@
         <p:spPr>
           <a:xfrm>
             <a:off x="3884760" y="8685360"/>
-            <a:ext cx="2971440" cy="458280"/>
+            <a:ext cx="2971080" cy="457920"/>
           </a:xfrm>
           <a:prstGeom prst="rect">
             <a:avLst/>
@@ -2046,6 +2024,9 @@
                 <a:spcPct val="100000"/>
               </a:lnSpc>
               <a:buNone/>
+              <a:tabLst>
+                <a:tab algn="l" pos="0"/>
+              </a:tabLst>
               <a:defRPr lang="en-US" sz="1200" b="0" u="none" strike="noStrike">
                 <a:solidFill>
                   <a:schemeClr val="dk1"/>
@@ -2063,8 +2044,11 @@
                 <a:spcPct val="100000"/>
               </a:lnSpc>
               <a:buNone/>
-            </a:pPr>
-            <a:fld id="{6B1164ED-975D-4E63-8313-0940EA5ACF0E}" type="slidenum">
+              <a:tabLst>
+                <a:tab algn="l" pos="0"/>
+              </a:tabLst>
+            </a:pPr>
+            <a:fld id="{62991CD8-7754-445D-8A97-F794BE6DEB68}" type="slidenum">
               <a:rPr lang="en-US" sz="1200" b="0" u="none" strike="noStrike">
                 <a:solidFill>
                   <a:schemeClr val="dk1"/>
@@ -2074,7 +2058,7 @@
                 <a:latin typeface="+mn-lt"/>
                 <a:ea typeface="+mn-ea"/>
               </a:rPr>
-              <a:t>&lt;number&gt;</a:t>
+              <a:t>1</a:t>
             </a:fld>
             <a:endParaRPr lang="en-US" sz="1200" b="0" u="none" strike="noStrike">
               <a:solidFill>
@@ -2122,7 +2106,7 @@
         <p:spPr>
           <a:xfrm>
             <a:off x="685800" y="1143000"/>
-            <a:ext cx="5486040" cy="3085920"/>
+            <a:ext cx="5485680" cy="3085560"/>
           </a:xfrm>
           <a:prstGeom prst="rect">
             <a:avLst/>
@@ -2145,7 +2129,7 @@
         <p:spPr>
           <a:xfrm>
             <a:off x="685800" y="4400640"/>
-            <a:ext cx="5486040" cy="3600000"/>
+            <a:ext cx="5485680" cy="3599640"/>
           </a:xfrm>
           <a:prstGeom prst="rect">
             <a:avLst/>
@@ -2187,7 +2171,7 @@
         <p:spPr>
           <a:xfrm>
             <a:off x="3884760" y="8685360"/>
-            <a:ext cx="2971440" cy="458280"/>
+            <a:ext cx="2971080" cy="457920"/>
           </a:xfrm>
           <a:prstGeom prst="rect">
             <a:avLst/>
@@ -2207,6 +2191,9 @@
                 <a:spcPct val="100000"/>
               </a:lnSpc>
               <a:buNone/>
+              <a:tabLst>
+                <a:tab algn="l" pos="0"/>
+              </a:tabLst>
               <a:defRPr lang="en-US" sz="1200" b="0" u="none" strike="noStrike">
                 <a:solidFill>
                   <a:schemeClr val="dk1"/>
@@ -2224,8 +2211,11 @@
                 <a:spcPct val="100000"/>
               </a:lnSpc>
               <a:buNone/>
-            </a:pPr>
-            <a:fld id="{A6C233E2-557B-423B-8CD9-683BA64FEE27}" type="slidenum">
+              <a:tabLst>
+                <a:tab algn="l" pos="0"/>
+              </a:tabLst>
+            </a:pPr>
+            <a:fld id="{78E1D345-5A9F-4187-A663-338809B09514}" type="slidenum">
               <a:rPr lang="en-US" sz="1200" b="0" u="none" strike="noStrike">
                 <a:solidFill>
                   <a:schemeClr val="dk1"/>
@@ -2235,7 +2225,7 @@
                 <a:latin typeface="+mn-lt"/>
                 <a:ea typeface="+mn-ea"/>
               </a:rPr>
-              <a:t>&lt;number&gt;</a:t>
+              <a:t>1</a:t>
             </a:fld>
             <a:endParaRPr lang="en-US" sz="1200" b="0" u="none" strike="noStrike">
               <a:solidFill>
@@ -2283,7 +2273,7 @@
         <p:spPr>
           <a:xfrm>
             <a:off x="685800" y="1143000"/>
-            <a:ext cx="5486040" cy="3085920"/>
+            <a:ext cx="5485680" cy="3085560"/>
           </a:xfrm>
           <a:prstGeom prst="rect">
             <a:avLst/>
@@ -2306,7 +2296,7 @@
         <p:spPr>
           <a:xfrm>
             <a:off x="685800" y="4400640"/>
-            <a:ext cx="5486040" cy="3600000"/>
+            <a:ext cx="5485680" cy="3599640"/>
           </a:xfrm>
           <a:prstGeom prst="rect">
             <a:avLst/>
@@ -2348,7 +2338,7 @@
         <p:spPr>
           <a:xfrm>
             <a:off x="3884760" y="8685360"/>
-            <a:ext cx="2971440" cy="458280"/>
+            <a:ext cx="2971080" cy="457920"/>
           </a:xfrm>
           <a:prstGeom prst="rect">
             <a:avLst/>
@@ -2368,6 +2358,9 @@
                 <a:spcPct val="100000"/>
               </a:lnSpc>
               <a:buNone/>
+              <a:tabLst>
+                <a:tab algn="l" pos="0"/>
+              </a:tabLst>
               <a:defRPr lang="en-US" sz="1200" b="0" u="none" strike="noStrike">
                 <a:solidFill>
                   <a:schemeClr val="dk1"/>
@@ -2385,8 +2378,11 @@
                 <a:spcPct val="100000"/>
               </a:lnSpc>
               <a:buNone/>
-            </a:pPr>
-            <a:fld id="{42C71D41-8CEA-4DA2-AEBB-E7AB2FE14549}" type="slidenum">
+              <a:tabLst>
+                <a:tab algn="l" pos="0"/>
+              </a:tabLst>
+            </a:pPr>
+            <a:fld id="{A8A82E52-9EB9-4691-9C51-23E06CAFB8C5}" type="slidenum">
               <a:rPr lang="en-US" sz="1200" b="0" u="none" strike="noStrike">
                 <a:solidFill>
                   <a:schemeClr val="dk1"/>
@@ -2396,7 +2392,7 @@
                 <a:latin typeface="+mn-lt"/>
                 <a:ea typeface="+mn-ea"/>
               </a:rPr>
-              <a:t>&lt;number&gt;</a:t>
+              <a:t>1</a:t>
             </a:fld>
             <a:endParaRPr lang="en-US" sz="1200" b="0" u="none" strike="noStrike">
               <a:solidFill>
@@ -2444,7 +2440,7 @@
         <p:spPr>
           <a:xfrm>
             <a:off x="685800" y="1143000"/>
-            <a:ext cx="5486040" cy="3085920"/>
+            <a:ext cx="5485680" cy="3085560"/>
           </a:xfrm>
           <a:prstGeom prst="rect">
             <a:avLst/>
@@ -2467,7 +2463,7 @@
         <p:spPr>
           <a:xfrm>
             <a:off x="685800" y="4400640"/>
-            <a:ext cx="5486040" cy="3600000"/>
+            <a:ext cx="5485680" cy="3599640"/>
           </a:xfrm>
           <a:prstGeom prst="rect">
             <a:avLst/>
@@ -2509,7 +2505,7 @@
         <p:spPr>
           <a:xfrm>
             <a:off x="3884760" y="8685360"/>
-            <a:ext cx="2971440" cy="458280"/>
+            <a:ext cx="2971080" cy="457920"/>
           </a:xfrm>
           <a:prstGeom prst="rect">
             <a:avLst/>
@@ -2529,6 +2525,9 @@
                 <a:spcPct val="100000"/>
               </a:lnSpc>
               <a:buNone/>
+              <a:tabLst>
+                <a:tab algn="l" pos="0"/>
+              </a:tabLst>
               <a:defRPr lang="en-US" sz="1200" b="0" u="none" strike="noStrike">
                 <a:solidFill>
                   <a:schemeClr val="dk1"/>
@@ -2546,8 +2545,11 @@
                 <a:spcPct val="100000"/>
               </a:lnSpc>
               <a:buNone/>
-            </a:pPr>
-            <a:fld id="{4C7EA76C-1AA7-4AE3-88D1-5F3A82AB25D2}" type="slidenum">
+              <a:tabLst>
+                <a:tab algn="l" pos="0"/>
+              </a:tabLst>
+            </a:pPr>
+            <a:fld id="{6515DA63-9E52-4884-8FEA-393CC8E7D205}" type="slidenum">
               <a:rPr lang="en-US" sz="1200" b="0" u="none" strike="noStrike">
                 <a:solidFill>
                   <a:schemeClr val="dk1"/>
@@ -2557,7 +2559,7 @@
                 <a:latin typeface="+mn-lt"/>
                 <a:ea typeface="+mn-ea"/>
               </a:rPr>
-              <a:t>&lt;number&gt;</a:t>
+              <a:t>1</a:t>
             </a:fld>
             <a:endParaRPr lang="en-US" sz="1200" b="0" u="none" strike="noStrike">
               <a:solidFill>
@@ -2605,7 +2607,7 @@
         <p:spPr>
           <a:xfrm>
             <a:off x="685800" y="1143000"/>
-            <a:ext cx="5486040" cy="3085920"/>
+            <a:ext cx="5485680" cy="3085560"/>
           </a:xfrm>
           <a:prstGeom prst="rect">
             <a:avLst/>
@@ -2628,7 +2630,7 @@
         <p:spPr>
           <a:xfrm>
             <a:off x="685800" y="4400640"/>
-            <a:ext cx="5486040" cy="3600000"/>
+            <a:ext cx="5485680" cy="3599640"/>
           </a:xfrm>
           <a:prstGeom prst="rect">
             <a:avLst/>
@@ -2670,7 +2672,7 @@
         <p:spPr>
           <a:xfrm>
             <a:off x="3884760" y="8685360"/>
-            <a:ext cx="2971440" cy="458280"/>
+            <a:ext cx="2971080" cy="457920"/>
           </a:xfrm>
           <a:prstGeom prst="rect">
             <a:avLst/>
@@ -2690,6 +2692,9 @@
                 <a:spcPct val="100000"/>
               </a:lnSpc>
               <a:buNone/>
+              <a:tabLst>
+                <a:tab algn="l" pos="0"/>
+              </a:tabLst>
               <a:defRPr lang="en-US" sz="1200" b="0" u="none" strike="noStrike">
                 <a:solidFill>
                   <a:schemeClr val="dk1"/>
@@ -2707,8 +2712,11 @@
                 <a:spcPct val="100000"/>
               </a:lnSpc>
               <a:buNone/>
-            </a:pPr>
-            <a:fld id="{DF599B00-8701-49B4-BD02-2EF4085CCAD9}" type="slidenum">
+              <a:tabLst>
+                <a:tab algn="l" pos="0"/>
+              </a:tabLst>
+            </a:pPr>
+            <a:fld id="{EF34A2D4-1CE5-452F-B17E-177BA9C6F0C3}" type="slidenum">
               <a:rPr lang="en-US" sz="1200" b="0" u="none" strike="noStrike">
                 <a:solidFill>
                   <a:schemeClr val="dk1"/>
@@ -2718,7 +2726,7 @@
                 <a:latin typeface="+mn-lt"/>
                 <a:ea typeface="+mn-ea"/>
               </a:rPr>
-              <a:t>&lt;number&gt;</a:t>
+              <a:t>1</a:t>
             </a:fld>
             <a:endParaRPr lang="en-US" sz="1200" b="0" u="none" strike="noStrike">
               <a:solidFill>
@@ -2810,104 +2818,27 @@
             <a:noAutofit/>
           </a:bodyPr>
           <a:p>
-            <a:pPr indent="0">
+            <a:pPr indent="0" algn="ctr">
               <a:buNone/>
             </a:pPr>
             <a:r>
-              <a:rPr lang="en-US" sz="1800" b="0" u="none" strike="noStrike">
-                <a:solidFill>
-                  <a:schemeClr val="dk1"/>
-                </a:solidFill>
-                <a:effectLst/>
-                <a:uFillTx/>
-                <a:latin typeface="Calibri"/>
+              <a:rPr lang="en-US" sz="4400" b="0" u="none" strike="noStrike">
+                <a:solidFill>
+                  <a:srgbClr val="000000"/>
+                </a:solidFill>
+                <a:effectLst/>
+                <a:uFillTx/>
+                <a:latin typeface="Arial"/>
               </a:rPr>
-              <a:t>Click </a:t>
+              <a:t>Click to edit the title text format</a:t>
             </a:r>
-            <a:r>
-              <a:rPr lang="en-US" sz="1800" b="0" u="none" strike="noStrike">
-                <a:solidFill>
-                  <a:schemeClr val="dk1"/>
-                </a:solidFill>
-                <a:effectLst/>
-                <a:uFillTx/>
-                <a:latin typeface="Calibri"/>
-              </a:rPr>
-              <a:t>to </a:t>
-            </a:r>
-            <a:r>
-              <a:rPr lang="en-US" sz="1800" b="0" u="none" strike="noStrike">
-                <a:solidFill>
-                  <a:schemeClr val="dk1"/>
-                </a:solidFill>
-                <a:effectLst/>
-                <a:uFillTx/>
-                <a:latin typeface="Calibri"/>
-              </a:rPr>
-              <a:t>edit </a:t>
-            </a:r>
-            <a:r>
-              <a:rPr lang="en-US" sz="1800" b="0" u="none" strike="noStrike">
-                <a:solidFill>
-                  <a:schemeClr val="dk1"/>
-                </a:solidFill>
-                <a:effectLst/>
-                <a:uFillTx/>
-                <a:latin typeface="Calibri"/>
-              </a:rPr>
-              <a:t>the </a:t>
-            </a:r>
-            <a:r>
-              <a:rPr lang="en-US" sz="1800" b="0" u="none" strike="noStrike">
-                <a:solidFill>
-                  <a:schemeClr val="dk1"/>
-                </a:solidFill>
-                <a:effectLst/>
-                <a:uFillTx/>
-                <a:latin typeface="Calibri"/>
-              </a:rPr>
-              <a:t>title </a:t>
-            </a:r>
-            <a:r>
-              <a:rPr lang="en-US" sz="1800" b="0" u="none" strike="noStrike">
-                <a:solidFill>
-                  <a:schemeClr val="dk1"/>
-                </a:solidFill>
-                <a:effectLst/>
-                <a:uFillTx/>
-                <a:latin typeface="Calibri"/>
-              </a:rPr>
-              <a:t>text </a:t>
-            </a:r>
-            <a:r>
-              <a:rPr lang="en-US" sz="1800" b="0" u="none" strike="noStrike">
-                <a:solidFill>
-                  <a:schemeClr val="dk1"/>
-                </a:solidFill>
-                <a:effectLst/>
-                <a:uFillTx/>
-                <a:latin typeface="Calibri"/>
-              </a:rPr>
-              <a:t>form</a:t>
-            </a:r>
-            <a:r>
-              <a:rPr lang="en-US" sz="1800" b="0" u="none" strike="noStrike">
-                <a:solidFill>
-                  <a:schemeClr val="dk1"/>
-                </a:solidFill>
-                <a:effectLst/>
-                <a:uFillTx/>
-                <a:latin typeface="Calibri"/>
-              </a:rPr>
-              <a:t>at</a:t>
-            </a:r>
-            <a:endParaRPr lang="en-US" sz="1800" b="0" u="none" strike="noStrike">
-              <a:solidFill>
-                <a:schemeClr val="dk1"/>
-              </a:solidFill>
-              <a:effectLst/>
-              <a:uFillTx/>
-              <a:latin typeface="Calibri"/>
+            <a:endParaRPr lang="en-US" sz="4400" b="0" u="none" strike="noStrike">
+              <a:solidFill>
+                <a:srgbClr val="000000"/>
+              </a:solidFill>
+              <a:effectLst/>
+              <a:uFillTx/>
+              <a:latin typeface="Arial"/>
             </a:endParaRPr>
           </a:p>
         </p:txBody>
@@ -2954,21 +2885,21 @@
             <a:r>
               <a:rPr lang="en-US" sz="3200" b="0" u="none" strike="noStrike">
                 <a:solidFill>
-                  <a:schemeClr val="dk1"/>
-                </a:solidFill>
-                <a:effectLst/>
-                <a:uFillTx/>
-                <a:latin typeface="Calibri"/>
+                  <a:srgbClr val="000000"/>
+                </a:solidFill>
+                <a:effectLst/>
+                <a:uFillTx/>
+                <a:latin typeface="Arial"/>
               </a:rPr>
               <a:t>Click to edit the outline text format</a:t>
             </a:r>
             <a:endParaRPr lang="en-US" sz="3200" b="0" u="none" strike="noStrike">
               <a:solidFill>
-                <a:schemeClr val="dk1"/>
-              </a:solidFill>
-              <a:effectLst/>
-              <a:uFillTx/>
-              <a:latin typeface="Calibri"/>
+                <a:srgbClr val="000000"/>
+              </a:solidFill>
+              <a:effectLst/>
+              <a:uFillTx/>
+              <a:latin typeface="Arial"/>
             </a:endParaRPr>
           </a:p>
           <a:p>
@@ -2984,23 +2915,23 @@
               <a:buChar char=""/>
             </a:pPr>
             <a:r>
-              <a:rPr lang="en-US" sz="2400" b="0" u="none" strike="noStrike">
-                <a:solidFill>
-                  <a:schemeClr val="dk1"/>
-                </a:solidFill>
-                <a:effectLst/>
-                <a:uFillTx/>
-                <a:latin typeface="Calibri"/>
+              <a:rPr lang="en-US" sz="2800" b="0" u="none" strike="noStrike">
+                <a:solidFill>
+                  <a:srgbClr val="000000"/>
+                </a:solidFill>
+                <a:effectLst/>
+                <a:uFillTx/>
+                <a:latin typeface="Arial"/>
               </a:rPr>
               <a:t>Second Outline Level</a:t>
             </a:r>
-            <a:endParaRPr lang="en-US" sz="2400" b="0" u="none" strike="noStrike">
-              <a:solidFill>
-                <a:schemeClr val="dk1"/>
-              </a:solidFill>
-              <a:effectLst/>
-              <a:uFillTx/>
-              <a:latin typeface="Calibri"/>
+            <a:endParaRPr lang="en-US" sz="2800" b="0" u="none" strike="noStrike">
+              <a:solidFill>
+                <a:srgbClr val="000000"/>
+              </a:solidFill>
+              <a:effectLst/>
+              <a:uFillTx/>
+              <a:latin typeface="Arial"/>
             </a:endParaRPr>
           </a:p>
           <a:p>
@@ -3016,23 +2947,23 @@
               <a:buChar char=""/>
             </a:pPr>
             <a:r>
-              <a:rPr lang="en-US" sz="2000" b="0" u="none" strike="noStrike">
-                <a:solidFill>
-                  <a:schemeClr val="dk1"/>
-                </a:solidFill>
-                <a:effectLst/>
-                <a:uFillTx/>
-                <a:latin typeface="Calibri"/>
+              <a:rPr lang="en-US" sz="2400" b="0" u="none" strike="noStrike">
+                <a:solidFill>
+                  <a:srgbClr val="000000"/>
+                </a:solidFill>
+                <a:effectLst/>
+                <a:uFillTx/>
+                <a:latin typeface="Arial"/>
               </a:rPr>
               <a:t>Third Outline Level</a:t>
             </a:r>
-            <a:endParaRPr lang="en-US" sz="2000" b="0" u="none" strike="noStrike">
-              <a:solidFill>
-                <a:schemeClr val="dk1"/>
-              </a:solidFill>
-              <a:effectLst/>
-              <a:uFillTx/>
-              <a:latin typeface="Calibri"/>
+            <a:endParaRPr lang="en-US" sz="2400" b="0" u="none" strike="noStrike">
+              <a:solidFill>
+                <a:srgbClr val="000000"/>
+              </a:solidFill>
+              <a:effectLst/>
+              <a:uFillTx/>
+              <a:latin typeface="Arial"/>
             </a:endParaRPr>
           </a:p>
           <a:p>
@@ -3050,21 +2981,21 @@
             <a:r>
               <a:rPr lang="en-US" sz="2000" b="0" u="none" strike="noStrike">
                 <a:solidFill>
-                  <a:schemeClr val="dk1"/>
-                </a:solidFill>
-                <a:effectLst/>
-                <a:uFillTx/>
-                <a:latin typeface="Calibri"/>
+                  <a:srgbClr val="000000"/>
+                </a:solidFill>
+                <a:effectLst/>
+                <a:uFillTx/>
+                <a:latin typeface="Arial"/>
               </a:rPr>
               <a:t>Fourth Outline Level</a:t>
             </a:r>
             <a:endParaRPr lang="en-US" sz="2000" b="0" u="none" strike="noStrike">
               <a:solidFill>
-                <a:schemeClr val="dk1"/>
-              </a:solidFill>
-              <a:effectLst/>
-              <a:uFillTx/>
-              <a:latin typeface="Calibri"/>
+                <a:srgbClr val="000000"/>
+              </a:solidFill>
+              <a:effectLst/>
+              <a:uFillTx/>
+              <a:latin typeface="Arial"/>
             </a:endParaRPr>
           </a:p>
           <a:p>
@@ -3082,21 +3013,21 @@
             <a:r>
               <a:rPr lang="en-US" sz="2000" b="0" u="none" strike="noStrike">
                 <a:solidFill>
-                  <a:schemeClr val="dk1"/>
-                </a:solidFill>
-                <a:effectLst/>
-                <a:uFillTx/>
-                <a:latin typeface="Calibri"/>
+                  <a:srgbClr val="000000"/>
+                </a:solidFill>
+                <a:effectLst/>
+                <a:uFillTx/>
+                <a:latin typeface="Arial"/>
               </a:rPr>
               <a:t>Fifth Outline Level</a:t>
             </a:r>
             <a:endParaRPr lang="en-US" sz="2000" b="0" u="none" strike="noStrike">
               <a:solidFill>
-                <a:schemeClr val="dk1"/>
-              </a:solidFill>
-              <a:effectLst/>
-              <a:uFillTx/>
-              <a:latin typeface="Calibri"/>
+                <a:srgbClr val="000000"/>
+              </a:solidFill>
+              <a:effectLst/>
+              <a:uFillTx/>
+              <a:latin typeface="Arial"/>
             </a:endParaRPr>
           </a:p>
           <a:p>
@@ -3114,21 +3045,21 @@
             <a:r>
               <a:rPr lang="en-US" sz="2000" b="0" u="none" strike="noStrike">
                 <a:solidFill>
-                  <a:schemeClr val="dk1"/>
-                </a:solidFill>
-                <a:effectLst/>
-                <a:uFillTx/>
-                <a:latin typeface="Calibri"/>
+                  <a:srgbClr val="000000"/>
+                </a:solidFill>
+                <a:effectLst/>
+                <a:uFillTx/>
+                <a:latin typeface="Arial"/>
               </a:rPr>
               <a:t>Sixth Outline Level</a:t>
             </a:r>
             <a:endParaRPr lang="en-US" sz="2000" b="0" u="none" strike="noStrike">
               <a:solidFill>
-                <a:schemeClr val="dk1"/>
-              </a:solidFill>
-              <a:effectLst/>
-              <a:uFillTx/>
-              <a:latin typeface="Calibri"/>
+                <a:srgbClr val="000000"/>
+              </a:solidFill>
+              <a:effectLst/>
+              <a:uFillTx/>
+              <a:latin typeface="Arial"/>
             </a:endParaRPr>
           </a:p>
           <a:p>
@@ -3146,21 +3077,21 @@
             <a:r>
               <a:rPr lang="en-US" sz="2000" b="0" u="none" strike="noStrike">
                 <a:solidFill>
-                  <a:schemeClr val="dk1"/>
-                </a:solidFill>
-                <a:effectLst/>
-                <a:uFillTx/>
-                <a:latin typeface="Calibri"/>
+                  <a:srgbClr val="000000"/>
+                </a:solidFill>
+                <a:effectLst/>
+                <a:uFillTx/>
+                <a:latin typeface="Arial"/>
               </a:rPr>
               <a:t>Seventh Outline Level</a:t>
             </a:r>
             <a:endParaRPr lang="en-US" sz="2000" b="0" u="none" strike="noStrike">
               <a:solidFill>
-                <a:schemeClr val="dk1"/>
-              </a:solidFill>
-              <a:effectLst/>
-              <a:uFillTx/>
-              <a:latin typeface="Calibri"/>
+                <a:srgbClr val="000000"/>
+              </a:solidFill>
+              <a:effectLst/>
+              <a:uFillTx/>
+              <a:latin typeface="Arial"/>
             </a:endParaRPr>
           </a:p>
         </p:txBody>
@@ -3207,7 +3138,7 @@
         <p:spPr>
           <a:xfrm>
             <a:off x="0" y="0"/>
-            <a:ext cx="164160" cy="5143320"/>
+            <a:ext cx="163800" cy="5142960"/>
           </a:xfrm>
           <a:prstGeom prst="rect">
             <a:avLst/>
@@ -3230,6 +3161,11 @@
             <a:noAutofit/>
           </a:bodyPr>
           <a:p>
+            <a:pPr>
+              <a:lnSpc>
+                <a:spcPct val="100000"/>
+              </a:lnSpc>
+            </a:pPr>
             <a:endParaRPr lang="en-US" sz="1800" b="0" u="none" strike="noStrike">
               <a:solidFill>
                 <a:srgbClr val="000000"/>
@@ -3256,7 +3192,7 @@
         <p:spPr>
           <a:xfrm>
             <a:off x="6400800" y="365760"/>
-            <a:ext cx="2559960" cy="2559960"/>
+            <a:ext cx="2559600" cy="2559600"/>
           </a:xfrm>
           <a:prstGeom prst="rect">
             <a:avLst/>
@@ -3276,7 +3212,7 @@
         <p:spPr>
           <a:xfrm>
             <a:off x="457200" y="411480"/>
-            <a:ext cx="7772040" cy="365400"/>
+            <a:ext cx="7771680" cy="365040"/>
           </a:xfrm>
           <a:prstGeom prst="rect">
             <a:avLst/>
@@ -3337,7 +3273,7 @@
         <p:spPr>
           <a:xfrm>
             <a:off x="457200" y="1005840"/>
-            <a:ext cx="7497720" cy="685440"/>
+            <a:ext cx="7497360" cy="685080"/>
           </a:xfrm>
           <a:prstGeom prst="rect">
             <a:avLst/>
@@ -3398,7 +3334,7 @@
         <p:spPr>
           <a:xfrm>
             <a:off x="457200" y="1645920"/>
-            <a:ext cx="7497720" cy="685440"/>
+            <a:ext cx="7497360" cy="685080"/>
           </a:xfrm>
           <a:prstGeom prst="rect">
             <a:avLst/>
@@ -3459,7 +3395,7 @@
         <p:spPr>
           <a:xfrm>
             <a:off x="457200" y="2468880"/>
-            <a:ext cx="7497720" cy="411120"/>
+            <a:ext cx="7497360" cy="410760"/>
           </a:xfrm>
           <a:prstGeom prst="rect">
             <a:avLst/>
@@ -3520,7 +3456,7 @@
         <p:spPr>
           <a:xfrm>
             <a:off x="457200" y="3017520"/>
-            <a:ext cx="1599840" cy="383760"/>
+            <a:ext cx="1599480" cy="383400"/>
           </a:xfrm>
           <a:prstGeom prst="roundRect">
             <a:avLst>
@@ -3545,6 +3481,11 @@
             <a:noAutofit/>
           </a:bodyPr>
           <a:p>
+            <a:pPr>
+              <a:lnSpc>
+                <a:spcPct val="100000"/>
+              </a:lnSpc>
+            </a:pPr>
             <a:endParaRPr lang="en-US" sz="1800" b="0" u="none" strike="noStrike">
               <a:solidFill>
                 <a:srgbClr val="ffffff"/>
@@ -3565,7 +3506,7 @@
         <p:spPr>
           <a:xfrm>
             <a:off x="457200" y="3017520"/>
-            <a:ext cx="1599840" cy="383760"/>
+            <a:ext cx="1599480" cy="383400"/>
           </a:xfrm>
           <a:prstGeom prst="rect">
             <a:avLst/>
@@ -3626,7 +3567,7 @@
         <p:spPr>
           <a:xfrm>
             <a:off x="2148840" y="3017520"/>
-            <a:ext cx="1599840" cy="383760"/>
+            <a:ext cx="1599480" cy="383400"/>
           </a:xfrm>
           <a:prstGeom prst="roundRect">
             <a:avLst>
@@ -3651,6 +3592,11 @@
             <a:noAutofit/>
           </a:bodyPr>
           <a:p>
+            <a:pPr>
+              <a:lnSpc>
+                <a:spcPct val="100000"/>
+              </a:lnSpc>
+            </a:pPr>
             <a:endParaRPr lang="en-US" sz="1800" b="0" u="none" strike="noStrike">
               <a:solidFill>
                 <a:srgbClr val="ffffff"/>
@@ -3671,7 +3617,7 @@
         <p:spPr>
           <a:xfrm>
             <a:off x="2148840" y="3017520"/>
-            <a:ext cx="1599840" cy="383760"/>
+            <a:ext cx="1599480" cy="383400"/>
           </a:xfrm>
           <a:prstGeom prst="rect">
             <a:avLst/>
@@ -3732,7 +3678,7 @@
         <p:spPr>
           <a:xfrm>
             <a:off x="3840480" y="3017520"/>
-            <a:ext cx="1599840" cy="383760"/>
+            <a:ext cx="1599480" cy="383400"/>
           </a:xfrm>
           <a:prstGeom prst="roundRect">
             <a:avLst>
@@ -3757,6 +3703,11 @@
             <a:noAutofit/>
           </a:bodyPr>
           <a:p>
+            <a:pPr>
+              <a:lnSpc>
+                <a:spcPct val="100000"/>
+              </a:lnSpc>
+            </a:pPr>
             <a:endParaRPr lang="en-US" sz="1800" b="0" u="none" strike="noStrike">
               <a:solidFill>
                 <a:srgbClr val="ffffff"/>
@@ -3777,7 +3728,7 @@
         <p:spPr>
           <a:xfrm>
             <a:off x="3840480" y="3017520"/>
-            <a:ext cx="1599840" cy="383760"/>
+            <a:ext cx="1599480" cy="383400"/>
           </a:xfrm>
           <a:prstGeom prst="rect">
             <a:avLst/>
@@ -3838,7 +3789,7 @@
         <p:spPr>
           <a:xfrm>
             <a:off x="5532120" y="3017520"/>
-            <a:ext cx="1599840" cy="383760"/>
+            <a:ext cx="1599480" cy="383400"/>
           </a:xfrm>
           <a:prstGeom prst="roundRect">
             <a:avLst>
@@ -3863,6 +3814,11 @@
             <a:noAutofit/>
           </a:bodyPr>
           <a:p>
+            <a:pPr>
+              <a:lnSpc>
+                <a:spcPct val="100000"/>
+              </a:lnSpc>
+            </a:pPr>
             <a:endParaRPr lang="en-US" sz="1800" b="0" u="none" strike="noStrike">
               <a:solidFill>
                 <a:srgbClr val="ffffff"/>
@@ -3883,7 +3839,7 @@
         <p:spPr>
           <a:xfrm>
             <a:off x="5532120" y="3017520"/>
-            <a:ext cx="1599840" cy="383760"/>
+            <a:ext cx="1599480" cy="383400"/>
           </a:xfrm>
           <a:prstGeom prst="rect">
             <a:avLst/>
@@ -3944,7 +3900,7 @@
         <p:spPr>
           <a:xfrm>
             <a:off x="7223760" y="3017520"/>
-            <a:ext cx="1599840" cy="383760"/>
+            <a:ext cx="1599480" cy="383400"/>
           </a:xfrm>
           <a:prstGeom prst="roundRect">
             <a:avLst>
@@ -3969,6 +3925,11 @@
             <a:noAutofit/>
           </a:bodyPr>
           <a:p>
+            <a:pPr>
+              <a:lnSpc>
+                <a:spcPct val="100000"/>
+              </a:lnSpc>
+            </a:pPr>
             <a:endParaRPr lang="en-US" sz="1800" b="0" u="none" strike="noStrike">
               <a:solidFill>
                 <a:srgbClr val="ffffff"/>
@@ -3989,7 +3950,7 @@
         <p:spPr>
           <a:xfrm>
             <a:off x="7223760" y="3017520"/>
-            <a:ext cx="1599840" cy="383760"/>
+            <a:ext cx="1599480" cy="383400"/>
           </a:xfrm>
           <a:prstGeom prst="rect">
             <a:avLst/>
@@ -4050,7 +4011,7 @@
         <p:spPr>
           <a:xfrm>
             <a:off x="457200" y="3703320"/>
-            <a:ext cx="8229240" cy="18000"/>
+            <a:ext cx="8228880" cy="17640"/>
           </a:xfrm>
           <a:prstGeom prst="rect">
             <a:avLst/>
@@ -4073,6 +4034,11 @@
             <a:noAutofit/>
           </a:bodyPr>
           <a:p>
+            <a:pPr>
+              <a:lnSpc>
+                <a:spcPct val="100000"/>
+              </a:lnSpc>
+            </a:pPr>
             <a:endParaRPr lang="en-US" sz="1800" b="0" u="none" strike="noStrike">
               <a:solidFill>
                 <a:srgbClr val="ffffff"/>
@@ -4093,7 +4059,7 @@
         <p:spPr>
           <a:xfrm>
             <a:off x="457200" y="3794760"/>
-            <a:ext cx="8229240" cy="365400"/>
+            <a:ext cx="8228880" cy="365040"/>
           </a:xfrm>
           <a:prstGeom prst="rect">
             <a:avLst/>
@@ -4154,7 +4120,7 @@
         <p:spPr>
           <a:xfrm>
             <a:off x="6583680" y="4663440"/>
-            <a:ext cx="2285640" cy="319680"/>
+            <a:ext cx="2285280" cy="319320"/>
           </a:xfrm>
           <a:prstGeom prst="rect">
             <a:avLst/>
@@ -4252,7 +4218,7 @@
         <p:spPr>
           <a:xfrm>
             <a:off x="0" y="0"/>
-            <a:ext cx="164160" cy="5143320"/>
+            <a:ext cx="163800" cy="5142960"/>
           </a:xfrm>
           <a:prstGeom prst="rect">
             <a:avLst/>
@@ -4275,6 +4241,11 @@
             <a:noAutofit/>
           </a:bodyPr>
           <a:p>
+            <a:pPr>
+              <a:lnSpc>
+                <a:spcPct val="100000"/>
+              </a:lnSpc>
+            </a:pPr>
             <a:endParaRPr lang="en-US" sz="1800" b="0" u="none" strike="noStrike">
               <a:solidFill>
                 <a:srgbClr val="ffffff"/>
@@ -4295,7 +4266,7 @@
         <p:spPr>
           <a:xfrm>
             <a:off x="411480" y="255960"/>
-            <a:ext cx="8320680" cy="347040"/>
+            <a:ext cx="8320320" cy="346680"/>
           </a:xfrm>
           <a:prstGeom prst="rect">
             <a:avLst/>
@@ -4356,7 +4327,7 @@
         <p:spPr>
           <a:xfrm>
             <a:off x="411480" y="567000"/>
-            <a:ext cx="8320680" cy="548280"/>
+            <a:ext cx="8320320" cy="547920"/>
           </a:xfrm>
           <a:prstGeom prst="rect">
             <a:avLst/>
@@ -4417,7 +4388,7 @@
         <p:spPr>
           <a:xfrm>
             <a:off x="411480" y="1261800"/>
-            <a:ext cx="5851800" cy="420120"/>
+            <a:ext cx="5851440" cy="419760"/>
           </a:xfrm>
           <a:prstGeom prst="rect">
             <a:avLst/>
@@ -4440,6 +4411,11 @@
             <a:noAutofit/>
           </a:bodyPr>
           <a:p>
+            <a:pPr>
+              <a:lnSpc>
+                <a:spcPct val="100000"/>
+              </a:lnSpc>
+            </a:pPr>
             <a:endParaRPr lang="en-US" sz="1800" b="0" u="none" strike="noStrike">
               <a:solidFill>
                 <a:srgbClr val="000000"/>
@@ -4460,7 +4436,7 @@
         <p:spPr>
           <a:xfrm>
             <a:off x="411480" y="1261800"/>
-            <a:ext cx="731160" cy="420120"/>
+            <a:ext cx="730800" cy="419760"/>
           </a:xfrm>
           <a:prstGeom prst="rect">
             <a:avLst/>
@@ -4483,6 +4459,11 @@
             <a:noAutofit/>
           </a:bodyPr>
           <a:p>
+            <a:pPr>
+              <a:lnSpc>
+                <a:spcPct val="100000"/>
+              </a:lnSpc>
+            </a:pPr>
             <a:endParaRPr lang="en-US" sz="1800" b="0" u="none" strike="noStrike">
               <a:solidFill>
                 <a:srgbClr val="ffffff"/>
@@ -4503,7 +4484,7 @@
         <p:spPr>
           <a:xfrm>
             <a:off x="411480" y="1261800"/>
-            <a:ext cx="731160" cy="420120"/>
+            <a:ext cx="730800" cy="419760"/>
           </a:xfrm>
           <a:prstGeom prst="rect">
             <a:avLst/>
@@ -4564,7 +4545,7 @@
         <p:spPr>
           <a:xfrm>
             <a:off x="1234440" y="1307520"/>
-            <a:ext cx="2925720" cy="328680"/>
+            <a:ext cx="2925360" cy="328320"/>
           </a:xfrm>
           <a:prstGeom prst="rect">
             <a:avLst/>
@@ -4625,7 +4606,7 @@
         <p:spPr>
           <a:xfrm>
             <a:off x="4206240" y="1307520"/>
-            <a:ext cx="1965600" cy="328680"/>
+            <a:ext cx="1965240" cy="328320"/>
           </a:xfrm>
           <a:prstGeom prst="rect">
             <a:avLst/>
@@ -4686,7 +4667,7 @@
         <p:spPr>
           <a:xfrm>
             <a:off x="411480" y="1719000"/>
-            <a:ext cx="5851800" cy="420120"/>
+            <a:ext cx="5851440" cy="419760"/>
           </a:xfrm>
           <a:prstGeom prst="rect">
             <a:avLst/>
@@ -4709,6 +4690,11 @@
             <a:noAutofit/>
           </a:bodyPr>
           <a:p>
+            <a:pPr>
+              <a:lnSpc>
+                <a:spcPct val="100000"/>
+              </a:lnSpc>
+            </a:pPr>
             <a:endParaRPr lang="en-US" sz="1800" b="0" u="none" strike="noStrike">
               <a:solidFill>
                 <a:srgbClr val="000000"/>
@@ -4729,7 +4715,7 @@
         <p:spPr>
           <a:xfrm>
             <a:off x="411480" y="1719000"/>
-            <a:ext cx="731160" cy="420120"/>
+            <a:ext cx="730800" cy="419760"/>
           </a:xfrm>
           <a:prstGeom prst="rect">
             <a:avLst/>
@@ -4752,6 +4738,11 @@
             <a:noAutofit/>
           </a:bodyPr>
           <a:p>
+            <a:pPr>
+              <a:lnSpc>
+                <a:spcPct val="100000"/>
+              </a:lnSpc>
+            </a:pPr>
             <a:endParaRPr lang="en-US" sz="1800" b="0" u="none" strike="noStrike">
               <a:solidFill>
                 <a:srgbClr val="ffffff"/>
@@ -4772,7 +4763,7 @@
         <p:spPr>
           <a:xfrm>
             <a:off x="411480" y="1719000"/>
-            <a:ext cx="731160" cy="420120"/>
+            <a:ext cx="730800" cy="419760"/>
           </a:xfrm>
           <a:prstGeom prst="rect">
             <a:avLst/>
@@ -4833,7 +4824,7 @@
         <p:spPr>
           <a:xfrm>
             <a:off x="1234440" y="1764720"/>
-            <a:ext cx="2925720" cy="328680"/>
+            <a:ext cx="2925360" cy="328320"/>
           </a:xfrm>
           <a:prstGeom prst="rect">
             <a:avLst/>
@@ -4894,7 +4885,7 @@
         <p:spPr>
           <a:xfrm>
             <a:off x="4206240" y="1764720"/>
-            <a:ext cx="1965600" cy="328680"/>
+            <a:ext cx="1965240" cy="328320"/>
           </a:xfrm>
           <a:prstGeom prst="rect">
             <a:avLst/>
@@ -4955,7 +4946,7 @@
         <p:spPr>
           <a:xfrm>
             <a:off x="411480" y="2176200"/>
-            <a:ext cx="5851800" cy="420120"/>
+            <a:ext cx="5851440" cy="419760"/>
           </a:xfrm>
           <a:prstGeom prst="rect">
             <a:avLst/>
@@ -4978,6 +4969,11 @@
             <a:noAutofit/>
           </a:bodyPr>
           <a:p>
+            <a:pPr>
+              <a:lnSpc>
+                <a:spcPct val="100000"/>
+              </a:lnSpc>
+            </a:pPr>
             <a:endParaRPr lang="en-US" sz="1800" b="0" u="none" strike="noStrike">
               <a:solidFill>
                 <a:srgbClr val="000000"/>
@@ -4998,7 +4994,7 @@
         <p:spPr>
           <a:xfrm>
             <a:off x="411480" y="2176200"/>
-            <a:ext cx="731160" cy="420120"/>
+            <a:ext cx="730800" cy="419760"/>
           </a:xfrm>
           <a:prstGeom prst="rect">
             <a:avLst/>
@@ -5021,6 +5017,11 @@
             <a:noAutofit/>
           </a:bodyPr>
           <a:p>
+            <a:pPr>
+              <a:lnSpc>
+                <a:spcPct val="100000"/>
+              </a:lnSpc>
+            </a:pPr>
             <a:endParaRPr lang="en-US" sz="1800" b="0" u="none" strike="noStrike">
               <a:solidFill>
                 <a:srgbClr val="ffffff"/>
@@ -5041,7 +5042,7 @@
         <p:spPr>
           <a:xfrm>
             <a:off x="411480" y="2176200"/>
-            <a:ext cx="731160" cy="420120"/>
+            <a:ext cx="730800" cy="419760"/>
           </a:xfrm>
           <a:prstGeom prst="rect">
             <a:avLst/>
@@ -5102,7 +5103,7 @@
         <p:spPr>
           <a:xfrm>
             <a:off x="1234440" y="2221920"/>
-            <a:ext cx="2925720" cy="328680"/>
+            <a:ext cx="2925360" cy="328320"/>
           </a:xfrm>
           <a:prstGeom prst="rect">
             <a:avLst/>
@@ -5163,7 +5164,7 @@
         <p:spPr>
           <a:xfrm>
             <a:off x="4206240" y="2221920"/>
-            <a:ext cx="1965600" cy="328680"/>
+            <a:ext cx="1965240" cy="328320"/>
           </a:xfrm>
           <a:prstGeom prst="rect">
             <a:avLst/>
@@ -5224,7 +5225,7 @@
         <p:spPr>
           <a:xfrm>
             <a:off x="411480" y="2633400"/>
-            <a:ext cx="5851800" cy="420120"/>
+            <a:ext cx="5851440" cy="419760"/>
           </a:xfrm>
           <a:prstGeom prst="rect">
             <a:avLst/>
@@ -5247,6 +5248,11 @@
             <a:noAutofit/>
           </a:bodyPr>
           <a:p>
+            <a:pPr>
+              <a:lnSpc>
+                <a:spcPct val="100000"/>
+              </a:lnSpc>
+            </a:pPr>
             <a:endParaRPr lang="en-US" sz="1800" b="0" u="none" strike="noStrike">
               <a:solidFill>
                 <a:srgbClr val="000000"/>
@@ -5267,7 +5273,7 @@
         <p:spPr>
           <a:xfrm>
             <a:off x="411480" y="2633400"/>
-            <a:ext cx="731160" cy="420120"/>
+            <a:ext cx="730800" cy="419760"/>
           </a:xfrm>
           <a:prstGeom prst="rect">
             <a:avLst/>
@@ -5290,6 +5296,11 @@
             <a:noAutofit/>
           </a:bodyPr>
           <a:p>
+            <a:pPr>
+              <a:lnSpc>
+                <a:spcPct val="100000"/>
+              </a:lnSpc>
+            </a:pPr>
             <a:endParaRPr lang="en-US" sz="1800" b="0" u="none" strike="noStrike">
               <a:solidFill>
                 <a:srgbClr val="ffffff"/>
@@ -5310,7 +5321,7 @@
         <p:spPr>
           <a:xfrm>
             <a:off x="411480" y="2633400"/>
-            <a:ext cx="731160" cy="420120"/>
+            <a:ext cx="730800" cy="419760"/>
           </a:xfrm>
           <a:prstGeom prst="rect">
             <a:avLst/>
@@ -5371,7 +5382,7 @@
         <p:spPr>
           <a:xfrm>
             <a:off x="1234440" y="2679120"/>
-            <a:ext cx="2925720" cy="328680"/>
+            <a:ext cx="2925360" cy="328320"/>
           </a:xfrm>
           <a:prstGeom prst="rect">
             <a:avLst/>
@@ -5432,7 +5443,7 @@
         <p:spPr>
           <a:xfrm>
             <a:off x="4206240" y="2679120"/>
-            <a:ext cx="1965600" cy="328680"/>
+            <a:ext cx="1965240" cy="328320"/>
           </a:xfrm>
           <a:prstGeom prst="rect">
             <a:avLst/>
@@ -5493,7 +5504,7 @@
         <p:spPr>
           <a:xfrm>
             <a:off x="411480" y="3090600"/>
-            <a:ext cx="5851800" cy="420120"/>
+            <a:ext cx="5851440" cy="419760"/>
           </a:xfrm>
           <a:prstGeom prst="rect">
             <a:avLst/>
@@ -5516,6 +5527,11 @@
             <a:noAutofit/>
           </a:bodyPr>
           <a:p>
+            <a:pPr>
+              <a:lnSpc>
+                <a:spcPct val="100000"/>
+              </a:lnSpc>
+            </a:pPr>
             <a:endParaRPr lang="en-US" sz="1800" b="0" u="none" strike="noStrike">
               <a:solidFill>
                 <a:srgbClr val="000000"/>
@@ -5536,7 +5552,7 @@
         <p:spPr>
           <a:xfrm>
             <a:off x="411480" y="3090600"/>
-            <a:ext cx="731160" cy="420120"/>
+            <a:ext cx="730800" cy="419760"/>
           </a:xfrm>
           <a:prstGeom prst="rect">
             <a:avLst/>
@@ -5559,6 +5575,11 @@
             <a:noAutofit/>
           </a:bodyPr>
           <a:p>
+            <a:pPr>
+              <a:lnSpc>
+                <a:spcPct val="100000"/>
+              </a:lnSpc>
+            </a:pPr>
             <a:endParaRPr lang="en-US" sz="1800" b="0" u="none" strike="noStrike">
               <a:solidFill>
                 <a:srgbClr val="ffffff"/>
@@ -5579,7 +5600,7 @@
         <p:spPr>
           <a:xfrm>
             <a:off x="411480" y="3090600"/>
-            <a:ext cx="731160" cy="420120"/>
+            <a:ext cx="730800" cy="419760"/>
           </a:xfrm>
           <a:prstGeom prst="rect">
             <a:avLst/>
@@ -5640,7 +5661,7 @@
         <p:spPr>
           <a:xfrm>
             <a:off x="1234440" y="3136320"/>
-            <a:ext cx="2925720" cy="328680"/>
+            <a:ext cx="2925360" cy="328320"/>
           </a:xfrm>
           <a:prstGeom prst="rect">
             <a:avLst/>
@@ -5701,7 +5722,7 @@
         <p:spPr>
           <a:xfrm>
             <a:off x="4206240" y="3136320"/>
-            <a:ext cx="1965600" cy="328680"/>
+            <a:ext cx="1965240" cy="328320"/>
           </a:xfrm>
           <a:prstGeom prst="rect">
             <a:avLst/>
@@ -5762,7 +5783,7 @@
         <p:spPr>
           <a:xfrm>
             <a:off x="411480" y="3547800"/>
-            <a:ext cx="5851800" cy="420120"/>
+            <a:ext cx="5851440" cy="419760"/>
           </a:xfrm>
           <a:prstGeom prst="rect">
             <a:avLst/>
@@ -5785,6 +5806,11 @@
             <a:noAutofit/>
           </a:bodyPr>
           <a:p>
+            <a:pPr>
+              <a:lnSpc>
+                <a:spcPct val="100000"/>
+              </a:lnSpc>
+            </a:pPr>
             <a:endParaRPr lang="en-US" sz="1800" b="0" u="none" strike="noStrike">
               <a:solidFill>
                 <a:srgbClr val="000000"/>
@@ -5805,7 +5831,7 @@
         <p:spPr>
           <a:xfrm>
             <a:off x="411480" y="3547800"/>
-            <a:ext cx="731160" cy="420120"/>
+            <a:ext cx="730800" cy="419760"/>
           </a:xfrm>
           <a:prstGeom prst="rect">
             <a:avLst/>
@@ -5828,6 +5854,11 @@
             <a:noAutofit/>
           </a:bodyPr>
           <a:p>
+            <a:pPr>
+              <a:lnSpc>
+                <a:spcPct val="100000"/>
+              </a:lnSpc>
+            </a:pPr>
             <a:endParaRPr lang="en-US" sz="1800" b="0" u="none" strike="noStrike">
               <a:solidFill>
                 <a:srgbClr val="ffffff"/>
@@ -5848,7 +5879,7 @@
         <p:spPr>
           <a:xfrm>
             <a:off x="411480" y="3547800"/>
-            <a:ext cx="731160" cy="420120"/>
+            <a:ext cx="730800" cy="419760"/>
           </a:xfrm>
           <a:prstGeom prst="rect">
             <a:avLst/>
@@ -5909,7 +5940,7 @@
         <p:spPr>
           <a:xfrm>
             <a:off x="1234440" y="3593520"/>
-            <a:ext cx="2925720" cy="328680"/>
+            <a:ext cx="2925360" cy="328320"/>
           </a:xfrm>
           <a:prstGeom prst="rect">
             <a:avLst/>
@@ -5970,7 +6001,7 @@
         <p:spPr>
           <a:xfrm>
             <a:off x="4206240" y="3593520"/>
-            <a:ext cx="1965600" cy="328680"/>
+            <a:ext cx="1965240" cy="328320"/>
           </a:xfrm>
           <a:prstGeom prst="rect">
             <a:avLst/>
@@ -6031,7 +6062,7 @@
         <p:spPr>
           <a:xfrm>
             <a:off x="411480" y="4005000"/>
-            <a:ext cx="5851800" cy="420120"/>
+            <a:ext cx="5851440" cy="419760"/>
           </a:xfrm>
           <a:prstGeom prst="rect">
             <a:avLst/>
@@ -6054,6 +6085,11 @@
             <a:noAutofit/>
           </a:bodyPr>
           <a:p>
+            <a:pPr>
+              <a:lnSpc>
+                <a:spcPct val="100000"/>
+              </a:lnSpc>
+            </a:pPr>
             <a:endParaRPr lang="en-US" sz="1800" b="0" u="none" strike="noStrike">
               <a:solidFill>
                 <a:srgbClr val="000000"/>
@@ -6074,7 +6110,7 @@
         <p:spPr>
           <a:xfrm>
             <a:off x="411480" y="4005000"/>
-            <a:ext cx="731160" cy="420120"/>
+            <a:ext cx="730800" cy="419760"/>
           </a:xfrm>
           <a:prstGeom prst="rect">
             <a:avLst/>
@@ -6097,6 +6133,11 @@
             <a:noAutofit/>
           </a:bodyPr>
           <a:p>
+            <a:pPr>
+              <a:lnSpc>
+                <a:spcPct val="100000"/>
+              </a:lnSpc>
+            </a:pPr>
             <a:endParaRPr lang="en-US" sz="1800" b="0" u="none" strike="noStrike">
               <a:solidFill>
                 <a:srgbClr val="ffffff"/>
@@ -6117,7 +6158,7 @@
         <p:spPr>
           <a:xfrm>
             <a:off x="411480" y="4005000"/>
-            <a:ext cx="731160" cy="420120"/>
+            <a:ext cx="730800" cy="419760"/>
           </a:xfrm>
           <a:prstGeom prst="rect">
             <a:avLst/>
@@ -6178,7 +6219,7 @@
         <p:spPr>
           <a:xfrm>
             <a:off x="1234440" y="4050720"/>
-            <a:ext cx="2925720" cy="328680"/>
+            <a:ext cx="2925360" cy="328320"/>
           </a:xfrm>
           <a:prstGeom prst="rect">
             <a:avLst/>
@@ -6239,7 +6280,7 @@
         <p:spPr>
           <a:xfrm>
             <a:off x="4206240" y="4050720"/>
-            <a:ext cx="1965600" cy="328680"/>
+            <a:ext cx="1965240" cy="328320"/>
           </a:xfrm>
           <a:prstGeom prst="rect">
             <a:avLst/>
@@ -6300,7 +6341,7 @@
         <p:spPr>
           <a:xfrm>
             <a:off x="411480" y="4462200"/>
-            <a:ext cx="5851800" cy="420120"/>
+            <a:ext cx="5851440" cy="419760"/>
           </a:xfrm>
           <a:prstGeom prst="rect">
             <a:avLst/>
@@ -6323,6 +6364,11 @@
             <a:noAutofit/>
           </a:bodyPr>
           <a:p>
+            <a:pPr>
+              <a:lnSpc>
+                <a:spcPct val="100000"/>
+              </a:lnSpc>
+            </a:pPr>
             <a:endParaRPr lang="en-US" sz="1800" b="0" u="none" strike="noStrike">
               <a:solidFill>
                 <a:srgbClr val="000000"/>
@@ -6343,7 +6389,7 @@
         <p:spPr>
           <a:xfrm>
             <a:off x="411480" y="4462200"/>
-            <a:ext cx="731160" cy="420120"/>
+            <a:ext cx="730800" cy="419760"/>
           </a:xfrm>
           <a:prstGeom prst="rect">
             <a:avLst/>
@@ -6366,6 +6412,11 @@
             <a:noAutofit/>
           </a:bodyPr>
           <a:p>
+            <a:pPr>
+              <a:lnSpc>
+                <a:spcPct val="100000"/>
+              </a:lnSpc>
+            </a:pPr>
             <a:endParaRPr lang="en-US" sz="1800" b="0" u="none" strike="noStrike">
               <a:solidFill>
                 <a:srgbClr val="ffffff"/>
@@ -6386,7 +6437,7 @@
         <p:spPr>
           <a:xfrm>
             <a:off x="411480" y="4462200"/>
-            <a:ext cx="731160" cy="420120"/>
+            <a:ext cx="730800" cy="419760"/>
           </a:xfrm>
           <a:prstGeom prst="rect">
             <a:avLst/>
@@ -6447,7 +6498,7 @@
         <p:spPr>
           <a:xfrm>
             <a:off x="1234440" y="4507920"/>
-            <a:ext cx="2925720" cy="328680"/>
+            <a:ext cx="2925360" cy="328320"/>
           </a:xfrm>
           <a:prstGeom prst="rect">
             <a:avLst/>
@@ -6508,7 +6559,7 @@
         <p:spPr>
           <a:xfrm>
             <a:off x="4206240" y="4507920"/>
-            <a:ext cx="1965600" cy="328680"/>
+            <a:ext cx="1965240" cy="328320"/>
           </a:xfrm>
           <a:prstGeom prst="rect">
             <a:avLst/>
@@ -6569,7 +6620,7 @@
         <p:spPr>
           <a:xfrm>
             <a:off x="6492240" y="1261800"/>
-            <a:ext cx="2331360" cy="3629880"/>
+            <a:ext cx="2331000" cy="3629520"/>
           </a:xfrm>
           <a:prstGeom prst="rect">
             <a:avLst/>
@@ -6599,6 +6650,11 @@
             <a:noAutofit/>
           </a:bodyPr>
           <a:p>
+            <a:pPr>
+              <a:lnSpc>
+                <a:spcPct val="100000"/>
+              </a:lnSpc>
+            </a:pPr>
             <a:endParaRPr lang="en-US" sz="1800" b="0" u="none" strike="noStrike">
               <a:solidFill>
                 <a:srgbClr val="ffffff"/>
@@ -6622,8 +6678,8 @@
         </p:blipFill>
         <p:spPr>
           <a:xfrm>
-            <a:off x="7040880" y="1371600"/>
-            <a:ext cx="502560" cy="502560"/>
+            <a:off x="6858000" y="1371600"/>
+            <a:ext cx="502200" cy="502200"/>
           </a:xfrm>
           <a:prstGeom prst="rect">
             <a:avLst/>
@@ -6643,7 +6699,7 @@
         <p:spPr>
           <a:xfrm>
             <a:off x="6492240" y="1371600"/>
-            <a:ext cx="2331360" cy="502560"/>
+            <a:ext cx="2331000" cy="502200"/>
           </a:xfrm>
           <a:prstGeom prst="rect">
             <a:avLst/>
@@ -6682,7 +6738,7 @@
                 <a:latin typeface="Calibri"/>
                 <a:ea typeface="Calibri"/>
               </a:rPr>
-              <a:t>Sécurité</a:t>
+              <a:t>  Sécurité</a:t>
             </a:r>
             <a:endParaRPr lang="en-US" sz="1400" b="0" u="none" strike="noStrike">
               <a:solidFill>
@@ -6704,7 +6760,7 @@
         <p:spPr>
           <a:xfrm>
             <a:off x="6583680" y="2030040"/>
-            <a:ext cx="2121120" cy="420120"/>
+            <a:ext cx="2120760" cy="419760"/>
           </a:xfrm>
           <a:prstGeom prst="rect">
             <a:avLst/>
@@ -6765,7 +6821,7 @@
         <p:spPr>
           <a:xfrm>
             <a:off x="6583680" y="2523600"/>
-            <a:ext cx="2121120" cy="420120"/>
+            <a:ext cx="2120760" cy="419760"/>
           </a:xfrm>
           <a:prstGeom prst="rect">
             <a:avLst/>
@@ -6826,7 +6882,7 @@
         <p:spPr>
           <a:xfrm>
             <a:off x="6583680" y="3017520"/>
-            <a:ext cx="2121120" cy="420120"/>
+            <a:ext cx="2120760" cy="419760"/>
           </a:xfrm>
           <a:prstGeom prst="rect">
             <a:avLst/>
@@ -6887,7 +6943,7 @@
         <p:spPr>
           <a:xfrm>
             <a:off x="6583680" y="3511440"/>
-            <a:ext cx="2121120" cy="420120"/>
+            <a:ext cx="2120760" cy="419760"/>
           </a:xfrm>
           <a:prstGeom prst="rect">
             <a:avLst/>
@@ -6948,7 +7004,7 @@
         <p:spPr>
           <a:xfrm>
             <a:off x="6583680" y="4005000"/>
-            <a:ext cx="2121120" cy="420120"/>
+            <a:ext cx="2120760" cy="419760"/>
           </a:xfrm>
           <a:prstGeom prst="rect">
             <a:avLst/>
@@ -7009,7 +7065,7 @@
         <p:spPr>
           <a:xfrm>
             <a:off x="6583680" y="4498920"/>
-            <a:ext cx="2121120" cy="420120"/>
+            <a:ext cx="2120760" cy="419760"/>
           </a:xfrm>
           <a:prstGeom prst="rect">
             <a:avLst/>
@@ -7107,7 +7163,7 @@
         <p:spPr>
           <a:xfrm>
             <a:off x="0" y="0"/>
-            <a:ext cx="164160" cy="5143320"/>
+            <a:ext cx="163800" cy="5142960"/>
           </a:xfrm>
           <a:prstGeom prst="rect">
             <a:avLst/>
@@ -7130,6 +7186,11 @@
             <a:noAutofit/>
           </a:bodyPr>
           <a:p>
+            <a:pPr>
+              <a:lnSpc>
+                <a:spcPct val="100000"/>
+              </a:lnSpc>
+            </a:pPr>
             <a:endParaRPr lang="en-US" sz="1800" b="0" u="none" strike="noStrike">
               <a:solidFill>
                 <a:srgbClr val="000000"/>
@@ -7150,7 +7211,7 @@
         <p:spPr>
           <a:xfrm>
             <a:off x="411480" y="255960"/>
-            <a:ext cx="8229240" cy="347040"/>
+            <a:ext cx="8228880" cy="346680"/>
           </a:xfrm>
           <a:prstGeom prst="rect">
             <a:avLst/>
@@ -7211,7 +7272,7 @@
         <p:spPr>
           <a:xfrm>
             <a:off x="411480" y="567000"/>
-            <a:ext cx="8229240" cy="548280"/>
+            <a:ext cx="8228880" cy="547920"/>
           </a:xfrm>
           <a:prstGeom prst="rect">
             <a:avLst/>
@@ -7272,7 +7333,7 @@
         <p:spPr>
           <a:xfrm>
             <a:off x="411480" y="1234440"/>
-            <a:ext cx="8320680" cy="658080"/>
+            <a:ext cx="8320320" cy="657720"/>
           </a:xfrm>
           <a:prstGeom prst="rect">
             <a:avLst/>
@@ -7295,6 +7356,11 @@
             <a:noAutofit/>
           </a:bodyPr>
           <a:p>
+            <a:pPr>
+              <a:lnSpc>
+                <a:spcPct val="100000"/>
+              </a:lnSpc>
+            </a:pPr>
             <a:endParaRPr lang="en-US" sz="1800" b="0" u="none" strike="noStrike">
               <a:solidFill>
                 <a:srgbClr val="ffffff"/>
@@ -7315,7 +7381,7 @@
         <p:spPr>
           <a:xfrm>
             <a:off x="411480" y="1234440"/>
-            <a:ext cx="8320680" cy="658080"/>
+            <a:ext cx="8320320" cy="657720"/>
           </a:xfrm>
           <a:prstGeom prst="rect">
             <a:avLst/>
@@ -7376,7 +7442,7 @@
         <p:spPr>
           <a:xfrm>
             <a:off x="411480" y="2084760"/>
-            <a:ext cx="2742840" cy="2742840"/>
+            <a:ext cx="2742480" cy="2742480"/>
           </a:xfrm>
           <a:prstGeom prst="rect">
             <a:avLst/>
@@ -7406,6 +7472,11 @@
             <a:noAutofit/>
           </a:bodyPr>
           <a:p>
+            <a:pPr>
+              <a:lnSpc>
+                <a:spcPct val="100000"/>
+              </a:lnSpc>
+            </a:pPr>
             <a:endParaRPr lang="en-US" sz="1800" b="0" u="none" strike="noStrike">
               <a:solidFill>
                 <a:srgbClr val="ffffff"/>
@@ -7430,7 +7501,7 @@
         <p:spPr>
           <a:xfrm>
             <a:off x="594360" y="2176200"/>
-            <a:ext cx="456840" cy="456840"/>
+            <a:ext cx="456480" cy="456480"/>
           </a:xfrm>
           <a:prstGeom prst="rect">
             <a:avLst/>
@@ -7450,7 +7521,7 @@
         <p:spPr>
           <a:xfrm>
             <a:off x="548640" y="2743200"/>
-            <a:ext cx="2468520" cy="411120"/>
+            <a:ext cx="2468160" cy="410760"/>
           </a:xfrm>
           <a:prstGeom prst="rect">
             <a:avLst/>
@@ -7511,7 +7582,7 @@
         <p:spPr>
           <a:xfrm>
             <a:off x="594360" y="3218760"/>
-            <a:ext cx="2422800" cy="347040"/>
+            <a:ext cx="2422440" cy="346680"/>
           </a:xfrm>
           <a:prstGeom prst="rect">
             <a:avLst/>
@@ -7572,7 +7643,7 @@
         <p:spPr>
           <a:xfrm>
             <a:off x="594360" y="3602880"/>
-            <a:ext cx="2422800" cy="347040"/>
+            <a:ext cx="2422440" cy="346680"/>
           </a:xfrm>
           <a:prstGeom prst="rect">
             <a:avLst/>
@@ -7633,7 +7704,7 @@
         <p:spPr>
           <a:xfrm>
             <a:off x="594360" y="3986640"/>
-            <a:ext cx="2422800" cy="347040"/>
+            <a:ext cx="2422440" cy="346680"/>
           </a:xfrm>
           <a:prstGeom prst="rect">
             <a:avLst/>
@@ -7694,7 +7765,7 @@
         <p:spPr>
           <a:xfrm>
             <a:off x="594360" y="4370760"/>
-            <a:ext cx="2422800" cy="347040"/>
+            <a:ext cx="2422440" cy="346680"/>
           </a:xfrm>
           <a:prstGeom prst="rect">
             <a:avLst/>
@@ -7755,7 +7826,7 @@
         <p:spPr>
           <a:xfrm>
             <a:off x="3310200" y="2084760"/>
-            <a:ext cx="2742840" cy="2742840"/>
+            <a:ext cx="2742480" cy="2742480"/>
           </a:xfrm>
           <a:prstGeom prst="rect">
             <a:avLst/>
@@ -7785,6 +7856,11 @@
             <a:noAutofit/>
           </a:bodyPr>
           <a:p>
+            <a:pPr>
+              <a:lnSpc>
+                <a:spcPct val="100000"/>
+              </a:lnSpc>
+            </a:pPr>
             <a:endParaRPr lang="en-US" sz="1800" b="0" u="none" strike="noStrike">
               <a:solidFill>
                 <a:srgbClr val="ffffff"/>
@@ -7809,7 +7885,7 @@
         <p:spPr>
           <a:xfrm>
             <a:off x="3493080" y="2176200"/>
-            <a:ext cx="456840" cy="456840"/>
+            <a:ext cx="456480" cy="456480"/>
           </a:xfrm>
           <a:prstGeom prst="rect">
             <a:avLst/>
@@ -7829,7 +7905,7 @@
         <p:spPr>
           <a:xfrm>
             <a:off x="3447360" y="2743200"/>
-            <a:ext cx="2468520" cy="411120"/>
+            <a:ext cx="2468160" cy="410760"/>
           </a:xfrm>
           <a:prstGeom prst="rect">
             <a:avLst/>
@@ -7890,7 +7966,7 @@
         <p:spPr>
           <a:xfrm>
             <a:off x="3493080" y="3218760"/>
-            <a:ext cx="2422800" cy="347040"/>
+            <a:ext cx="2422440" cy="346680"/>
           </a:xfrm>
           <a:prstGeom prst="rect">
             <a:avLst/>
@@ -7951,7 +8027,7 @@
         <p:spPr>
           <a:xfrm>
             <a:off x="3493080" y="3602880"/>
-            <a:ext cx="2422800" cy="347040"/>
+            <a:ext cx="2422440" cy="346680"/>
           </a:xfrm>
           <a:prstGeom prst="rect">
             <a:avLst/>
@@ -8012,7 +8088,7 @@
         <p:spPr>
           <a:xfrm>
             <a:off x="3493080" y="3986640"/>
-            <a:ext cx="2422800" cy="347040"/>
+            <a:ext cx="2422440" cy="346680"/>
           </a:xfrm>
           <a:prstGeom prst="rect">
             <a:avLst/>
@@ -8073,7 +8149,7 @@
         <p:spPr>
           <a:xfrm>
             <a:off x="3493080" y="4370760"/>
-            <a:ext cx="2422800" cy="347040"/>
+            <a:ext cx="2422440" cy="346680"/>
           </a:xfrm>
           <a:prstGeom prst="rect">
             <a:avLst/>
@@ -8134,7 +8210,7 @@
         <p:spPr>
           <a:xfrm>
             <a:off x="6208920" y="2084760"/>
-            <a:ext cx="2742840" cy="2742840"/>
+            <a:ext cx="2742480" cy="2742480"/>
           </a:xfrm>
           <a:prstGeom prst="rect">
             <a:avLst/>
@@ -8164,6 +8240,11 @@
             <a:noAutofit/>
           </a:bodyPr>
           <a:p>
+            <a:pPr>
+              <a:lnSpc>
+                <a:spcPct val="100000"/>
+              </a:lnSpc>
+            </a:pPr>
             <a:endParaRPr lang="en-US" sz="1800" b="0" u="none" strike="noStrike">
               <a:solidFill>
                 <a:srgbClr val="000000"/>
@@ -8188,7 +8269,7 @@
         <p:spPr>
           <a:xfrm>
             <a:off x="6391800" y="2176200"/>
-            <a:ext cx="456840" cy="456840"/>
+            <a:ext cx="456480" cy="456480"/>
           </a:xfrm>
           <a:prstGeom prst="rect">
             <a:avLst/>
@@ -8208,7 +8289,7 @@
         <p:spPr>
           <a:xfrm>
             <a:off x="6346080" y="2743200"/>
-            <a:ext cx="2468520" cy="411120"/>
+            <a:ext cx="2468160" cy="410760"/>
           </a:xfrm>
           <a:prstGeom prst="rect">
             <a:avLst/>
@@ -8269,7 +8350,7 @@
         <p:spPr>
           <a:xfrm>
             <a:off x="6391800" y="3218760"/>
-            <a:ext cx="2422800" cy="347040"/>
+            <a:ext cx="2422440" cy="346680"/>
           </a:xfrm>
           <a:prstGeom prst="rect">
             <a:avLst/>
@@ -8330,7 +8411,7 @@
         <p:spPr>
           <a:xfrm>
             <a:off x="6391800" y="3602880"/>
-            <a:ext cx="2422800" cy="347040"/>
+            <a:ext cx="2422440" cy="346680"/>
           </a:xfrm>
           <a:prstGeom prst="rect">
             <a:avLst/>
@@ -8391,7 +8472,7 @@
         <p:spPr>
           <a:xfrm>
             <a:off x="6391800" y="3986640"/>
-            <a:ext cx="2422800" cy="347040"/>
+            <a:ext cx="2422440" cy="346680"/>
           </a:xfrm>
           <a:prstGeom prst="rect">
             <a:avLst/>
@@ -8452,7 +8533,7 @@
         <p:spPr>
           <a:xfrm>
             <a:off x="6391800" y="4370760"/>
-            <a:ext cx="2422800" cy="347040"/>
+            <a:ext cx="2422440" cy="346680"/>
           </a:xfrm>
           <a:prstGeom prst="rect">
             <a:avLst/>
@@ -8550,7 +8631,7 @@
         <p:spPr>
           <a:xfrm>
             <a:off x="0" y="0"/>
-            <a:ext cx="164160" cy="5143320"/>
+            <a:ext cx="163800" cy="5142960"/>
           </a:xfrm>
           <a:prstGeom prst="rect">
             <a:avLst/>
@@ -8573,6 +8654,11 @@
             <a:noAutofit/>
           </a:bodyPr>
           <a:p>
+            <a:pPr>
+              <a:lnSpc>
+                <a:spcPct val="100000"/>
+              </a:lnSpc>
+            </a:pPr>
             <a:endParaRPr lang="en-US" sz="1800" b="0" u="none" strike="noStrike">
               <a:solidFill>
                 <a:srgbClr val="ffffff"/>
@@ -8593,7 +8679,7 @@
         <p:spPr>
           <a:xfrm>
             <a:off x="411480" y="255960"/>
-            <a:ext cx="8320680" cy="548280"/>
+            <a:ext cx="8320320" cy="547920"/>
           </a:xfrm>
           <a:prstGeom prst="rect">
             <a:avLst/>
@@ -8654,7 +8740,7 @@
         <p:spPr>
           <a:xfrm>
             <a:off x="411480" y="1078920"/>
-            <a:ext cx="2742840" cy="1718640"/>
+            <a:ext cx="2742480" cy="1718280"/>
           </a:xfrm>
           <a:prstGeom prst="rect">
             <a:avLst/>
@@ -8684,6 +8770,11 @@
             <a:noAutofit/>
           </a:bodyPr>
           <a:p>
+            <a:pPr>
+              <a:lnSpc>
+                <a:spcPct val="100000"/>
+              </a:lnSpc>
+            </a:pPr>
             <a:endParaRPr lang="en-US" sz="1800" b="0" u="none" strike="noStrike">
               <a:solidFill>
                 <a:srgbClr val="ffffff"/>
@@ -8704,7 +8795,7 @@
         <p:spPr>
           <a:xfrm>
             <a:off x="411480" y="1243440"/>
-            <a:ext cx="2742840" cy="868320"/>
+            <a:ext cx="2742480" cy="867960"/>
           </a:xfrm>
           <a:prstGeom prst="rect">
             <a:avLst/>
@@ -8765,7 +8856,7 @@
         <p:spPr>
           <a:xfrm>
             <a:off x="411480" y="2221920"/>
-            <a:ext cx="2742840" cy="411120"/>
+            <a:ext cx="2742480" cy="410760"/>
           </a:xfrm>
           <a:prstGeom prst="rect">
             <a:avLst/>
@@ -8826,7 +8917,7 @@
         <p:spPr>
           <a:xfrm>
             <a:off x="3310200" y="1078920"/>
-            <a:ext cx="2742840" cy="1718640"/>
+            <a:ext cx="2742480" cy="1718280"/>
           </a:xfrm>
           <a:prstGeom prst="rect">
             <a:avLst/>
@@ -8856,6 +8947,11 @@
             <a:noAutofit/>
           </a:bodyPr>
           <a:p>
+            <a:pPr>
+              <a:lnSpc>
+                <a:spcPct val="100000"/>
+              </a:lnSpc>
+            </a:pPr>
             <a:endParaRPr lang="en-US" sz="1800" b="0" u="none" strike="noStrike">
               <a:solidFill>
                 <a:srgbClr val="ffffff"/>
@@ -8876,7 +8972,7 @@
         <p:spPr>
           <a:xfrm>
             <a:off x="3310200" y="1243440"/>
-            <a:ext cx="2742840" cy="868320"/>
+            <a:ext cx="2742480" cy="867960"/>
           </a:xfrm>
           <a:prstGeom prst="rect">
             <a:avLst/>
@@ -8937,7 +9033,7 @@
         <p:spPr>
           <a:xfrm>
             <a:off x="3310200" y="2221920"/>
-            <a:ext cx="2742840" cy="411120"/>
+            <a:ext cx="2742480" cy="410760"/>
           </a:xfrm>
           <a:prstGeom prst="rect">
             <a:avLst/>
@@ -8998,7 +9094,7 @@
         <p:spPr>
           <a:xfrm>
             <a:off x="6208920" y="1078920"/>
-            <a:ext cx="2742840" cy="1718640"/>
+            <a:ext cx="2742480" cy="1718280"/>
           </a:xfrm>
           <a:prstGeom prst="rect">
             <a:avLst/>
@@ -9028,6 +9124,11 @@
             <a:noAutofit/>
           </a:bodyPr>
           <a:p>
+            <a:pPr>
+              <a:lnSpc>
+                <a:spcPct val="100000"/>
+              </a:lnSpc>
+            </a:pPr>
             <a:endParaRPr lang="en-US" sz="1800" b="0" u="none" strike="noStrike">
               <a:solidFill>
                 <a:srgbClr val="ffffff"/>
@@ -9048,7 +9149,7 @@
         <p:spPr>
           <a:xfrm>
             <a:off x="6208920" y="1243440"/>
-            <a:ext cx="2742840" cy="868320"/>
+            <a:ext cx="2742480" cy="867960"/>
           </a:xfrm>
           <a:prstGeom prst="rect">
             <a:avLst/>
@@ -9109,7 +9210,7 @@
         <p:spPr>
           <a:xfrm>
             <a:off x="6208920" y="2221920"/>
-            <a:ext cx="2742840" cy="411120"/>
+            <a:ext cx="2742480" cy="410760"/>
           </a:xfrm>
           <a:prstGeom prst="rect">
             <a:avLst/>
@@ -9170,7 +9271,7 @@
         <p:spPr>
           <a:xfrm>
             <a:off x="411480" y="2999160"/>
-            <a:ext cx="2742840" cy="1718640"/>
+            <a:ext cx="2742480" cy="1718280"/>
           </a:xfrm>
           <a:prstGeom prst="rect">
             <a:avLst/>
@@ -9200,6 +9301,11 @@
             <a:noAutofit/>
           </a:bodyPr>
           <a:p>
+            <a:pPr>
+              <a:lnSpc>
+                <a:spcPct val="100000"/>
+              </a:lnSpc>
+            </a:pPr>
             <a:endParaRPr lang="en-US" sz="1800" b="0" u="none" strike="noStrike">
               <a:solidFill>
                 <a:srgbClr val="ffffff"/>
@@ -9220,7 +9326,7 @@
         <p:spPr>
           <a:xfrm>
             <a:off x="411480" y="3163680"/>
-            <a:ext cx="2742840" cy="868320"/>
+            <a:ext cx="2742480" cy="867960"/>
           </a:xfrm>
           <a:prstGeom prst="rect">
             <a:avLst/>
@@ -9281,7 +9387,7 @@
         <p:spPr>
           <a:xfrm>
             <a:off x="411480" y="4142160"/>
-            <a:ext cx="2742840" cy="411120"/>
+            <a:ext cx="2742480" cy="410760"/>
           </a:xfrm>
           <a:prstGeom prst="rect">
             <a:avLst/>
@@ -9342,7 +9448,7 @@
         <p:spPr>
           <a:xfrm>
             <a:off x="3310200" y="2999160"/>
-            <a:ext cx="2742840" cy="1718640"/>
+            <a:ext cx="2742480" cy="1718280"/>
           </a:xfrm>
           <a:prstGeom prst="rect">
             <a:avLst/>
@@ -9372,6 +9478,11 @@
             <a:noAutofit/>
           </a:bodyPr>
           <a:p>
+            <a:pPr>
+              <a:lnSpc>
+                <a:spcPct val="100000"/>
+              </a:lnSpc>
+            </a:pPr>
             <a:endParaRPr lang="en-US" sz="1800" b="0" u="none" strike="noStrike">
               <a:solidFill>
                 <a:srgbClr val="ffffff"/>
@@ -9392,7 +9503,7 @@
         <p:spPr>
           <a:xfrm>
             <a:off x="3310200" y="3163680"/>
-            <a:ext cx="2742840" cy="868320"/>
+            <a:ext cx="2742480" cy="867960"/>
           </a:xfrm>
           <a:prstGeom prst="rect">
             <a:avLst/>
@@ -9453,7 +9564,7 @@
         <p:spPr>
           <a:xfrm>
             <a:off x="3310200" y="4142160"/>
-            <a:ext cx="2742840" cy="411120"/>
+            <a:ext cx="2742480" cy="410760"/>
           </a:xfrm>
           <a:prstGeom prst="rect">
             <a:avLst/>
@@ -9514,7 +9625,7 @@
         <p:spPr>
           <a:xfrm>
             <a:off x="6208920" y="2999160"/>
-            <a:ext cx="2742840" cy="1718640"/>
+            <a:ext cx="2742480" cy="1718280"/>
           </a:xfrm>
           <a:prstGeom prst="rect">
             <a:avLst/>
@@ -9544,6 +9655,11 @@
             <a:noAutofit/>
           </a:bodyPr>
           <a:p>
+            <a:pPr>
+              <a:lnSpc>
+                <a:spcPct val="100000"/>
+              </a:lnSpc>
+            </a:pPr>
             <a:endParaRPr lang="en-US" sz="1800" b="0" u="none" strike="noStrike">
               <a:solidFill>
                 <a:srgbClr val="000000"/>
@@ -9564,7 +9680,7 @@
         <p:spPr>
           <a:xfrm>
             <a:off x="6208920" y="3163680"/>
-            <a:ext cx="2742840" cy="868320"/>
+            <a:ext cx="2742480" cy="867960"/>
           </a:xfrm>
           <a:prstGeom prst="rect">
             <a:avLst/>
@@ -9625,7 +9741,7 @@
         <p:spPr>
           <a:xfrm>
             <a:off x="6208920" y="4142160"/>
-            <a:ext cx="2742840" cy="411120"/>
+            <a:ext cx="2742480" cy="410760"/>
           </a:xfrm>
           <a:prstGeom prst="rect">
             <a:avLst/>
@@ -9723,7 +9839,7 @@
         <p:spPr>
           <a:xfrm>
             <a:off x="0" y="0"/>
-            <a:ext cx="164160" cy="5143320"/>
+            <a:ext cx="163800" cy="5142960"/>
           </a:xfrm>
           <a:prstGeom prst="rect">
             <a:avLst/>
@@ -9746,6 +9862,11 @@
             <a:noAutofit/>
           </a:bodyPr>
           <a:p>
+            <a:pPr>
+              <a:lnSpc>
+                <a:spcPct val="100000"/>
+              </a:lnSpc>
+            </a:pPr>
             <a:endParaRPr lang="en-US" sz="1800" b="0" u="none" strike="noStrike">
               <a:solidFill>
                 <a:srgbClr val="000000"/>
@@ -9766,7 +9887,7 @@
         <p:spPr>
           <a:xfrm>
             <a:off x="8979480" y="0"/>
-            <a:ext cx="164160" cy="5143320"/>
+            <a:ext cx="163800" cy="5142960"/>
           </a:xfrm>
           <a:prstGeom prst="rect">
             <a:avLst/>
@@ -9789,6 +9910,11 @@
             <a:noAutofit/>
           </a:bodyPr>
           <a:p>
+            <a:pPr>
+              <a:lnSpc>
+                <a:spcPct val="100000"/>
+              </a:lnSpc>
+            </a:pPr>
             <a:endParaRPr lang="en-US" sz="1800" b="0" u="none" strike="noStrike">
               <a:solidFill>
                 <a:srgbClr val="000000"/>
@@ -9809,7 +9935,7 @@
         <p:spPr>
           <a:xfrm>
             <a:off x="411480" y="255960"/>
-            <a:ext cx="8320680" cy="347040"/>
+            <a:ext cx="8320320" cy="346680"/>
           </a:xfrm>
           <a:prstGeom prst="rect">
             <a:avLst/>
@@ -9870,7 +9996,7 @@
         <p:spPr>
           <a:xfrm>
             <a:off x="411480" y="567000"/>
-            <a:ext cx="8320680" cy="548280"/>
+            <a:ext cx="8320320" cy="547920"/>
           </a:xfrm>
           <a:prstGeom prst="rect">
             <a:avLst/>
@@ -9931,7 +10057,7 @@
         <p:spPr>
           <a:xfrm>
             <a:off x="411480" y="1261800"/>
-            <a:ext cx="4571640" cy="347040"/>
+            <a:ext cx="4571280" cy="346680"/>
           </a:xfrm>
           <a:prstGeom prst="rect">
             <a:avLst/>
@@ -9996,7 +10122,7 @@
         <p:spPr>
           <a:xfrm>
             <a:off x="411480" y="1737360"/>
-            <a:ext cx="273960" cy="273960"/>
+            <a:ext cx="273600" cy="273600"/>
           </a:xfrm>
           <a:prstGeom prst="rect">
             <a:avLst/>
@@ -10016,7 +10142,7 @@
         <p:spPr>
           <a:xfrm>
             <a:off x="804600" y="1691640"/>
-            <a:ext cx="4160160" cy="502560"/>
+            <a:ext cx="4159800" cy="502200"/>
           </a:xfrm>
           <a:prstGeom prst="rect">
             <a:avLst/>
@@ -10081,7 +10207,7 @@
         <p:spPr>
           <a:xfrm>
             <a:off x="411480" y="2395800"/>
-            <a:ext cx="273960" cy="273960"/>
+            <a:ext cx="273600" cy="273600"/>
           </a:xfrm>
           <a:prstGeom prst="rect">
             <a:avLst/>
@@ -10101,7 +10227,7 @@
         <p:spPr>
           <a:xfrm>
             <a:off x="804600" y="2350080"/>
-            <a:ext cx="4160160" cy="502560"/>
+            <a:ext cx="4159800" cy="502200"/>
           </a:xfrm>
           <a:prstGeom prst="rect">
             <a:avLst/>
@@ -10166,7 +10292,7 @@
         <p:spPr>
           <a:xfrm>
             <a:off x="411480" y="3054240"/>
-            <a:ext cx="273960" cy="273960"/>
+            <a:ext cx="273600" cy="273600"/>
           </a:xfrm>
           <a:prstGeom prst="rect">
             <a:avLst/>
@@ -10186,7 +10312,7 @@
         <p:spPr>
           <a:xfrm>
             <a:off x="804600" y="3008520"/>
-            <a:ext cx="4160160" cy="502560"/>
+            <a:ext cx="4159800" cy="502200"/>
           </a:xfrm>
           <a:prstGeom prst="rect">
             <a:avLst/>
@@ -10251,7 +10377,7 @@
         <p:spPr>
           <a:xfrm>
             <a:off x="411480" y="3712320"/>
-            <a:ext cx="273960" cy="273960"/>
+            <a:ext cx="273600" cy="273600"/>
           </a:xfrm>
           <a:prstGeom prst="rect">
             <a:avLst/>
@@ -10271,7 +10397,7 @@
         <p:spPr>
           <a:xfrm>
             <a:off x="804600" y="3666600"/>
-            <a:ext cx="4160160" cy="502560"/>
+            <a:ext cx="4159800" cy="502200"/>
           </a:xfrm>
           <a:prstGeom prst="rect">
             <a:avLst/>
@@ -10336,7 +10462,7 @@
         <p:spPr>
           <a:xfrm>
             <a:off x="411480" y="4370760"/>
-            <a:ext cx="273960" cy="273960"/>
+            <a:ext cx="273600" cy="273600"/>
           </a:xfrm>
           <a:prstGeom prst="rect">
             <a:avLst/>
@@ -10356,7 +10482,7 @@
         <p:spPr>
           <a:xfrm>
             <a:off x="804600" y="4325040"/>
-            <a:ext cx="4160160" cy="502560"/>
+            <a:ext cx="4159800" cy="502200"/>
           </a:xfrm>
           <a:prstGeom prst="rect">
             <a:avLst/>
@@ -10417,7 +10543,7 @@
         <p:spPr>
           <a:xfrm>
             <a:off x="5074920" y="1234440"/>
-            <a:ext cx="27000" cy="3565800"/>
+            <a:ext cx="26640" cy="3565440"/>
           </a:xfrm>
           <a:prstGeom prst="rect">
             <a:avLst/>
@@ -10440,6 +10566,11 @@
             <a:noAutofit/>
           </a:bodyPr>
           <a:p>
+            <a:pPr>
+              <a:lnSpc>
+                <a:spcPct val="100000"/>
+              </a:lnSpc>
+            </a:pPr>
             <a:endParaRPr lang="en-US" sz="1800" b="0" u="none" strike="noStrike">
               <a:solidFill>
                 <a:srgbClr val="ffffff"/>
@@ -10460,7 +10591,7 @@
         <p:spPr>
           <a:xfrm>
             <a:off x="5257800" y="1261800"/>
-            <a:ext cx="3474360" cy="347040"/>
+            <a:ext cx="3474000" cy="346680"/>
           </a:xfrm>
           <a:prstGeom prst="rect">
             <a:avLst/>
@@ -10521,7 +10652,7 @@
         <p:spPr>
           <a:xfrm>
             <a:off x="5257800" y="1691640"/>
-            <a:ext cx="3382920" cy="475200"/>
+            <a:ext cx="3382560" cy="474840"/>
           </a:xfrm>
           <a:prstGeom prst="rect">
             <a:avLst/>
@@ -10544,6 +10675,11 @@
             <a:noAutofit/>
           </a:bodyPr>
           <a:p>
+            <a:pPr>
+              <a:lnSpc>
+                <a:spcPct val="100000"/>
+              </a:lnSpc>
+            </a:pPr>
             <a:endParaRPr lang="en-US" sz="1800" b="0" u="none" strike="noStrike">
               <a:solidFill>
                 <a:srgbClr val="ffffff"/>
@@ -10564,7 +10700,7 @@
         <p:spPr>
           <a:xfrm>
             <a:off x="5257800" y="1691640"/>
-            <a:ext cx="50040" cy="475200"/>
+            <a:ext cx="49680" cy="474840"/>
           </a:xfrm>
           <a:prstGeom prst="rect">
             <a:avLst/>
@@ -10587,6 +10723,11 @@
             <a:noAutofit/>
           </a:bodyPr>
           <a:p>
+            <a:pPr>
+              <a:lnSpc>
+                <a:spcPct val="100000"/>
+              </a:lnSpc>
+            </a:pPr>
             <a:endParaRPr lang="en-US" sz="1800" b="0" u="none" strike="noStrike">
               <a:solidFill>
                 <a:srgbClr val="ffffff"/>
@@ -10611,7 +10752,7 @@
         <p:spPr>
           <a:xfrm>
             <a:off x="5376600" y="1774080"/>
-            <a:ext cx="273960" cy="273960"/>
+            <a:ext cx="273600" cy="273600"/>
           </a:xfrm>
           <a:prstGeom prst="rect">
             <a:avLst/>
@@ -10631,7 +10772,7 @@
         <p:spPr>
           <a:xfrm>
             <a:off x="5742360" y="1755720"/>
-            <a:ext cx="2834280" cy="328680"/>
+            <a:ext cx="2833920" cy="328320"/>
           </a:xfrm>
           <a:prstGeom prst="rect">
             <a:avLst/>
@@ -10692,7 +10833,7 @@
         <p:spPr>
           <a:xfrm>
             <a:off x="5257800" y="2286000"/>
-            <a:ext cx="3382920" cy="475200"/>
+            <a:ext cx="3382560" cy="474840"/>
           </a:xfrm>
           <a:prstGeom prst="rect">
             <a:avLst/>
@@ -10715,6 +10856,11 @@
             <a:noAutofit/>
           </a:bodyPr>
           <a:p>
+            <a:pPr>
+              <a:lnSpc>
+                <a:spcPct val="100000"/>
+              </a:lnSpc>
+            </a:pPr>
             <a:endParaRPr lang="en-US" sz="1800" b="0" u="none" strike="noStrike">
               <a:solidFill>
                 <a:srgbClr val="ffffff"/>
@@ -10735,7 +10881,7 @@
         <p:spPr>
           <a:xfrm>
             <a:off x="5257800" y="2286000"/>
-            <a:ext cx="50040" cy="475200"/>
+            <a:ext cx="49680" cy="474840"/>
           </a:xfrm>
           <a:prstGeom prst="rect">
             <a:avLst/>
@@ -10758,6 +10904,11 @@
             <a:noAutofit/>
           </a:bodyPr>
           <a:p>
+            <a:pPr>
+              <a:lnSpc>
+                <a:spcPct val="100000"/>
+              </a:lnSpc>
+            </a:pPr>
             <a:endParaRPr lang="en-US" sz="1800" b="0" u="none" strike="noStrike">
               <a:solidFill>
                 <a:srgbClr val="ffffff"/>
@@ -10782,7 +10933,7 @@
         <p:spPr>
           <a:xfrm>
             <a:off x="5376600" y="2368440"/>
-            <a:ext cx="273960" cy="273960"/>
+            <a:ext cx="273600" cy="273600"/>
           </a:xfrm>
           <a:prstGeom prst="rect">
             <a:avLst/>
@@ -10802,7 +10953,7 @@
         <p:spPr>
           <a:xfrm>
             <a:off x="5742360" y="2350080"/>
-            <a:ext cx="2834280" cy="328680"/>
+            <a:ext cx="2833920" cy="328320"/>
           </a:xfrm>
           <a:prstGeom prst="rect">
             <a:avLst/>
@@ -10863,7 +11014,7 @@
         <p:spPr>
           <a:xfrm>
             <a:off x="5257800" y="2880360"/>
-            <a:ext cx="3382920" cy="475200"/>
+            <a:ext cx="3382560" cy="474840"/>
           </a:xfrm>
           <a:prstGeom prst="rect">
             <a:avLst/>
@@ -10886,6 +11037,11 @@
             <a:noAutofit/>
           </a:bodyPr>
           <a:p>
+            <a:pPr>
+              <a:lnSpc>
+                <a:spcPct val="100000"/>
+              </a:lnSpc>
+            </a:pPr>
             <a:endParaRPr lang="en-US" sz="1800" b="0" u="none" strike="noStrike">
               <a:solidFill>
                 <a:srgbClr val="ffffff"/>
@@ -10906,7 +11062,7 @@
         <p:spPr>
           <a:xfrm>
             <a:off x="5257800" y="2880360"/>
-            <a:ext cx="50040" cy="475200"/>
+            <a:ext cx="49680" cy="474840"/>
           </a:xfrm>
           <a:prstGeom prst="rect">
             <a:avLst/>
@@ -10929,6 +11085,11 @@
             <a:noAutofit/>
           </a:bodyPr>
           <a:p>
+            <a:pPr>
+              <a:lnSpc>
+                <a:spcPct val="100000"/>
+              </a:lnSpc>
+            </a:pPr>
             <a:endParaRPr lang="en-US" sz="1800" b="0" u="none" strike="noStrike">
               <a:solidFill>
                 <a:srgbClr val="ffffff"/>
@@ -10953,7 +11114,7 @@
         <p:spPr>
           <a:xfrm>
             <a:off x="5376600" y="2962800"/>
-            <a:ext cx="273960" cy="273960"/>
+            <a:ext cx="273600" cy="273600"/>
           </a:xfrm>
           <a:prstGeom prst="rect">
             <a:avLst/>
@@ -10973,7 +11134,7 @@
         <p:spPr>
           <a:xfrm>
             <a:off x="5742360" y="2944440"/>
-            <a:ext cx="2834280" cy="328680"/>
+            <a:ext cx="2833920" cy="328320"/>
           </a:xfrm>
           <a:prstGeom prst="rect">
             <a:avLst/>
@@ -11034,7 +11195,7 @@
         <p:spPr>
           <a:xfrm>
             <a:off x="5257800" y="3474720"/>
-            <a:ext cx="3382920" cy="475200"/>
+            <a:ext cx="3382560" cy="474840"/>
           </a:xfrm>
           <a:prstGeom prst="rect">
             <a:avLst/>
@@ -11057,6 +11218,11 @@
             <a:noAutofit/>
           </a:bodyPr>
           <a:p>
+            <a:pPr>
+              <a:lnSpc>
+                <a:spcPct val="100000"/>
+              </a:lnSpc>
+            </a:pPr>
             <a:endParaRPr lang="en-US" sz="1800" b="0" u="none" strike="noStrike">
               <a:solidFill>
                 <a:srgbClr val="ffffff"/>
@@ -11077,7 +11243,7 @@
         <p:spPr>
           <a:xfrm>
             <a:off x="5257800" y="3474720"/>
-            <a:ext cx="50040" cy="475200"/>
+            <a:ext cx="49680" cy="474840"/>
           </a:xfrm>
           <a:prstGeom prst="rect">
             <a:avLst/>
@@ -11100,6 +11266,11 @@
             <a:noAutofit/>
           </a:bodyPr>
           <a:p>
+            <a:pPr>
+              <a:lnSpc>
+                <a:spcPct val="100000"/>
+              </a:lnSpc>
+            </a:pPr>
             <a:endParaRPr lang="en-US" sz="1800" b="0" u="none" strike="noStrike">
               <a:solidFill>
                 <a:srgbClr val="ffffff"/>
@@ -11124,7 +11295,7 @@
         <p:spPr>
           <a:xfrm>
             <a:off x="5376600" y="3557160"/>
-            <a:ext cx="273960" cy="273960"/>
+            <a:ext cx="273600" cy="273600"/>
           </a:xfrm>
           <a:prstGeom prst="rect">
             <a:avLst/>
@@ -11144,7 +11315,7 @@
         <p:spPr>
           <a:xfrm>
             <a:off x="5742360" y="3538800"/>
-            <a:ext cx="2834280" cy="328680"/>
+            <a:ext cx="2833920" cy="328320"/>
           </a:xfrm>
           <a:prstGeom prst="rect">
             <a:avLst/>
@@ -11205,7 +11376,7 @@
         <p:spPr>
           <a:xfrm>
             <a:off x="5257800" y="4069080"/>
-            <a:ext cx="3382920" cy="475200"/>
+            <a:ext cx="3382560" cy="474840"/>
           </a:xfrm>
           <a:prstGeom prst="rect">
             <a:avLst/>
@@ -11228,6 +11399,11 @@
             <a:noAutofit/>
           </a:bodyPr>
           <a:p>
+            <a:pPr>
+              <a:lnSpc>
+                <a:spcPct val="100000"/>
+              </a:lnSpc>
+            </a:pPr>
             <a:endParaRPr lang="en-US" sz="1800" b="0" u="none" strike="noStrike">
               <a:solidFill>
                 <a:srgbClr val="ffffff"/>
@@ -11248,7 +11424,7 @@
         <p:spPr>
           <a:xfrm>
             <a:off x="5257800" y="4069080"/>
-            <a:ext cx="50040" cy="475200"/>
+            <a:ext cx="49680" cy="474840"/>
           </a:xfrm>
           <a:prstGeom prst="rect">
             <a:avLst/>
@@ -11271,6 +11447,11 @@
             <a:noAutofit/>
           </a:bodyPr>
           <a:p>
+            <a:pPr>
+              <a:lnSpc>
+                <a:spcPct val="100000"/>
+              </a:lnSpc>
+            </a:pPr>
             <a:endParaRPr lang="en-US" sz="1800" b="0" u="none" strike="noStrike">
               <a:solidFill>
                 <a:srgbClr val="ffffff"/>
@@ -11295,7 +11476,7 @@
         <p:spPr>
           <a:xfrm>
             <a:off x="5376600" y="4151520"/>
-            <a:ext cx="273960" cy="273960"/>
+            <a:ext cx="273600" cy="273600"/>
           </a:xfrm>
           <a:prstGeom prst="rect">
             <a:avLst/>
@@ -11315,7 +11496,7 @@
         <p:spPr>
           <a:xfrm>
             <a:off x="5742360" y="4133160"/>
-            <a:ext cx="2834280" cy="328680"/>
+            <a:ext cx="2833920" cy="328320"/>
           </a:xfrm>
           <a:prstGeom prst="rect">
             <a:avLst/>
@@ -11376,7 +11557,7 @@
         <p:spPr>
           <a:xfrm>
             <a:off x="5257800" y="4663440"/>
-            <a:ext cx="3382920" cy="475200"/>
+            <a:ext cx="3382560" cy="474840"/>
           </a:xfrm>
           <a:prstGeom prst="rect">
             <a:avLst/>
@@ -11399,6 +11580,11 @@
             <a:noAutofit/>
           </a:bodyPr>
           <a:p>
+            <a:pPr>
+              <a:lnSpc>
+                <a:spcPct val="100000"/>
+              </a:lnSpc>
+            </a:pPr>
             <a:endParaRPr lang="en-US" sz="1800" b="0" u="none" strike="noStrike">
               <a:solidFill>
                 <a:srgbClr val="ffffff"/>
@@ -11419,7 +11605,7 @@
         <p:spPr>
           <a:xfrm>
             <a:off x="5257800" y="4663440"/>
-            <a:ext cx="50040" cy="475200"/>
+            <a:ext cx="49680" cy="474840"/>
           </a:xfrm>
           <a:prstGeom prst="rect">
             <a:avLst/>
@@ -11442,6 +11628,11 @@
             <a:noAutofit/>
           </a:bodyPr>
           <a:p>
+            <a:pPr>
+              <a:lnSpc>
+                <a:spcPct val="100000"/>
+              </a:lnSpc>
+            </a:pPr>
             <a:endParaRPr lang="en-US" sz="1800" b="0" u="none" strike="noStrike">
               <a:solidFill>
                 <a:srgbClr val="ffffff"/>
@@ -11466,7 +11657,7 @@
         <p:spPr>
           <a:xfrm>
             <a:off x="5376600" y="4745880"/>
-            <a:ext cx="273960" cy="273960"/>
+            <a:ext cx="273600" cy="273600"/>
           </a:xfrm>
           <a:prstGeom prst="rect">
             <a:avLst/>
@@ -11486,7 +11677,7 @@
         <p:spPr>
           <a:xfrm>
             <a:off x="5742360" y="4727520"/>
-            <a:ext cx="2834280" cy="328680"/>
+            <a:ext cx="2833920" cy="328320"/>
           </a:xfrm>
           <a:prstGeom prst="rect">
             <a:avLst/>
@@ -11584,7 +11775,7 @@
         <p:spPr>
           <a:xfrm>
             <a:off x="0" y="0"/>
-            <a:ext cx="9143640" cy="164160"/>
+            <a:ext cx="9143280" cy="163800"/>
           </a:xfrm>
           <a:prstGeom prst="rect">
             <a:avLst/>
@@ -11607,6 +11798,11 @@
             <a:noAutofit/>
           </a:bodyPr>
           <a:p>
+            <a:pPr>
+              <a:lnSpc>
+                <a:spcPct val="100000"/>
+              </a:lnSpc>
+            </a:pPr>
             <a:endParaRPr lang="en-US" sz="1800" b="0" u="none" strike="noStrike">
               <a:solidFill>
                 <a:srgbClr val="000000"/>
@@ -11627,7 +11823,7 @@
         <p:spPr>
           <a:xfrm>
             <a:off x="0" y="4974480"/>
-            <a:ext cx="9143640" cy="164160"/>
+            <a:ext cx="9143280" cy="163800"/>
           </a:xfrm>
           <a:prstGeom prst="rect">
             <a:avLst/>
@@ -11650,6 +11846,11 @@
             <a:noAutofit/>
           </a:bodyPr>
           <a:p>
+            <a:pPr>
+              <a:lnSpc>
+                <a:spcPct val="100000"/>
+              </a:lnSpc>
+            </a:pPr>
             <a:endParaRPr lang="en-US" sz="1800" b="0" u="none" strike="noStrike">
               <a:solidFill>
                 <a:srgbClr val="000000"/>
@@ -11676,7 +11877,7 @@
         <p:spPr>
           <a:xfrm>
             <a:off x="3520440" y="457200"/>
-            <a:ext cx="2102760" cy="2102760"/>
+            <a:ext cx="2102400" cy="2102400"/>
           </a:xfrm>
           <a:prstGeom prst="rect">
             <a:avLst/>
@@ -11696,7 +11897,7 @@
         <p:spPr>
           <a:xfrm>
             <a:off x="457200" y="2697480"/>
-            <a:ext cx="8229240" cy="685440"/>
+            <a:ext cx="8228880" cy="685080"/>
           </a:xfrm>
           <a:prstGeom prst="rect">
             <a:avLst/>
@@ -11757,7 +11958,7 @@
         <p:spPr>
           <a:xfrm>
             <a:off x="457200" y="3401640"/>
-            <a:ext cx="8229240" cy="411120"/>
+            <a:ext cx="8228880" cy="410760"/>
           </a:xfrm>
           <a:prstGeom prst="rect">
             <a:avLst/>
@@ -11818,7 +12019,7 @@
         <p:spPr>
           <a:xfrm>
             <a:off x="3200400" y="3913560"/>
-            <a:ext cx="2742840" cy="27000"/>
+            <a:ext cx="2742480" cy="26640"/>
           </a:xfrm>
           <a:prstGeom prst="rect">
             <a:avLst/>
@@ -11841,6 +12042,11 @@
             <a:noAutofit/>
           </a:bodyPr>
           <a:p>
+            <a:pPr>
+              <a:lnSpc>
+                <a:spcPct val="100000"/>
+              </a:lnSpc>
+            </a:pPr>
             <a:endParaRPr lang="en-US" sz="1800" b="0" u="none" strike="noStrike">
               <a:solidFill>
                 <a:srgbClr val="ffffff"/>
@@ -11861,7 +12067,7 @@
         <p:spPr>
           <a:xfrm>
             <a:off x="457200" y="4041720"/>
-            <a:ext cx="8229240" cy="347040"/>
+            <a:ext cx="8228880" cy="346680"/>
           </a:xfrm>
           <a:prstGeom prst="rect">
             <a:avLst/>
@@ -11959,7 +12165,7 @@
         <p:spPr>
           <a:xfrm>
             <a:off x="0" y="0"/>
-            <a:ext cx="164160" cy="5143320"/>
+            <a:ext cx="163800" cy="5142960"/>
           </a:xfrm>
           <a:prstGeom prst="rect">
             <a:avLst/>
@@ -11982,6 +12188,11 @@
             <a:noAutofit/>
           </a:bodyPr>
           <a:p>
+            <a:pPr>
+              <a:lnSpc>
+                <a:spcPct val="100000"/>
+              </a:lnSpc>
+            </a:pPr>
             <a:endParaRPr lang="en-US" sz="1800" b="0" u="none" strike="noStrike">
               <a:solidFill>
                 <a:srgbClr val="ffffff"/>
@@ -12002,7 +12213,7 @@
         <p:spPr>
           <a:xfrm>
             <a:off x="411480" y="274320"/>
-            <a:ext cx="8320680" cy="548280"/>
+            <a:ext cx="8320320" cy="547920"/>
           </a:xfrm>
           <a:prstGeom prst="rect">
             <a:avLst/>
@@ -12063,7 +12274,7 @@
         <p:spPr>
           <a:xfrm>
             <a:off x="411480" y="1051560"/>
-            <a:ext cx="4114440" cy="749520"/>
+            <a:ext cx="4114080" cy="749160"/>
           </a:xfrm>
           <a:prstGeom prst="rect">
             <a:avLst/>
@@ -12093,6 +12304,11 @@
             <a:noAutofit/>
           </a:bodyPr>
           <a:p>
+            <a:pPr>
+              <a:lnSpc>
+                <a:spcPct val="100000"/>
+              </a:lnSpc>
+            </a:pPr>
             <a:endParaRPr lang="en-US" sz="1800" b="0" u="none" strike="noStrike">
               <a:solidFill>
                 <a:srgbClr val="000000"/>
@@ -12113,7 +12329,7 @@
         <p:spPr>
           <a:xfrm>
             <a:off x="411480" y="1051560"/>
-            <a:ext cx="54360" cy="749520"/>
+            <a:ext cx="54000" cy="749160"/>
           </a:xfrm>
           <a:prstGeom prst="rect">
             <a:avLst/>
@@ -12136,6 +12352,11 @@
             <a:noAutofit/>
           </a:bodyPr>
           <a:p>
+            <a:pPr>
+              <a:lnSpc>
+                <a:spcPct val="100000"/>
+              </a:lnSpc>
+            </a:pPr>
             <a:endParaRPr lang="en-US" sz="1800" b="0" u="none" strike="noStrike">
               <a:solidFill>
                 <a:srgbClr val="000000"/>
@@ -12156,7 +12377,7 @@
         <p:spPr>
           <a:xfrm>
             <a:off x="548640" y="1161360"/>
-            <a:ext cx="502560" cy="502560"/>
+            <a:ext cx="502200" cy="502200"/>
           </a:xfrm>
           <a:prstGeom prst="rect">
             <a:avLst/>
@@ -12221,7 +12442,7 @@
         <p:spPr>
           <a:xfrm>
             <a:off x="1069920" y="1207080"/>
-            <a:ext cx="383760" cy="383760"/>
+            <a:ext cx="383400" cy="383400"/>
           </a:xfrm>
           <a:prstGeom prst="rect">
             <a:avLst/>
@@ -12241,7 +12462,7 @@
         <p:spPr>
           <a:xfrm>
             <a:off x="1527120" y="1170360"/>
-            <a:ext cx="2834280" cy="502560"/>
+            <a:ext cx="2833920" cy="502200"/>
           </a:xfrm>
           <a:prstGeom prst="rect">
             <a:avLst/>
@@ -12302,7 +12523,7 @@
         <p:spPr>
           <a:xfrm>
             <a:off x="411480" y="2011680"/>
-            <a:ext cx="4114440" cy="749520"/>
+            <a:ext cx="4114080" cy="749160"/>
           </a:xfrm>
           <a:prstGeom prst="rect">
             <a:avLst/>
@@ -12332,6 +12553,11 @@
             <a:noAutofit/>
           </a:bodyPr>
           <a:p>
+            <a:pPr>
+              <a:lnSpc>
+                <a:spcPct val="100000"/>
+              </a:lnSpc>
+            </a:pPr>
             <a:endParaRPr lang="en-US" sz="1800" b="0" u="none" strike="noStrike">
               <a:solidFill>
                 <a:srgbClr val="000000"/>
@@ -12352,7 +12578,7 @@
         <p:spPr>
           <a:xfrm>
             <a:off x="411480" y="2011680"/>
-            <a:ext cx="54360" cy="749520"/>
+            <a:ext cx="54000" cy="749160"/>
           </a:xfrm>
           <a:prstGeom prst="rect">
             <a:avLst/>
@@ -12375,6 +12601,11 @@
             <a:noAutofit/>
           </a:bodyPr>
           <a:p>
+            <a:pPr>
+              <a:lnSpc>
+                <a:spcPct val="100000"/>
+              </a:lnSpc>
+            </a:pPr>
             <a:endParaRPr lang="en-US" sz="1800" b="0" u="none" strike="noStrike">
               <a:solidFill>
                 <a:srgbClr val="000000"/>
@@ -12395,7 +12626,7 @@
         <p:spPr>
           <a:xfrm>
             <a:off x="548640" y="2121480"/>
-            <a:ext cx="502560" cy="502560"/>
+            <a:ext cx="502200" cy="502200"/>
           </a:xfrm>
           <a:prstGeom prst="rect">
             <a:avLst/>
@@ -12460,7 +12691,7 @@
         <p:spPr>
           <a:xfrm>
             <a:off x="1069920" y="2167200"/>
-            <a:ext cx="383760" cy="383760"/>
+            <a:ext cx="383400" cy="383400"/>
           </a:xfrm>
           <a:prstGeom prst="rect">
             <a:avLst/>
@@ -12480,7 +12711,7 @@
         <p:spPr>
           <a:xfrm>
             <a:off x="1527120" y="2130480"/>
-            <a:ext cx="2834280" cy="502560"/>
+            <a:ext cx="2833920" cy="502200"/>
           </a:xfrm>
           <a:prstGeom prst="rect">
             <a:avLst/>
@@ -12541,7 +12772,7 @@
         <p:spPr>
           <a:xfrm>
             <a:off x="411480" y="2971800"/>
-            <a:ext cx="4114440" cy="749520"/>
+            <a:ext cx="4114080" cy="749160"/>
           </a:xfrm>
           <a:prstGeom prst="rect">
             <a:avLst/>
@@ -12571,6 +12802,11 @@
             <a:noAutofit/>
           </a:bodyPr>
           <a:p>
+            <a:pPr>
+              <a:lnSpc>
+                <a:spcPct val="100000"/>
+              </a:lnSpc>
+            </a:pPr>
             <a:endParaRPr lang="en-US" sz="1800" b="0" u="none" strike="noStrike">
               <a:solidFill>
                 <a:srgbClr val="000000"/>
@@ -12591,7 +12827,7 @@
         <p:spPr>
           <a:xfrm>
             <a:off x="411480" y="2971800"/>
-            <a:ext cx="54360" cy="749520"/>
+            <a:ext cx="54000" cy="749160"/>
           </a:xfrm>
           <a:prstGeom prst="rect">
             <a:avLst/>
@@ -12614,6 +12850,11 @@
             <a:noAutofit/>
           </a:bodyPr>
           <a:p>
+            <a:pPr>
+              <a:lnSpc>
+                <a:spcPct val="100000"/>
+              </a:lnSpc>
+            </a:pPr>
             <a:endParaRPr lang="en-US" sz="1800" b="0" u="none" strike="noStrike">
               <a:solidFill>
                 <a:srgbClr val="000000"/>
@@ -12634,7 +12875,7 @@
         <p:spPr>
           <a:xfrm>
             <a:off x="548640" y="3081600"/>
-            <a:ext cx="502560" cy="502560"/>
+            <a:ext cx="502200" cy="502200"/>
           </a:xfrm>
           <a:prstGeom prst="rect">
             <a:avLst/>
@@ -12699,7 +12940,7 @@
         <p:spPr>
           <a:xfrm>
             <a:off x="1069920" y="3127320"/>
-            <a:ext cx="383760" cy="383760"/>
+            <a:ext cx="383400" cy="383400"/>
           </a:xfrm>
           <a:prstGeom prst="rect">
             <a:avLst/>
@@ -12719,7 +12960,7 @@
         <p:spPr>
           <a:xfrm>
             <a:off x="1527120" y="3090600"/>
-            <a:ext cx="2834280" cy="502560"/>
+            <a:ext cx="2833920" cy="502200"/>
           </a:xfrm>
           <a:prstGeom prst="rect">
             <a:avLst/>
@@ -12780,7 +13021,7 @@
         <p:spPr>
           <a:xfrm>
             <a:off x="411480" y="3931920"/>
-            <a:ext cx="4114440" cy="749520"/>
+            <a:ext cx="4114080" cy="749160"/>
           </a:xfrm>
           <a:prstGeom prst="rect">
             <a:avLst/>
@@ -12810,6 +13051,11 @@
             <a:noAutofit/>
           </a:bodyPr>
           <a:p>
+            <a:pPr>
+              <a:lnSpc>
+                <a:spcPct val="100000"/>
+              </a:lnSpc>
+            </a:pPr>
             <a:endParaRPr lang="en-US" sz="1800" b="0" u="none" strike="noStrike">
               <a:solidFill>
                 <a:srgbClr val="000000"/>
@@ -12830,7 +13076,7 @@
         <p:spPr>
           <a:xfrm>
             <a:off x="411480" y="3931920"/>
-            <a:ext cx="54360" cy="749520"/>
+            <a:ext cx="54000" cy="749160"/>
           </a:xfrm>
           <a:prstGeom prst="rect">
             <a:avLst/>
@@ -12853,6 +13099,11 @@
             <a:noAutofit/>
           </a:bodyPr>
           <a:p>
+            <a:pPr>
+              <a:lnSpc>
+                <a:spcPct val="100000"/>
+              </a:lnSpc>
+            </a:pPr>
             <a:endParaRPr lang="en-US" sz="1800" b="0" u="none" strike="noStrike">
               <a:solidFill>
                 <a:srgbClr val="000000"/>
@@ -12873,7 +13124,7 @@
         <p:spPr>
           <a:xfrm>
             <a:off x="548640" y="4041720"/>
-            <a:ext cx="502560" cy="502560"/>
+            <a:ext cx="502200" cy="502200"/>
           </a:xfrm>
           <a:prstGeom prst="rect">
             <a:avLst/>
@@ -12938,7 +13189,7 @@
         <p:spPr>
           <a:xfrm>
             <a:off x="1069920" y="4087440"/>
-            <a:ext cx="383760" cy="383760"/>
+            <a:ext cx="383400" cy="383400"/>
           </a:xfrm>
           <a:prstGeom prst="rect">
             <a:avLst/>
@@ -12958,7 +13209,7 @@
         <p:spPr>
           <a:xfrm>
             <a:off x="1527120" y="4050720"/>
-            <a:ext cx="2834280" cy="502560"/>
+            <a:ext cx="2833920" cy="502200"/>
           </a:xfrm>
           <a:prstGeom prst="rect">
             <a:avLst/>
@@ -13019,7 +13270,7 @@
         <p:spPr>
           <a:xfrm>
             <a:off x="4800600" y="1051560"/>
-            <a:ext cx="4114440" cy="749520"/>
+            <a:ext cx="4114080" cy="749160"/>
           </a:xfrm>
           <a:prstGeom prst="rect">
             <a:avLst/>
@@ -13049,6 +13300,11 @@
             <a:noAutofit/>
           </a:bodyPr>
           <a:p>
+            <a:pPr>
+              <a:lnSpc>
+                <a:spcPct val="100000"/>
+              </a:lnSpc>
+            </a:pPr>
             <a:endParaRPr lang="en-US" sz="1800" b="0" u="none" strike="noStrike">
               <a:solidFill>
                 <a:srgbClr val="000000"/>
@@ -13069,7 +13325,7 @@
         <p:spPr>
           <a:xfrm>
             <a:off x="4800600" y="1051560"/>
-            <a:ext cx="54360" cy="749520"/>
+            <a:ext cx="54000" cy="749160"/>
           </a:xfrm>
           <a:prstGeom prst="rect">
             <a:avLst/>
@@ -13092,6 +13348,11 @@
             <a:noAutofit/>
           </a:bodyPr>
           <a:p>
+            <a:pPr>
+              <a:lnSpc>
+                <a:spcPct val="100000"/>
+              </a:lnSpc>
+            </a:pPr>
             <a:endParaRPr lang="en-US" sz="1800" b="0" u="none" strike="noStrike">
               <a:solidFill>
                 <a:srgbClr val="000000"/>
@@ -13112,7 +13373,7 @@
         <p:spPr>
           <a:xfrm>
             <a:off x="4937760" y="1161360"/>
-            <a:ext cx="502560" cy="502560"/>
+            <a:ext cx="502200" cy="502200"/>
           </a:xfrm>
           <a:prstGeom prst="rect">
             <a:avLst/>
@@ -13177,7 +13438,7 @@
         <p:spPr>
           <a:xfrm>
             <a:off x="5459040" y="1207080"/>
-            <a:ext cx="383760" cy="383760"/>
+            <a:ext cx="383400" cy="383400"/>
           </a:xfrm>
           <a:prstGeom prst="rect">
             <a:avLst/>
@@ -13197,7 +13458,7 @@
         <p:spPr>
           <a:xfrm>
             <a:off x="5916240" y="1170360"/>
-            <a:ext cx="2834280" cy="502560"/>
+            <a:ext cx="2833920" cy="502200"/>
           </a:xfrm>
           <a:prstGeom prst="rect">
             <a:avLst/>
@@ -13258,7 +13519,7 @@
         <p:spPr>
           <a:xfrm>
             <a:off x="4800600" y="2011680"/>
-            <a:ext cx="4114440" cy="749520"/>
+            <a:ext cx="4114080" cy="749160"/>
           </a:xfrm>
           <a:prstGeom prst="rect">
             <a:avLst/>
@@ -13288,6 +13549,11 @@
             <a:noAutofit/>
           </a:bodyPr>
           <a:p>
+            <a:pPr>
+              <a:lnSpc>
+                <a:spcPct val="100000"/>
+              </a:lnSpc>
+            </a:pPr>
             <a:endParaRPr lang="en-US" sz="1800" b="0" u="none" strike="noStrike">
               <a:solidFill>
                 <a:srgbClr val="000000"/>
@@ -13308,7 +13574,7 @@
         <p:spPr>
           <a:xfrm>
             <a:off x="4800600" y="2011680"/>
-            <a:ext cx="54360" cy="749520"/>
+            <a:ext cx="54000" cy="749160"/>
           </a:xfrm>
           <a:prstGeom prst="rect">
             <a:avLst/>
@@ -13331,6 +13597,11 @@
             <a:noAutofit/>
           </a:bodyPr>
           <a:p>
+            <a:pPr>
+              <a:lnSpc>
+                <a:spcPct val="100000"/>
+              </a:lnSpc>
+            </a:pPr>
             <a:endParaRPr lang="en-US" sz="1800" b="0" u="none" strike="noStrike">
               <a:solidFill>
                 <a:srgbClr val="000000"/>
@@ -13351,7 +13622,7 @@
         <p:spPr>
           <a:xfrm>
             <a:off x="4937760" y="2121480"/>
-            <a:ext cx="502560" cy="502560"/>
+            <a:ext cx="502200" cy="502200"/>
           </a:xfrm>
           <a:prstGeom prst="rect">
             <a:avLst/>
@@ -13416,7 +13687,7 @@
         <p:spPr>
           <a:xfrm>
             <a:off x="5459040" y="2167200"/>
-            <a:ext cx="383760" cy="383760"/>
+            <a:ext cx="383400" cy="383400"/>
           </a:xfrm>
           <a:prstGeom prst="rect">
             <a:avLst/>
@@ -13436,7 +13707,7 @@
         <p:spPr>
           <a:xfrm>
             <a:off x="5916240" y="2130480"/>
-            <a:ext cx="2834280" cy="502560"/>
+            <a:ext cx="2833920" cy="502200"/>
           </a:xfrm>
           <a:prstGeom prst="rect">
             <a:avLst/>
@@ -13497,7 +13768,7 @@
         <p:spPr>
           <a:xfrm>
             <a:off x="4800600" y="2971800"/>
-            <a:ext cx="4114440" cy="749520"/>
+            <a:ext cx="4114080" cy="749160"/>
           </a:xfrm>
           <a:prstGeom prst="rect">
             <a:avLst/>
@@ -13527,6 +13798,11 @@
             <a:noAutofit/>
           </a:bodyPr>
           <a:p>
+            <a:pPr>
+              <a:lnSpc>
+                <a:spcPct val="100000"/>
+              </a:lnSpc>
+            </a:pPr>
             <a:endParaRPr lang="en-US" sz="1800" b="0" u="none" strike="noStrike">
               <a:solidFill>
                 <a:srgbClr val="000000"/>
@@ -13547,7 +13823,7 @@
         <p:spPr>
           <a:xfrm>
             <a:off x="4800600" y="2971800"/>
-            <a:ext cx="54360" cy="749520"/>
+            <a:ext cx="54000" cy="749160"/>
           </a:xfrm>
           <a:prstGeom prst="rect">
             <a:avLst/>
@@ -13570,6 +13846,11 @@
             <a:noAutofit/>
           </a:bodyPr>
           <a:p>
+            <a:pPr>
+              <a:lnSpc>
+                <a:spcPct val="100000"/>
+              </a:lnSpc>
+            </a:pPr>
             <a:endParaRPr lang="en-US" sz="1800" b="0" u="none" strike="noStrike">
               <a:solidFill>
                 <a:srgbClr val="000000"/>
@@ -13590,7 +13871,7 @@
         <p:spPr>
           <a:xfrm>
             <a:off x="4937760" y="3081600"/>
-            <a:ext cx="502560" cy="502560"/>
+            <a:ext cx="502200" cy="502200"/>
           </a:xfrm>
           <a:prstGeom prst="rect">
             <a:avLst/>
@@ -13655,7 +13936,7 @@
         <p:spPr>
           <a:xfrm>
             <a:off x="5459040" y="3127320"/>
-            <a:ext cx="383760" cy="383760"/>
+            <a:ext cx="383400" cy="383400"/>
           </a:xfrm>
           <a:prstGeom prst="rect">
             <a:avLst/>
@@ -13675,7 +13956,7 @@
         <p:spPr>
           <a:xfrm>
             <a:off x="5916240" y="3090600"/>
-            <a:ext cx="2834280" cy="502560"/>
+            <a:ext cx="2833920" cy="502200"/>
           </a:xfrm>
           <a:prstGeom prst="rect">
             <a:avLst/>
@@ -13773,7 +14054,7 @@
         <p:spPr>
           <a:xfrm>
             <a:off x="0" y="0"/>
-            <a:ext cx="164160" cy="5143320"/>
+            <a:ext cx="163800" cy="5142960"/>
           </a:xfrm>
           <a:prstGeom prst="rect">
             <a:avLst/>
@@ -13796,6 +14077,11 @@
             <a:noAutofit/>
           </a:bodyPr>
           <a:p>
+            <a:pPr>
+              <a:lnSpc>
+                <a:spcPct val="100000"/>
+              </a:lnSpc>
+            </a:pPr>
             <a:endParaRPr lang="en-US" sz="1800" b="0" u="none" strike="noStrike">
               <a:solidFill>
                 <a:srgbClr val="000000"/>
@@ -13816,7 +14102,7 @@
         <p:spPr>
           <a:xfrm>
             <a:off x="411480" y="255960"/>
-            <a:ext cx="8229240" cy="411120"/>
+            <a:ext cx="8228880" cy="410760"/>
           </a:xfrm>
           <a:prstGeom prst="rect">
             <a:avLst/>
@@ -13877,7 +14163,7 @@
         <p:spPr>
           <a:xfrm>
             <a:off x="411480" y="621720"/>
-            <a:ext cx="8229240" cy="594000"/>
+            <a:ext cx="8228880" cy="593640"/>
           </a:xfrm>
           <a:prstGeom prst="rect">
             <a:avLst/>
@@ -13938,7 +14224,7 @@
         <p:spPr>
           <a:xfrm>
             <a:off x="411480" y="1508760"/>
-            <a:ext cx="4068720" cy="1325520"/>
+            <a:ext cx="4068360" cy="1325160"/>
           </a:xfrm>
           <a:prstGeom prst="rect">
             <a:avLst/>
@@ -13968,6 +14254,11 @@
             <a:noAutofit/>
           </a:bodyPr>
           <a:p>
+            <a:pPr>
+              <a:lnSpc>
+                <a:spcPct val="100000"/>
+              </a:lnSpc>
+            </a:pPr>
             <a:endParaRPr lang="en-US" sz="1800" b="0" u="none" strike="noStrike">
               <a:solidFill>
                 <a:srgbClr val="ffffff"/>
@@ -13988,7 +14279,7 @@
         <p:spPr>
           <a:xfrm>
             <a:off x="411480" y="1508760"/>
-            <a:ext cx="54360" cy="1325520"/>
+            <a:ext cx="54000" cy="1325160"/>
           </a:xfrm>
           <a:prstGeom prst="rect">
             <a:avLst/>
@@ -14011,6 +14302,11 @@
             <a:noAutofit/>
           </a:bodyPr>
           <a:p>
+            <a:pPr>
+              <a:lnSpc>
+                <a:spcPct val="100000"/>
+              </a:lnSpc>
+            </a:pPr>
             <a:endParaRPr lang="en-US" sz="1800" b="0" u="none" strike="noStrike">
               <a:solidFill>
                 <a:srgbClr val="000000"/>
@@ -14035,7 +14331,7 @@
         <p:spPr>
           <a:xfrm>
             <a:off x="594360" y="1664280"/>
-            <a:ext cx="548280" cy="548280"/>
+            <a:ext cx="547920" cy="547920"/>
           </a:xfrm>
           <a:prstGeom prst="rect">
             <a:avLst/>
@@ -14055,7 +14351,7 @@
         <p:spPr>
           <a:xfrm>
             <a:off x="1280160" y="1618560"/>
-            <a:ext cx="3062880" cy="383760"/>
+            <a:ext cx="3062520" cy="383400"/>
           </a:xfrm>
           <a:prstGeom prst="rect">
             <a:avLst/>
@@ -14116,7 +14412,7 @@
         <p:spPr>
           <a:xfrm>
             <a:off x="1280160" y="1984320"/>
-            <a:ext cx="3062880" cy="594000"/>
+            <a:ext cx="3062520" cy="593640"/>
           </a:xfrm>
           <a:prstGeom prst="rect">
             <a:avLst/>
@@ -14177,7 +14473,7 @@
         <p:spPr>
           <a:xfrm>
             <a:off x="4709160" y="1508760"/>
-            <a:ext cx="4068720" cy="1325520"/>
+            <a:ext cx="4068360" cy="1325160"/>
           </a:xfrm>
           <a:prstGeom prst="rect">
             <a:avLst/>
@@ -14207,6 +14503,11 @@
             <a:noAutofit/>
           </a:bodyPr>
           <a:p>
+            <a:pPr>
+              <a:lnSpc>
+                <a:spcPct val="100000"/>
+              </a:lnSpc>
+            </a:pPr>
             <a:endParaRPr lang="en-US" sz="1800" b="0" u="none" strike="noStrike">
               <a:solidFill>
                 <a:srgbClr val="ffffff"/>
@@ -14227,7 +14528,7 @@
         <p:spPr>
           <a:xfrm>
             <a:off x="4709160" y="1508760"/>
-            <a:ext cx="54360" cy="1325520"/>
+            <a:ext cx="54000" cy="1325160"/>
           </a:xfrm>
           <a:prstGeom prst="rect">
             <a:avLst/>
@@ -14250,6 +14551,11 @@
             <a:noAutofit/>
           </a:bodyPr>
           <a:p>
+            <a:pPr>
+              <a:lnSpc>
+                <a:spcPct val="100000"/>
+              </a:lnSpc>
+            </a:pPr>
             <a:endParaRPr lang="en-US" sz="1800" b="0" u="none" strike="noStrike">
               <a:solidFill>
                 <a:srgbClr val="000000"/>
@@ -14274,7 +14580,7 @@
         <p:spPr>
           <a:xfrm>
             <a:off x="4892040" y="1664280"/>
-            <a:ext cx="548280" cy="548280"/>
+            <a:ext cx="547920" cy="547920"/>
           </a:xfrm>
           <a:prstGeom prst="rect">
             <a:avLst/>
@@ -14294,7 +14600,7 @@
         <p:spPr>
           <a:xfrm>
             <a:off x="5577840" y="1618560"/>
-            <a:ext cx="3062880" cy="383760"/>
+            <a:ext cx="3062520" cy="383400"/>
           </a:xfrm>
           <a:prstGeom prst="rect">
             <a:avLst/>
@@ -14355,7 +14661,7 @@
         <p:spPr>
           <a:xfrm>
             <a:off x="5577840" y="1984320"/>
-            <a:ext cx="3062880" cy="594000"/>
+            <a:ext cx="3062520" cy="593640"/>
           </a:xfrm>
           <a:prstGeom prst="rect">
             <a:avLst/>
@@ -14416,7 +14722,7 @@
         <p:spPr>
           <a:xfrm>
             <a:off x="411480" y="3017520"/>
-            <a:ext cx="4068720" cy="1325520"/>
+            <a:ext cx="4068360" cy="1325160"/>
           </a:xfrm>
           <a:prstGeom prst="rect">
             <a:avLst/>
@@ -14446,6 +14752,11 @@
             <a:noAutofit/>
           </a:bodyPr>
           <a:p>
+            <a:pPr>
+              <a:lnSpc>
+                <a:spcPct val="100000"/>
+              </a:lnSpc>
+            </a:pPr>
             <a:endParaRPr lang="en-US" sz="1800" b="0" u="none" strike="noStrike">
               <a:solidFill>
                 <a:srgbClr val="ffffff"/>
@@ -14466,7 +14777,7 @@
         <p:spPr>
           <a:xfrm>
             <a:off x="411480" y="3017520"/>
-            <a:ext cx="54360" cy="1325520"/>
+            <a:ext cx="54000" cy="1325160"/>
           </a:xfrm>
           <a:prstGeom prst="rect">
             <a:avLst/>
@@ -14489,6 +14800,11 @@
             <a:noAutofit/>
           </a:bodyPr>
           <a:p>
+            <a:pPr>
+              <a:lnSpc>
+                <a:spcPct val="100000"/>
+              </a:lnSpc>
+            </a:pPr>
             <a:endParaRPr lang="en-US" sz="1800" b="0" u="none" strike="noStrike">
               <a:solidFill>
                 <a:srgbClr val="000000"/>
@@ -14513,7 +14829,7 @@
         <p:spPr>
           <a:xfrm>
             <a:off x="594360" y="3173040"/>
-            <a:ext cx="548280" cy="548280"/>
+            <a:ext cx="547920" cy="547920"/>
           </a:xfrm>
           <a:prstGeom prst="rect">
             <a:avLst/>
@@ -14533,7 +14849,7 @@
         <p:spPr>
           <a:xfrm>
             <a:off x="1280160" y="3127320"/>
-            <a:ext cx="3062880" cy="383760"/>
+            <a:ext cx="3062520" cy="383400"/>
           </a:xfrm>
           <a:prstGeom prst="rect">
             <a:avLst/>
@@ -14594,7 +14910,7 @@
         <p:spPr>
           <a:xfrm>
             <a:off x="1280160" y="3493080"/>
-            <a:ext cx="3062880" cy="594000"/>
+            <a:ext cx="3062520" cy="593640"/>
           </a:xfrm>
           <a:prstGeom prst="rect">
             <a:avLst/>
@@ -14655,7 +14971,7 @@
         <p:spPr>
           <a:xfrm>
             <a:off x="4709160" y="3017520"/>
-            <a:ext cx="4068720" cy="1325520"/>
+            <a:ext cx="4068360" cy="1325160"/>
           </a:xfrm>
           <a:prstGeom prst="rect">
             <a:avLst/>
@@ -14685,6 +15001,11 @@
             <a:noAutofit/>
           </a:bodyPr>
           <a:p>
+            <a:pPr>
+              <a:lnSpc>
+                <a:spcPct val="100000"/>
+              </a:lnSpc>
+            </a:pPr>
             <a:endParaRPr lang="en-US" sz="1800" b="0" u="none" strike="noStrike">
               <a:solidFill>
                 <a:srgbClr val="ffffff"/>
@@ -14705,7 +15026,7 @@
         <p:spPr>
           <a:xfrm>
             <a:off x="4709160" y="3017520"/>
-            <a:ext cx="54360" cy="1325520"/>
+            <a:ext cx="54000" cy="1325160"/>
           </a:xfrm>
           <a:prstGeom prst="rect">
             <a:avLst/>
@@ -14728,6 +15049,11 @@
             <a:noAutofit/>
           </a:bodyPr>
           <a:p>
+            <a:pPr>
+              <a:lnSpc>
+                <a:spcPct val="100000"/>
+              </a:lnSpc>
+            </a:pPr>
             <a:endParaRPr lang="en-US" sz="1800" b="0" u="none" strike="noStrike">
               <a:solidFill>
                 <a:srgbClr val="000000"/>
@@ -14752,7 +15078,7 @@
         <p:spPr>
           <a:xfrm>
             <a:off x="4892040" y="3173040"/>
-            <a:ext cx="548280" cy="548280"/>
+            <a:ext cx="547920" cy="547920"/>
           </a:xfrm>
           <a:prstGeom prst="rect">
             <a:avLst/>
@@ -14772,7 +15098,7 @@
         <p:spPr>
           <a:xfrm>
             <a:off x="5577840" y="3127320"/>
-            <a:ext cx="3062880" cy="383760"/>
+            <a:ext cx="3062520" cy="383400"/>
           </a:xfrm>
           <a:prstGeom prst="rect">
             <a:avLst/>
@@ -14833,7 +15159,7 @@
         <p:spPr>
           <a:xfrm>
             <a:off x="5577840" y="3493080"/>
-            <a:ext cx="3062880" cy="594000"/>
+            <a:ext cx="3062520" cy="593640"/>
           </a:xfrm>
           <a:prstGeom prst="rect">
             <a:avLst/>
@@ -14894,7 +15220,7 @@
         <p:spPr>
           <a:xfrm>
             <a:off x="411480" y="4572000"/>
-            <a:ext cx="8320680" cy="383760"/>
+            <a:ext cx="8320320" cy="383400"/>
           </a:xfrm>
           <a:prstGeom prst="roundRect">
             <a:avLst>
@@ -14919,6 +15245,11 @@
             <a:noAutofit/>
           </a:bodyPr>
           <a:p>
+            <a:pPr>
+              <a:lnSpc>
+                <a:spcPct val="100000"/>
+              </a:lnSpc>
+            </a:pPr>
             <a:endParaRPr lang="en-US" sz="1800" b="0" u="none" strike="noStrike">
               <a:solidFill>
                 <a:srgbClr val="000000"/>
@@ -14939,7 +15270,7 @@
         <p:spPr>
           <a:xfrm>
             <a:off x="411480" y="4572000"/>
-            <a:ext cx="8320680" cy="383760"/>
+            <a:ext cx="8320320" cy="383400"/>
           </a:xfrm>
           <a:prstGeom prst="rect">
             <a:avLst/>
@@ -15037,7 +15368,7 @@
         <p:spPr>
           <a:xfrm>
             <a:off x="0" y="0"/>
-            <a:ext cx="164160" cy="5143320"/>
+            <a:ext cx="163800" cy="5142960"/>
           </a:xfrm>
           <a:prstGeom prst="rect">
             <a:avLst/>
@@ -15060,6 +15391,11 @@
             <a:noAutofit/>
           </a:bodyPr>
           <a:p>
+            <a:pPr>
+              <a:lnSpc>
+                <a:spcPct val="100000"/>
+              </a:lnSpc>
+            </a:pPr>
             <a:endParaRPr lang="en-US" sz="1800" b="0" u="none" strike="noStrike">
               <a:solidFill>
                 <a:srgbClr val="ffffff"/>
@@ -15080,7 +15416,7 @@
         <p:spPr>
           <a:xfrm>
             <a:off x="411480" y="255960"/>
-            <a:ext cx="8320680" cy="548280"/>
+            <a:ext cx="8320320" cy="547920"/>
           </a:xfrm>
           <a:prstGeom prst="rect">
             <a:avLst/>
@@ -15141,7 +15477,7 @@
         <p:spPr>
           <a:xfrm>
             <a:off x="411480" y="960120"/>
-            <a:ext cx="4205880" cy="347040"/>
+            <a:ext cx="4205520" cy="346680"/>
           </a:xfrm>
           <a:prstGeom prst="rect">
             <a:avLst/>
@@ -15206,7 +15542,7 @@
         <p:spPr>
           <a:xfrm>
             <a:off x="411480" y="1435680"/>
-            <a:ext cx="292320" cy="292320"/>
+            <a:ext cx="291960" cy="291960"/>
           </a:xfrm>
           <a:prstGeom prst="rect">
             <a:avLst/>
@@ -15226,7 +15562,7 @@
         <p:spPr>
           <a:xfrm>
             <a:off x="822960" y="1417320"/>
-            <a:ext cx="3657240" cy="502560"/>
+            <a:ext cx="3656880" cy="502200"/>
           </a:xfrm>
           <a:prstGeom prst="rect">
             <a:avLst/>
@@ -15291,7 +15627,7 @@
         <p:spPr>
           <a:xfrm>
             <a:off x="411480" y="2121480"/>
-            <a:ext cx="292320" cy="292320"/>
+            <a:ext cx="291960" cy="291960"/>
           </a:xfrm>
           <a:prstGeom prst="rect">
             <a:avLst/>
@@ -15311,7 +15647,7 @@
         <p:spPr>
           <a:xfrm>
             <a:off x="822960" y="2103120"/>
-            <a:ext cx="3657240" cy="502560"/>
+            <a:ext cx="3656880" cy="502200"/>
           </a:xfrm>
           <a:prstGeom prst="rect">
             <a:avLst/>
@@ -15376,7 +15712,7 @@
         <p:spPr>
           <a:xfrm>
             <a:off x="411480" y="2807280"/>
-            <a:ext cx="292320" cy="292320"/>
+            <a:ext cx="291960" cy="291960"/>
           </a:xfrm>
           <a:prstGeom prst="rect">
             <a:avLst/>
@@ -15396,7 +15732,7 @@
         <p:spPr>
           <a:xfrm>
             <a:off x="822960" y="2788920"/>
-            <a:ext cx="3657240" cy="502560"/>
+            <a:ext cx="3656880" cy="502200"/>
           </a:xfrm>
           <a:prstGeom prst="rect">
             <a:avLst/>
@@ -15461,7 +15797,7 @@
         <p:spPr>
           <a:xfrm>
             <a:off x="411480" y="3493080"/>
-            <a:ext cx="292320" cy="292320"/>
+            <a:ext cx="291960" cy="291960"/>
           </a:xfrm>
           <a:prstGeom prst="rect">
             <a:avLst/>
@@ -15481,7 +15817,7 @@
         <p:spPr>
           <a:xfrm>
             <a:off x="822960" y="3474720"/>
-            <a:ext cx="3657240" cy="502560"/>
+            <a:ext cx="3656880" cy="502200"/>
           </a:xfrm>
           <a:prstGeom prst="rect">
             <a:avLst/>
@@ -15542,7 +15878,7 @@
         <p:spPr>
           <a:xfrm>
             <a:off x="4709160" y="914400"/>
-            <a:ext cx="27000" cy="3931560"/>
+            <a:ext cx="26640" cy="3931200"/>
           </a:xfrm>
           <a:prstGeom prst="rect">
             <a:avLst/>
@@ -15565,6 +15901,11 @@
             <a:noAutofit/>
           </a:bodyPr>
           <a:p>
+            <a:pPr>
+              <a:lnSpc>
+                <a:spcPct val="100000"/>
+              </a:lnSpc>
+            </a:pPr>
             <a:endParaRPr lang="en-US" sz="1800" b="0" u="none" strike="noStrike">
               <a:solidFill>
                 <a:srgbClr val="000000"/>
@@ -15585,7 +15926,7 @@
         <p:spPr>
           <a:xfrm>
             <a:off x="4892040" y="960120"/>
-            <a:ext cx="3931560" cy="347040"/>
+            <a:ext cx="3931200" cy="346680"/>
           </a:xfrm>
           <a:prstGeom prst="rect">
             <a:avLst/>
@@ -15646,7 +15987,7 @@
         <p:spPr>
           <a:xfrm>
             <a:off x="4892040" y="1389960"/>
-            <a:ext cx="3931560" cy="594000"/>
+            <a:ext cx="3931200" cy="593640"/>
           </a:xfrm>
           <a:prstGeom prst="rect">
             <a:avLst/>
@@ -15676,6 +16017,11 @@
             <a:noAutofit/>
           </a:bodyPr>
           <a:p>
+            <a:pPr>
+              <a:lnSpc>
+                <a:spcPct val="100000"/>
+              </a:lnSpc>
+            </a:pPr>
             <a:endParaRPr lang="en-US" sz="1800" b="0" u="none" strike="noStrike">
               <a:solidFill>
                 <a:srgbClr val="000000"/>
@@ -15696,7 +16042,7 @@
         <p:spPr>
           <a:xfrm>
             <a:off x="4892040" y="1389960"/>
-            <a:ext cx="50040" cy="594000"/>
+            <a:ext cx="49680" cy="593640"/>
           </a:xfrm>
           <a:prstGeom prst="rect">
             <a:avLst/>
@@ -15719,6 +16065,11 @@
             <a:noAutofit/>
           </a:bodyPr>
           <a:p>
+            <a:pPr>
+              <a:lnSpc>
+                <a:spcPct val="100000"/>
+              </a:lnSpc>
+            </a:pPr>
             <a:endParaRPr lang="en-US" sz="1800" b="0" u="none" strike="noStrike">
               <a:solidFill>
                 <a:srgbClr val="000000"/>
@@ -15739,7 +16090,7 @@
         <p:spPr>
           <a:xfrm>
             <a:off x="5047560" y="1435680"/>
-            <a:ext cx="685440" cy="292320"/>
+            <a:ext cx="685080" cy="291960"/>
           </a:xfrm>
           <a:prstGeom prst="rect">
             <a:avLst/>
@@ -15800,7 +16151,7 @@
         <p:spPr>
           <a:xfrm>
             <a:off x="5742360" y="1454040"/>
-            <a:ext cx="1005480" cy="228240"/>
+            <a:ext cx="1005120" cy="227880"/>
           </a:xfrm>
           <a:prstGeom prst="roundRect">
             <a:avLst>
@@ -15825,6 +16176,11 @@
             <a:noAutofit/>
           </a:bodyPr>
           <a:p>
+            <a:pPr>
+              <a:lnSpc>
+                <a:spcPct val="100000"/>
+              </a:lnSpc>
+            </a:pPr>
             <a:endParaRPr lang="en-US" sz="1800" b="0" u="none" strike="noStrike">
               <a:solidFill>
                 <a:srgbClr val="ffffff"/>
@@ -15845,7 +16201,7 @@
         <p:spPr>
           <a:xfrm>
             <a:off x="5742360" y="1454040"/>
-            <a:ext cx="1005480" cy="228240"/>
+            <a:ext cx="1005120" cy="227880"/>
           </a:xfrm>
           <a:prstGeom prst="rect">
             <a:avLst/>
@@ -15906,7 +16262,7 @@
         <p:spPr>
           <a:xfrm>
             <a:off x="5047560" y="1700640"/>
-            <a:ext cx="3657240" cy="237240"/>
+            <a:ext cx="3656880" cy="236880"/>
           </a:xfrm>
           <a:prstGeom prst="rect">
             <a:avLst/>
@@ -15967,7 +16323,7 @@
         <p:spPr>
           <a:xfrm>
             <a:off x="4892040" y="2103120"/>
-            <a:ext cx="3931560" cy="594000"/>
+            <a:ext cx="3931200" cy="593640"/>
           </a:xfrm>
           <a:prstGeom prst="rect">
             <a:avLst/>
@@ -15997,6 +16353,11 @@
             <a:noAutofit/>
           </a:bodyPr>
           <a:p>
+            <a:pPr>
+              <a:lnSpc>
+                <a:spcPct val="100000"/>
+              </a:lnSpc>
+            </a:pPr>
             <a:endParaRPr lang="en-US" sz="1800" b="0" u="none" strike="noStrike">
               <a:solidFill>
                 <a:srgbClr val="000000"/>
@@ -16017,7 +16378,7 @@
         <p:spPr>
           <a:xfrm>
             <a:off x="4892040" y="2103120"/>
-            <a:ext cx="50040" cy="594000"/>
+            <a:ext cx="49680" cy="593640"/>
           </a:xfrm>
           <a:prstGeom prst="rect">
             <a:avLst/>
@@ -16040,6 +16401,11 @@
             <a:noAutofit/>
           </a:bodyPr>
           <a:p>
+            <a:pPr>
+              <a:lnSpc>
+                <a:spcPct val="100000"/>
+              </a:lnSpc>
+            </a:pPr>
             <a:endParaRPr lang="en-US" sz="1800" b="0" u="none" strike="noStrike">
               <a:solidFill>
                 <a:srgbClr val="ffffff"/>
@@ -16060,7 +16426,7 @@
         <p:spPr>
           <a:xfrm>
             <a:off x="5047560" y="2148840"/>
-            <a:ext cx="685440" cy="292320"/>
+            <a:ext cx="685080" cy="291960"/>
           </a:xfrm>
           <a:prstGeom prst="rect">
             <a:avLst/>
@@ -16121,7 +16487,7 @@
         <p:spPr>
           <a:xfrm>
             <a:off x="5742360" y="2167200"/>
-            <a:ext cx="1005480" cy="228240"/>
+            <a:ext cx="1005120" cy="227880"/>
           </a:xfrm>
           <a:prstGeom prst="roundRect">
             <a:avLst>
@@ -16146,6 +16512,11 @@
             <a:noAutofit/>
           </a:bodyPr>
           <a:p>
+            <a:pPr>
+              <a:lnSpc>
+                <a:spcPct val="100000"/>
+              </a:lnSpc>
+            </a:pPr>
             <a:endParaRPr lang="en-US" sz="1800" b="0" u="none" strike="noStrike">
               <a:solidFill>
                 <a:srgbClr val="000000"/>
@@ -16166,7 +16537,7 @@
         <p:spPr>
           <a:xfrm>
             <a:off x="5742360" y="2167200"/>
-            <a:ext cx="1005480" cy="228240"/>
+            <a:ext cx="1005120" cy="227880"/>
           </a:xfrm>
           <a:prstGeom prst="rect">
             <a:avLst/>
@@ -16227,7 +16598,7 @@
         <p:spPr>
           <a:xfrm>
             <a:off x="5047560" y="2414160"/>
-            <a:ext cx="3657240" cy="237240"/>
+            <a:ext cx="3656880" cy="236880"/>
           </a:xfrm>
           <a:prstGeom prst="rect">
             <a:avLst/>
@@ -16288,7 +16659,7 @@
         <p:spPr>
           <a:xfrm>
             <a:off x="4892040" y="2816280"/>
-            <a:ext cx="3931560" cy="594000"/>
+            <a:ext cx="3931200" cy="593640"/>
           </a:xfrm>
           <a:prstGeom prst="rect">
             <a:avLst/>
@@ -16318,6 +16689,11 @@
             <a:noAutofit/>
           </a:bodyPr>
           <a:p>
+            <a:pPr>
+              <a:lnSpc>
+                <a:spcPct val="100000"/>
+              </a:lnSpc>
+            </a:pPr>
             <a:endParaRPr lang="en-US" sz="1800" b="0" u="none" strike="noStrike">
               <a:solidFill>
                 <a:srgbClr val="000000"/>
@@ -16338,7 +16714,7 @@
         <p:spPr>
           <a:xfrm>
             <a:off x="4892040" y="2816280"/>
-            <a:ext cx="50040" cy="594000"/>
+            <a:ext cx="49680" cy="593640"/>
           </a:xfrm>
           <a:prstGeom prst="rect">
             <a:avLst/>
@@ -16361,6 +16737,11 @@
             <a:noAutofit/>
           </a:bodyPr>
           <a:p>
+            <a:pPr>
+              <a:lnSpc>
+                <a:spcPct val="100000"/>
+              </a:lnSpc>
+            </a:pPr>
             <a:endParaRPr lang="en-US" sz="1800" b="0" u="none" strike="noStrike">
               <a:solidFill>
                 <a:srgbClr val="ffffff"/>
@@ -16381,7 +16762,7 @@
         <p:spPr>
           <a:xfrm>
             <a:off x="5047560" y="2862000"/>
-            <a:ext cx="685440" cy="292320"/>
+            <a:ext cx="685080" cy="291960"/>
           </a:xfrm>
           <a:prstGeom prst="rect">
             <a:avLst/>
@@ -16442,7 +16823,7 @@
         <p:spPr>
           <a:xfrm>
             <a:off x="5742360" y="2880360"/>
-            <a:ext cx="1005480" cy="228240"/>
+            <a:ext cx="1005120" cy="227880"/>
           </a:xfrm>
           <a:prstGeom prst="roundRect">
             <a:avLst>
@@ -16467,6 +16848,11 @@
             <a:noAutofit/>
           </a:bodyPr>
           <a:p>
+            <a:pPr>
+              <a:lnSpc>
+                <a:spcPct val="100000"/>
+              </a:lnSpc>
+            </a:pPr>
             <a:endParaRPr lang="en-US" sz="1800" b="0" u="none" strike="noStrike">
               <a:solidFill>
                 <a:srgbClr val="000000"/>
@@ -16487,7 +16873,7 @@
         <p:spPr>
           <a:xfrm>
             <a:off x="5742360" y="2880360"/>
-            <a:ext cx="1005480" cy="228240"/>
+            <a:ext cx="1005120" cy="227880"/>
           </a:xfrm>
           <a:prstGeom prst="rect">
             <a:avLst/>
@@ -16548,7 +16934,7 @@
         <p:spPr>
           <a:xfrm>
             <a:off x="5047560" y="3127320"/>
-            <a:ext cx="3657240" cy="237240"/>
+            <a:ext cx="3656880" cy="236880"/>
           </a:xfrm>
           <a:prstGeom prst="rect">
             <a:avLst/>
@@ -16609,7 +16995,7 @@
         <p:spPr>
           <a:xfrm>
             <a:off x="4892040" y="3529440"/>
-            <a:ext cx="3931560" cy="594000"/>
+            <a:ext cx="3931200" cy="593640"/>
           </a:xfrm>
           <a:prstGeom prst="rect">
             <a:avLst/>
@@ -16639,6 +17025,11 @@
             <a:noAutofit/>
           </a:bodyPr>
           <a:p>
+            <a:pPr>
+              <a:lnSpc>
+                <a:spcPct val="100000"/>
+              </a:lnSpc>
+            </a:pPr>
             <a:endParaRPr lang="en-US" sz="1800" b="0" u="none" strike="noStrike">
               <a:solidFill>
                 <a:srgbClr val="000000"/>
@@ -16659,7 +17050,7 @@
         <p:spPr>
           <a:xfrm>
             <a:off x="4892040" y="3529440"/>
-            <a:ext cx="50040" cy="594000"/>
+            <a:ext cx="49680" cy="593640"/>
           </a:xfrm>
           <a:prstGeom prst="rect">
             <a:avLst/>
@@ -16682,6 +17073,11 @@
             <a:noAutofit/>
           </a:bodyPr>
           <a:p>
+            <a:pPr>
+              <a:lnSpc>
+                <a:spcPct val="100000"/>
+              </a:lnSpc>
+            </a:pPr>
             <a:endParaRPr lang="en-US" sz="1800" b="0" u="none" strike="noStrike">
               <a:solidFill>
                 <a:srgbClr val="ffffff"/>
@@ -16702,7 +17098,7 @@
         <p:spPr>
           <a:xfrm>
             <a:off x="5047560" y="3575160"/>
-            <a:ext cx="685440" cy="292320"/>
+            <a:ext cx="685080" cy="291960"/>
           </a:xfrm>
           <a:prstGeom prst="rect">
             <a:avLst/>
@@ -16763,7 +17159,7 @@
         <p:spPr>
           <a:xfrm>
             <a:off x="5742360" y="3593520"/>
-            <a:ext cx="1005480" cy="228240"/>
+            <a:ext cx="1005120" cy="227880"/>
           </a:xfrm>
           <a:prstGeom prst="roundRect">
             <a:avLst>
@@ -16788,6 +17184,11 @@
             <a:noAutofit/>
           </a:bodyPr>
           <a:p>
+            <a:pPr>
+              <a:lnSpc>
+                <a:spcPct val="100000"/>
+              </a:lnSpc>
+            </a:pPr>
             <a:endParaRPr lang="en-US" sz="1800" b="0" u="none" strike="noStrike">
               <a:solidFill>
                 <a:srgbClr val="000000"/>
@@ -16808,7 +17209,7 @@
         <p:spPr>
           <a:xfrm>
             <a:off x="5742360" y="3593520"/>
-            <a:ext cx="1005480" cy="228240"/>
+            <a:ext cx="1005120" cy="227880"/>
           </a:xfrm>
           <a:prstGeom prst="rect">
             <a:avLst/>
@@ -16869,7 +17270,7 @@
         <p:spPr>
           <a:xfrm>
             <a:off x="5047560" y="3840480"/>
-            <a:ext cx="3657240" cy="237240"/>
+            <a:ext cx="3656880" cy="236880"/>
           </a:xfrm>
           <a:prstGeom prst="rect">
             <a:avLst/>
@@ -16930,7 +17331,7 @@
         <p:spPr>
           <a:xfrm>
             <a:off x="4892040" y="4242960"/>
-            <a:ext cx="3931560" cy="594000"/>
+            <a:ext cx="3931200" cy="593640"/>
           </a:xfrm>
           <a:prstGeom prst="rect">
             <a:avLst/>
@@ -16960,6 +17361,11 @@
             <a:noAutofit/>
           </a:bodyPr>
           <a:p>
+            <a:pPr>
+              <a:lnSpc>
+                <a:spcPct val="100000"/>
+              </a:lnSpc>
+            </a:pPr>
             <a:endParaRPr lang="en-US" sz="1800" b="0" u="none" strike="noStrike">
               <a:solidFill>
                 <a:srgbClr val="000000"/>
@@ -16980,7 +17386,7 @@
         <p:spPr>
           <a:xfrm>
             <a:off x="4892040" y="4242960"/>
-            <a:ext cx="50040" cy="594000"/>
+            <a:ext cx="49680" cy="593640"/>
           </a:xfrm>
           <a:prstGeom prst="rect">
             <a:avLst/>
@@ -17003,6 +17409,11 @@
             <a:noAutofit/>
           </a:bodyPr>
           <a:p>
+            <a:pPr>
+              <a:lnSpc>
+                <a:spcPct val="100000"/>
+              </a:lnSpc>
+            </a:pPr>
             <a:endParaRPr lang="en-US" sz="1800" b="0" u="none" strike="noStrike">
               <a:solidFill>
                 <a:srgbClr val="ffffff"/>
@@ -17023,7 +17434,7 @@
         <p:spPr>
           <a:xfrm>
             <a:off x="5047560" y="4288680"/>
-            <a:ext cx="685440" cy="292320"/>
+            <a:ext cx="685080" cy="291960"/>
           </a:xfrm>
           <a:prstGeom prst="rect">
             <a:avLst/>
@@ -17084,7 +17495,7 @@
         <p:spPr>
           <a:xfrm>
             <a:off x="5742360" y="4306680"/>
-            <a:ext cx="1005480" cy="228240"/>
+            <a:ext cx="1005120" cy="227880"/>
           </a:xfrm>
           <a:prstGeom prst="roundRect">
             <a:avLst>
@@ -17109,6 +17520,11 @@
             <a:noAutofit/>
           </a:bodyPr>
           <a:p>
+            <a:pPr>
+              <a:lnSpc>
+                <a:spcPct val="100000"/>
+              </a:lnSpc>
+            </a:pPr>
             <a:endParaRPr lang="en-US" sz="1800" b="0" u="none" strike="noStrike">
               <a:solidFill>
                 <a:srgbClr val="000000"/>
@@ -17129,7 +17545,7 @@
         <p:spPr>
           <a:xfrm>
             <a:off x="5742360" y="4306680"/>
-            <a:ext cx="1005480" cy="228240"/>
+            <a:ext cx="1005120" cy="227880"/>
           </a:xfrm>
           <a:prstGeom prst="rect">
             <a:avLst/>
@@ -17190,7 +17606,7 @@
         <p:spPr>
           <a:xfrm>
             <a:off x="5047560" y="4553640"/>
-            <a:ext cx="3657240" cy="237240"/>
+            <a:ext cx="3656880" cy="236880"/>
           </a:xfrm>
           <a:prstGeom prst="rect">
             <a:avLst/>
@@ -17288,7 +17704,7 @@
         <p:spPr>
           <a:xfrm>
             <a:off x="0" y="0"/>
-            <a:ext cx="164160" cy="5143320"/>
+            <a:ext cx="163800" cy="5142960"/>
           </a:xfrm>
           <a:prstGeom prst="rect">
             <a:avLst/>
@@ -17311,6 +17727,11 @@
             <a:noAutofit/>
           </a:bodyPr>
           <a:p>
+            <a:pPr>
+              <a:lnSpc>
+                <a:spcPct val="100000"/>
+              </a:lnSpc>
+            </a:pPr>
             <a:endParaRPr lang="en-US" sz="1800" b="0" u="none" strike="noStrike">
               <a:solidFill>
                 <a:srgbClr val="000000"/>
@@ -17331,7 +17752,7 @@
         <p:spPr>
           <a:xfrm>
             <a:off x="411480" y="255960"/>
-            <a:ext cx="8229240" cy="347040"/>
+            <a:ext cx="8228880" cy="346680"/>
           </a:xfrm>
           <a:prstGeom prst="rect">
             <a:avLst/>
@@ -17392,7 +17813,7 @@
         <p:spPr>
           <a:xfrm>
             <a:off x="411480" y="567000"/>
-            <a:ext cx="8229240" cy="548280"/>
+            <a:ext cx="8228880" cy="547920"/>
           </a:xfrm>
           <a:prstGeom prst="rect">
             <a:avLst/>
@@ -17453,7 +17874,7 @@
         <p:spPr>
           <a:xfrm>
             <a:off x="411480" y="1298520"/>
-            <a:ext cx="2011320" cy="1051200"/>
+            <a:ext cx="2010960" cy="1050840"/>
           </a:xfrm>
           <a:prstGeom prst="rect">
             <a:avLst/>
@@ -17483,6 +17904,11 @@
             <a:noAutofit/>
           </a:bodyPr>
           <a:p>
+            <a:pPr>
+              <a:lnSpc>
+                <a:spcPct val="100000"/>
+              </a:lnSpc>
+            </a:pPr>
             <a:endParaRPr lang="en-US" sz="1800" b="0" u="none" strike="noStrike">
               <a:solidFill>
                 <a:srgbClr val="ffffff"/>
@@ -17503,7 +17929,7 @@
         <p:spPr>
           <a:xfrm>
             <a:off x="411480" y="1298520"/>
-            <a:ext cx="2011320" cy="292320"/>
+            <a:ext cx="2010960" cy="291960"/>
           </a:xfrm>
           <a:prstGeom prst="rect">
             <a:avLst/>
@@ -17526,6 +17952,11 @@
             <a:noAutofit/>
           </a:bodyPr>
           <a:p>
+            <a:pPr>
+              <a:lnSpc>
+                <a:spcPct val="100000"/>
+              </a:lnSpc>
+            </a:pPr>
             <a:endParaRPr lang="en-US" sz="1800" b="0" u="none" strike="noStrike">
               <a:solidFill>
                 <a:srgbClr val="ffffff"/>
@@ -17546,7 +17977,7 @@
         <p:spPr>
           <a:xfrm>
             <a:off x="457200" y="1316880"/>
-            <a:ext cx="1919880" cy="255600"/>
+            <a:ext cx="1919520" cy="255240"/>
           </a:xfrm>
           <a:prstGeom prst="rect">
             <a:avLst/>
@@ -17607,7 +18038,7 @@
         <p:spPr>
           <a:xfrm>
             <a:off x="457200" y="1645920"/>
-            <a:ext cx="1919880" cy="456840"/>
+            <a:ext cx="1919520" cy="456480"/>
           </a:xfrm>
           <a:prstGeom prst="rect">
             <a:avLst/>
@@ -17668,7 +18099,7 @@
         <p:spPr>
           <a:xfrm>
             <a:off x="2587680" y="1298520"/>
-            <a:ext cx="2011320" cy="1051200"/>
+            <a:ext cx="2010960" cy="1050840"/>
           </a:xfrm>
           <a:prstGeom prst="rect">
             <a:avLst/>
@@ -17698,6 +18129,11 @@
             <a:noAutofit/>
           </a:bodyPr>
           <a:p>
+            <a:pPr>
+              <a:lnSpc>
+                <a:spcPct val="100000"/>
+              </a:lnSpc>
+            </a:pPr>
             <a:endParaRPr lang="en-US" sz="1800" b="0" u="none" strike="noStrike">
               <a:solidFill>
                 <a:srgbClr val="ffffff"/>
@@ -17718,7 +18154,7 @@
         <p:spPr>
           <a:xfrm>
             <a:off x="2587680" y="1298520"/>
-            <a:ext cx="2011320" cy="292320"/>
+            <a:ext cx="2010960" cy="291960"/>
           </a:xfrm>
           <a:prstGeom prst="rect">
             <a:avLst/>
@@ -17741,6 +18177,11 @@
             <a:noAutofit/>
           </a:bodyPr>
           <a:p>
+            <a:pPr>
+              <a:lnSpc>
+                <a:spcPct val="100000"/>
+              </a:lnSpc>
+            </a:pPr>
             <a:endParaRPr lang="en-US" sz="1800" b="0" u="none" strike="noStrike">
               <a:solidFill>
                 <a:srgbClr val="ffffff"/>
@@ -17761,7 +18202,7 @@
         <p:spPr>
           <a:xfrm>
             <a:off x="2633400" y="1316880"/>
-            <a:ext cx="1919880" cy="255600"/>
+            <a:ext cx="1919520" cy="255240"/>
           </a:xfrm>
           <a:prstGeom prst="rect">
             <a:avLst/>
@@ -17822,7 +18263,7 @@
         <p:spPr>
           <a:xfrm>
             <a:off x="2633400" y="1645920"/>
-            <a:ext cx="1919880" cy="456840"/>
+            <a:ext cx="1919520" cy="456480"/>
           </a:xfrm>
           <a:prstGeom prst="rect">
             <a:avLst/>
@@ -17883,7 +18324,7 @@
         <p:spPr>
           <a:xfrm>
             <a:off x="4763880" y="1298520"/>
-            <a:ext cx="2011320" cy="1051200"/>
+            <a:ext cx="2010960" cy="1050840"/>
           </a:xfrm>
           <a:prstGeom prst="rect">
             <a:avLst/>
@@ -17913,6 +18354,11 @@
             <a:noAutofit/>
           </a:bodyPr>
           <a:p>
+            <a:pPr>
+              <a:lnSpc>
+                <a:spcPct val="100000"/>
+              </a:lnSpc>
+            </a:pPr>
             <a:endParaRPr lang="en-US" sz="1800" b="0" u="none" strike="noStrike">
               <a:solidFill>
                 <a:srgbClr val="ffffff"/>
@@ -17933,7 +18379,7 @@
         <p:spPr>
           <a:xfrm>
             <a:off x="4763880" y="1298520"/>
-            <a:ext cx="2011320" cy="292320"/>
+            <a:ext cx="2010960" cy="291960"/>
           </a:xfrm>
           <a:prstGeom prst="rect">
             <a:avLst/>
@@ -17956,6 +18402,11 @@
             <a:noAutofit/>
           </a:bodyPr>
           <a:p>
+            <a:pPr>
+              <a:lnSpc>
+                <a:spcPct val="100000"/>
+              </a:lnSpc>
+            </a:pPr>
             <a:endParaRPr lang="en-US" sz="1800" b="0" u="none" strike="noStrike">
               <a:solidFill>
                 <a:srgbClr val="ffffff"/>
@@ -17976,7 +18427,7 @@
         <p:spPr>
           <a:xfrm>
             <a:off x="4809600" y="1316880"/>
-            <a:ext cx="1919880" cy="255600"/>
+            <a:ext cx="1919520" cy="255240"/>
           </a:xfrm>
           <a:prstGeom prst="rect">
             <a:avLst/>
@@ -18037,7 +18488,7 @@
         <p:spPr>
           <a:xfrm>
             <a:off x="4809600" y="1645920"/>
-            <a:ext cx="1919880" cy="456840"/>
+            <a:ext cx="1919520" cy="456480"/>
           </a:xfrm>
           <a:prstGeom prst="rect">
             <a:avLst/>
@@ -18098,7 +18549,7 @@
         <p:spPr>
           <a:xfrm>
             <a:off x="6940440" y="1298520"/>
-            <a:ext cx="2011320" cy="1051200"/>
+            <a:ext cx="2010960" cy="1050840"/>
           </a:xfrm>
           <a:prstGeom prst="rect">
             <a:avLst/>
@@ -18128,6 +18579,11 @@
             <a:noAutofit/>
           </a:bodyPr>
           <a:p>
+            <a:pPr>
+              <a:lnSpc>
+                <a:spcPct val="100000"/>
+              </a:lnSpc>
+            </a:pPr>
             <a:endParaRPr lang="en-US" sz="1800" b="0" u="none" strike="noStrike">
               <a:solidFill>
                 <a:srgbClr val="ffffff"/>
@@ -18148,7 +18604,7 @@
         <p:spPr>
           <a:xfrm>
             <a:off x="6940440" y="1298520"/>
-            <a:ext cx="2011320" cy="292320"/>
+            <a:ext cx="2010960" cy="291960"/>
           </a:xfrm>
           <a:prstGeom prst="rect">
             <a:avLst/>
@@ -18171,6 +18627,11 @@
             <a:noAutofit/>
           </a:bodyPr>
           <a:p>
+            <a:pPr>
+              <a:lnSpc>
+                <a:spcPct val="100000"/>
+              </a:lnSpc>
+            </a:pPr>
             <a:endParaRPr lang="en-US" sz="1800" b="0" u="none" strike="noStrike">
               <a:solidFill>
                 <a:srgbClr val="ffffff"/>
@@ -18191,7 +18652,7 @@
         <p:spPr>
           <a:xfrm>
             <a:off x="6986160" y="1316880"/>
-            <a:ext cx="1919880" cy="255600"/>
+            <a:ext cx="1919520" cy="255240"/>
           </a:xfrm>
           <a:prstGeom prst="rect">
             <a:avLst/>
@@ -18252,7 +18713,7 @@
         <p:spPr>
           <a:xfrm>
             <a:off x="6986160" y="1645920"/>
-            <a:ext cx="1919880" cy="456840"/>
+            <a:ext cx="1919520" cy="456480"/>
           </a:xfrm>
           <a:prstGeom prst="rect">
             <a:avLst/>
@@ -18313,7 +18774,7 @@
         <p:spPr>
           <a:xfrm>
             <a:off x="411480" y="2532960"/>
-            <a:ext cx="2011320" cy="1051200"/>
+            <a:ext cx="2010960" cy="1050840"/>
           </a:xfrm>
           <a:prstGeom prst="rect">
             <a:avLst/>
@@ -18343,6 +18804,11 @@
             <a:noAutofit/>
           </a:bodyPr>
           <a:p>
+            <a:pPr>
+              <a:lnSpc>
+                <a:spcPct val="100000"/>
+              </a:lnSpc>
+            </a:pPr>
             <a:endParaRPr lang="en-US" sz="1800" b="0" u="none" strike="noStrike">
               <a:solidFill>
                 <a:srgbClr val="ffffff"/>
@@ -18363,7 +18829,7 @@
         <p:spPr>
           <a:xfrm>
             <a:off x="411480" y="2532960"/>
-            <a:ext cx="2011320" cy="292320"/>
+            <a:ext cx="2010960" cy="291960"/>
           </a:xfrm>
           <a:prstGeom prst="rect">
             <a:avLst/>
@@ -18386,6 +18852,11 @@
             <a:noAutofit/>
           </a:bodyPr>
           <a:p>
+            <a:pPr>
+              <a:lnSpc>
+                <a:spcPct val="100000"/>
+              </a:lnSpc>
+            </a:pPr>
             <a:endParaRPr lang="en-US" sz="1800" b="0" u="none" strike="noStrike">
               <a:solidFill>
                 <a:srgbClr val="ffffff"/>
@@ -18406,7 +18877,7 @@
         <p:spPr>
           <a:xfrm>
             <a:off x="457200" y="2551320"/>
-            <a:ext cx="1919880" cy="255600"/>
+            <a:ext cx="1919520" cy="255240"/>
           </a:xfrm>
           <a:prstGeom prst="rect">
             <a:avLst/>
@@ -18467,7 +18938,7 @@
         <p:spPr>
           <a:xfrm>
             <a:off x="457200" y="2880360"/>
-            <a:ext cx="1919880" cy="456840"/>
+            <a:ext cx="1919520" cy="456480"/>
           </a:xfrm>
           <a:prstGeom prst="rect">
             <a:avLst/>
@@ -18528,7 +18999,7 @@
         <p:spPr>
           <a:xfrm>
             <a:off x="2587680" y="2532960"/>
-            <a:ext cx="2011320" cy="1051200"/>
+            <a:ext cx="2010960" cy="1050840"/>
           </a:xfrm>
           <a:prstGeom prst="rect">
             <a:avLst/>
@@ -18558,6 +19029,11 @@
             <a:noAutofit/>
           </a:bodyPr>
           <a:p>
+            <a:pPr>
+              <a:lnSpc>
+                <a:spcPct val="100000"/>
+              </a:lnSpc>
+            </a:pPr>
             <a:endParaRPr lang="en-US" sz="1800" b="0" u="none" strike="noStrike">
               <a:solidFill>
                 <a:srgbClr val="ffffff"/>
@@ -18578,7 +19054,7 @@
         <p:spPr>
           <a:xfrm>
             <a:off x="2587680" y="2532960"/>
-            <a:ext cx="2011320" cy="292320"/>
+            <a:ext cx="2010960" cy="291960"/>
           </a:xfrm>
           <a:prstGeom prst="rect">
             <a:avLst/>
@@ -18601,6 +19077,11 @@
             <a:noAutofit/>
           </a:bodyPr>
           <a:p>
+            <a:pPr>
+              <a:lnSpc>
+                <a:spcPct val="100000"/>
+              </a:lnSpc>
+            </a:pPr>
             <a:endParaRPr lang="en-US" sz="1800" b="0" u="none" strike="noStrike">
               <a:solidFill>
                 <a:srgbClr val="000000"/>
@@ -18621,7 +19102,7 @@
         <p:spPr>
           <a:xfrm>
             <a:off x="2633400" y="2551320"/>
-            <a:ext cx="1919880" cy="255600"/>
+            <a:ext cx="1919520" cy="255240"/>
           </a:xfrm>
           <a:prstGeom prst="rect">
             <a:avLst/>
@@ -18682,7 +19163,7 @@
         <p:spPr>
           <a:xfrm>
             <a:off x="2633400" y="2880360"/>
-            <a:ext cx="1919880" cy="456840"/>
+            <a:ext cx="1919520" cy="456480"/>
           </a:xfrm>
           <a:prstGeom prst="rect">
             <a:avLst/>
@@ -18743,7 +19224,7 @@
         <p:spPr>
           <a:xfrm>
             <a:off x="4763880" y="2532960"/>
-            <a:ext cx="2011320" cy="1051200"/>
+            <a:ext cx="2010960" cy="1050840"/>
           </a:xfrm>
           <a:prstGeom prst="rect">
             <a:avLst/>
@@ -18773,6 +19254,11 @@
             <a:noAutofit/>
           </a:bodyPr>
           <a:p>
+            <a:pPr>
+              <a:lnSpc>
+                <a:spcPct val="100000"/>
+              </a:lnSpc>
+            </a:pPr>
             <a:endParaRPr lang="en-US" sz="1800" b="0" u="none" strike="noStrike">
               <a:solidFill>
                 <a:srgbClr val="ffffff"/>
@@ -18793,7 +19279,7 @@
         <p:spPr>
           <a:xfrm>
             <a:off x="4763880" y="2532960"/>
-            <a:ext cx="2011320" cy="292320"/>
+            <a:ext cx="2010960" cy="291960"/>
           </a:xfrm>
           <a:prstGeom prst="rect">
             <a:avLst/>
@@ -18816,6 +19302,11 @@
             <a:noAutofit/>
           </a:bodyPr>
           <a:p>
+            <a:pPr>
+              <a:lnSpc>
+                <a:spcPct val="100000"/>
+              </a:lnSpc>
+            </a:pPr>
             <a:endParaRPr lang="en-US" sz="1800" b="0" u="none" strike="noStrike">
               <a:solidFill>
                 <a:srgbClr val="000000"/>
@@ -18836,7 +19327,7 @@
         <p:spPr>
           <a:xfrm>
             <a:off x="4809600" y="2551320"/>
-            <a:ext cx="1919880" cy="255600"/>
+            <a:ext cx="1919520" cy="255240"/>
           </a:xfrm>
           <a:prstGeom prst="rect">
             <a:avLst/>
@@ -18897,7 +19388,7 @@
         <p:spPr>
           <a:xfrm>
             <a:off x="4809600" y="2880360"/>
-            <a:ext cx="1919880" cy="456840"/>
+            <a:ext cx="1919520" cy="456480"/>
           </a:xfrm>
           <a:prstGeom prst="rect">
             <a:avLst/>
@@ -18958,7 +19449,7 @@
         <p:spPr>
           <a:xfrm>
             <a:off x="6940440" y="2532960"/>
-            <a:ext cx="2011320" cy="1051200"/>
+            <a:ext cx="2010960" cy="1050840"/>
           </a:xfrm>
           <a:prstGeom prst="rect">
             <a:avLst/>
@@ -18988,6 +19479,11 @@
             <a:noAutofit/>
           </a:bodyPr>
           <a:p>
+            <a:pPr>
+              <a:lnSpc>
+                <a:spcPct val="100000"/>
+              </a:lnSpc>
+            </a:pPr>
             <a:endParaRPr lang="en-US" sz="1800" b="0" u="none" strike="noStrike">
               <a:solidFill>
                 <a:srgbClr val="ffffff"/>
@@ -19008,7 +19504,7 @@
         <p:spPr>
           <a:xfrm>
             <a:off x="6940440" y="2532960"/>
-            <a:ext cx="2011320" cy="292320"/>
+            <a:ext cx="2010960" cy="291960"/>
           </a:xfrm>
           <a:prstGeom prst="rect">
             <a:avLst/>
@@ -19031,6 +19527,11 @@
             <a:noAutofit/>
           </a:bodyPr>
           <a:p>
+            <a:pPr>
+              <a:lnSpc>
+                <a:spcPct val="100000"/>
+              </a:lnSpc>
+            </a:pPr>
             <a:endParaRPr lang="en-US" sz="1800" b="0" u="none" strike="noStrike">
               <a:solidFill>
                 <a:srgbClr val="ffffff"/>
@@ -19051,7 +19552,7 @@
         <p:spPr>
           <a:xfrm>
             <a:off x="6986160" y="2551320"/>
-            <a:ext cx="1919880" cy="255600"/>
+            <a:ext cx="1919520" cy="255240"/>
           </a:xfrm>
           <a:prstGeom prst="rect">
             <a:avLst/>
@@ -19112,7 +19613,7 @@
         <p:spPr>
           <a:xfrm>
             <a:off x="6986160" y="2880360"/>
-            <a:ext cx="1919880" cy="456840"/>
+            <a:ext cx="1919520" cy="456480"/>
           </a:xfrm>
           <a:prstGeom prst="rect">
             <a:avLst/>
@@ -19173,7 +19674,7 @@
         <p:spPr>
           <a:xfrm>
             <a:off x="411480" y="3767400"/>
-            <a:ext cx="2011320" cy="1051200"/>
+            <a:ext cx="2010960" cy="1050840"/>
           </a:xfrm>
           <a:prstGeom prst="rect">
             <a:avLst/>
@@ -19203,6 +19704,11 @@
             <a:noAutofit/>
           </a:bodyPr>
           <a:p>
+            <a:pPr>
+              <a:lnSpc>
+                <a:spcPct val="100000"/>
+              </a:lnSpc>
+            </a:pPr>
             <a:endParaRPr lang="en-US" sz="1800" b="0" u="none" strike="noStrike">
               <a:solidFill>
                 <a:srgbClr val="ffffff"/>
@@ -19223,7 +19729,7 @@
         <p:spPr>
           <a:xfrm>
             <a:off x="411480" y="3767400"/>
-            <a:ext cx="2011320" cy="292320"/>
+            <a:ext cx="2010960" cy="291960"/>
           </a:xfrm>
           <a:prstGeom prst="rect">
             <a:avLst/>
@@ -19246,6 +19752,11 @@
             <a:noAutofit/>
           </a:bodyPr>
           <a:p>
+            <a:pPr>
+              <a:lnSpc>
+                <a:spcPct val="100000"/>
+              </a:lnSpc>
+            </a:pPr>
             <a:endParaRPr lang="en-US" sz="1800" b="0" u="none" strike="noStrike">
               <a:solidFill>
                 <a:srgbClr val="ffffff"/>
@@ -19266,7 +19777,7 @@
         <p:spPr>
           <a:xfrm>
             <a:off x="457200" y="3785760"/>
-            <a:ext cx="1919880" cy="255600"/>
+            <a:ext cx="1919520" cy="255240"/>
           </a:xfrm>
           <a:prstGeom prst="rect">
             <a:avLst/>
@@ -19327,7 +19838,7 @@
         <p:spPr>
           <a:xfrm>
             <a:off x="457200" y="4114800"/>
-            <a:ext cx="1919880" cy="456840"/>
+            <a:ext cx="1919520" cy="456480"/>
           </a:xfrm>
           <a:prstGeom prst="rect">
             <a:avLst/>
@@ -19388,7 +19899,7 @@
         <p:spPr>
           <a:xfrm>
             <a:off x="2587680" y="3767400"/>
-            <a:ext cx="2011320" cy="1051200"/>
+            <a:ext cx="2010960" cy="1050840"/>
           </a:xfrm>
           <a:prstGeom prst="rect">
             <a:avLst/>
@@ -19418,6 +19929,11 @@
             <a:noAutofit/>
           </a:bodyPr>
           <a:p>
+            <a:pPr>
+              <a:lnSpc>
+                <a:spcPct val="100000"/>
+              </a:lnSpc>
+            </a:pPr>
             <a:endParaRPr lang="en-US" sz="1800" b="0" u="none" strike="noStrike">
               <a:solidFill>
                 <a:srgbClr val="ffffff"/>
@@ -19438,7 +19954,7 @@
         <p:spPr>
           <a:xfrm>
             <a:off x="2587680" y="3767400"/>
-            <a:ext cx="2011320" cy="292320"/>
+            <a:ext cx="2010960" cy="291960"/>
           </a:xfrm>
           <a:prstGeom prst="rect">
             <a:avLst/>
@@ -19461,6 +19977,11 @@
             <a:noAutofit/>
           </a:bodyPr>
           <a:p>
+            <a:pPr>
+              <a:lnSpc>
+                <a:spcPct val="100000"/>
+              </a:lnSpc>
+            </a:pPr>
             <a:endParaRPr lang="en-US" sz="1800" b="0" u="none" strike="noStrike">
               <a:solidFill>
                 <a:srgbClr val="ffffff"/>
@@ -19481,7 +20002,7 @@
         <p:spPr>
           <a:xfrm>
             <a:off x="2633400" y="3785760"/>
-            <a:ext cx="1919880" cy="255600"/>
+            <a:ext cx="1919520" cy="255240"/>
           </a:xfrm>
           <a:prstGeom prst="rect">
             <a:avLst/>
@@ -19542,7 +20063,7 @@
         <p:spPr>
           <a:xfrm>
             <a:off x="2633400" y="4114800"/>
-            <a:ext cx="1919880" cy="456840"/>
+            <a:ext cx="1919520" cy="456480"/>
           </a:xfrm>
           <a:prstGeom prst="rect">
             <a:avLst/>
@@ -19603,7 +20124,7 @@
         <p:spPr>
           <a:xfrm>
             <a:off x="4763880" y="3767400"/>
-            <a:ext cx="2011320" cy="1051200"/>
+            <a:ext cx="2010960" cy="1050840"/>
           </a:xfrm>
           <a:prstGeom prst="rect">
             <a:avLst/>
@@ -19633,6 +20154,11 @@
             <a:noAutofit/>
           </a:bodyPr>
           <a:p>
+            <a:pPr>
+              <a:lnSpc>
+                <a:spcPct val="100000"/>
+              </a:lnSpc>
+            </a:pPr>
             <a:endParaRPr lang="en-US" sz="1800" b="0" u="none" strike="noStrike">
               <a:solidFill>
                 <a:srgbClr val="ffffff"/>
@@ -19653,7 +20179,7 @@
         <p:spPr>
           <a:xfrm>
             <a:off x="4763880" y="3767400"/>
-            <a:ext cx="2011320" cy="292320"/>
+            <a:ext cx="2010960" cy="291960"/>
           </a:xfrm>
           <a:prstGeom prst="rect">
             <a:avLst/>
@@ -19676,6 +20202,11 @@
             <a:noAutofit/>
           </a:bodyPr>
           <a:p>
+            <a:pPr>
+              <a:lnSpc>
+                <a:spcPct val="100000"/>
+              </a:lnSpc>
+            </a:pPr>
             <a:endParaRPr lang="en-US" sz="1800" b="0" u="none" strike="noStrike">
               <a:solidFill>
                 <a:srgbClr val="ffffff"/>
@@ -19696,7 +20227,7 @@
         <p:spPr>
           <a:xfrm>
             <a:off x="4809600" y="3785760"/>
-            <a:ext cx="1919880" cy="255600"/>
+            <a:ext cx="1919520" cy="255240"/>
           </a:xfrm>
           <a:prstGeom prst="rect">
             <a:avLst/>
@@ -19757,7 +20288,7 @@
         <p:spPr>
           <a:xfrm>
             <a:off x="4809600" y="4114800"/>
-            <a:ext cx="1919880" cy="456840"/>
+            <a:ext cx="1919520" cy="456480"/>
           </a:xfrm>
           <a:prstGeom prst="rect">
             <a:avLst/>
@@ -19818,7 +20349,7 @@
         <p:spPr>
           <a:xfrm>
             <a:off x="411480" y="4709160"/>
-            <a:ext cx="8320680" cy="292320"/>
+            <a:ext cx="8320320" cy="291960"/>
           </a:xfrm>
           <a:prstGeom prst="rect">
             <a:avLst/>
@@ -19916,7 +20447,7 @@
         <p:spPr>
           <a:xfrm>
             <a:off x="0" y="0"/>
-            <a:ext cx="164160" cy="5143320"/>
+            <a:ext cx="163800" cy="5142960"/>
           </a:xfrm>
           <a:prstGeom prst="rect">
             <a:avLst/>
@@ -19939,6 +20470,11 @@
             <a:noAutofit/>
           </a:bodyPr>
           <a:p>
+            <a:pPr>
+              <a:lnSpc>
+                <a:spcPct val="100000"/>
+              </a:lnSpc>
+            </a:pPr>
             <a:endParaRPr lang="en-US" sz="1800" b="0" u="none" strike="noStrike">
               <a:solidFill>
                 <a:srgbClr val="ffffff"/>
@@ -19959,7 +20495,7 @@
         <p:spPr>
           <a:xfrm>
             <a:off x="411480" y="255960"/>
-            <a:ext cx="8320680" cy="548280"/>
+            <a:ext cx="8320320" cy="547920"/>
           </a:xfrm>
           <a:prstGeom prst="rect">
             <a:avLst/>
@@ -20020,7 +20556,7 @@
         <p:spPr>
           <a:xfrm>
             <a:off x="411480" y="1005840"/>
-            <a:ext cx="2742840" cy="1782720"/>
+            <a:ext cx="2742480" cy="1782360"/>
           </a:xfrm>
           <a:prstGeom prst="rect">
             <a:avLst/>
@@ -20050,6 +20586,11 @@
             <a:noAutofit/>
           </a:bodyPr>
           <a:p>
+            <a:pPr>
+              <a:lnSpc>
+                <a:spcPct val="100000"/>
+              </a:lnSpc>
+            </a:pPr>
             <a:endParaRPr lang="en-US" sz="1800" b="0" u="none" strike="noStrike">
               <a:solidFill>
                 <a:srgbClr val="ffffff"/>
@@ -20074,7 +20615,7 @@
         <p:spPr>
           <a:xfrm>
             <a:off x="576000" y="1143000"/>
-            <a:ext cx="475200" cy="475200"/>
+            <a:ext cx="474840" cy="474840"/>
           </a:xfrm>
           <a:prstGeom prst="rect">
             <a:avLst/>
@@ -20094,7 +20635,7 @@
         <p:spPr>
           <a:xfrm>
             <a:off x="548640" y="1691640"/>
-            <a:ext cx="2468520" cy="383760"/>
+            <a:ext cx="2468160" cy="383400"/>
           </a:xfrm>
           <a:prstGeom prst="rect">
             <a:avLst/>
@@ -20155,7 +20696,7 @@
         <p:spPr>
           <a:xfrm>
             <a:off x="548640" y="2057400"/>
-            <a:ext cx="2468520" cy="658080"/>
+            <a:ext cx="2468160" cy="657720"/>
           </a:xfrm>
           <a:prstGeom prst="rect">
             <a:avLst/>
@@ -20216,7 +20757,7 @@
         <p:spPr>
           <a:xfrm>
             <a:off x="3310200" y="1005840"/>
-            <a:ext cx="2742840" cy="1782720"/>
+            <a:ext cx="2742480" cy="1782360"/>
           </a:xfrm>
           <a:prstGeom prst="rect">
             <a:avLst/>
@@ -20246,6 +20787,11 @@
             <a:noAutofit/>
           </a:bodyPr>
           <a:p>
+            <a:pPr>
+              <a:lnSpc>
+                <a:spcPct val="100000"/>
+              </a:lnSpc>
+            </a:pPr>
             <a:endParaRPr lang="en-US" sz="1800" b="0" u="none" strike="noStrike">
               <a:solidFill>
                 <a:srgbClr val="ffffff"/>
@@ -20270,7 +20816,7 @@
         <p:spPr>
           <a:xfrm>
             <a:off x="3474720" y="1143000"/>
-            <a:ext cx="475200" cy="475200"/>
+            <a:ext cx="474840" cy="474840"/>
           </a:xfrm>
           <a:prstGeom prst="rect">
             <a:avLst/>
@@ -20290,7 +20836,7 @@
         <p:spPr>
           <a:xfrm>
             <a:off x="3447360" y="1691640"/>
-            <a:ext cx="2468520" cy="383760"/>
+            <a:ext cx="2468160" cy="383400"/>
           </a:xfrm>
           <a:prstGeom prst="rect">
             <a:avLst/>
@@ -20351,7 +20897,7 @@
         <p:spPr>
           <a:xfrm>
             <a:off x="3447360" y="2057400"/>
-            <a:ext cx="2468520" cy="658080"/>
+            <a:ext cx="2468160" cy="657720"/>
           </a:xfrm>
           <a:prstGeom prst="rect">
             <a:avLst/>
@@ -20412,7 +20958,7 @@
         <p:spPr>
           <a:xfrm>
             <a:off x="6208920" y="1005840"/>
-            <a:ext cx="2742840" cy="1782720"/>
+            <a:ext cx="2742480" cy="1782360"/>
           </a:xfrm>
           <a:prstGeom prst="rect">
             <a:avLst/>
@@ -20442,6 +20988,11 @@
             <a:noAutofit/>
           </a:bodyPr>
           <a:p>
+            <a:pPr>
+              <a:lnSpc>
+                <a:spcPct val="100000"/>
+              </a:lnSpc>
+            </a:pPr>
             <a:endParaRPr lang="en-US" sz="1800" b="0" u="none" strike="noStrike">
               <a:solidFill>
                 <a:srgbClr val="ffffff"/>
@@ -20466,7 +21017,7 @@
         <p:spPr>
           <a:xfrm>
             <a:off x="6373440" y="1143000"/>
-            <a:ext cx="475200" cy="475200"/>
+            <a:ext cx="474840" cy="474840"/>
           </a:xfrm>
           <a:prstGeom prst="rect">
             <a:avLst/>
@@ -20486,7 +21037,7 @@
         <p:spPr>
           <a:xfrm>
             <a:off x="6346080" y="1691640"/>
-            <a:ext cx="2468520" cy="383760"/>
+            <a:ext cx="2468160" cy="383400"/>
           </a:xfrm>
           <a:prstGeom prst="rect">
             <a:avLst/>
@@ -20547,7 +21098,7 @@
         <p:spPr>
           <a:xfrm>
             <a:off x="6346080" y="2057400"/>
-            <a:ext cx="2468520" cy="658080"/>
+            <a:ext cx="2468160" cy="657720"/>
           </a:xfrm>
           <a:prstGeom prst="rect">
             <a:avLst/>
@@ -20608,7 +21159,7 @@
         <p:spPr>
           <a:xfrm>
             <a:off x="411480" y="2926080"/>
-            <a:ext cx="2742840" cy="1782720"/>
+            <a:ext cx="2742480" cy="1782360"/>
           </a:xfrm>
           <a:prstGeom prst="rect">
             <a:avLst/>
@@ -20638,6 +21189,11 @@
             <a:noAutofit/>
           </a:bodyPr>
           <a:p>
+            <a:pPr>
+              <a:lnSpc>
+                <a:spcPct val="100000"/>
+              </a:lnSpc>
+            </a:pPr>
             <a:endParaRPr lang="en-US" sz="1800" b="0" u="none" strike="noStrike">
               <a:solidFill>
                 <a:srgbClr val="000000"/>
@@ -20662,7 +21218,7 @@
         <p:spPr>
           <a:xfrm>
             <a:off x="576000" y="3063240"/>
-            <a:ext cx="475200" cy="475200"/>
+            <a:ext cx="474840" cy="474840"/>
           </a:xfrm>
           <a:prstGeom prst="rect">
             <a:avLst/>
@@ -20682,7 +21238,7 @@
         <p:spPr>
           <a:xfrm>
             <a:off x="548640" y="3611880"/>
-            <a:ext cx="2468520" cy="383760"/>
+            <a:ext cx="2468160" cy="383400"/>
           </a:xfrm>
           <a:prstGeom prst="rect">
             <a:avLst/>
@@ -20743,7 +21299,7 @@
         <p:spPr>
           <a:xfrm>
             <a:off x="548640" y="3977640"/>
-            <a:ext cx="2468520" cy="658080"/>
+            <a:ext cx="2468160" cy="657720"/>
           </a:xfrm>
           <a:prstGeom prst="rect">
             <a:avLst/>
@@ -20804,7 +21360,7 @@
         <p:spPr>
           <a:xfrm>
             <a:off x="3310200" y="2926080"/>
-            <a:ext cx="2742840" cy="1782720"/>
+            <a:ext cx="2742480" cy="1782360"/>
           </a:xfrm>
           <a:prstGeom prst="rect">
             <a:avLst/>
@@ -20834,6 +21390,11 @@
             <a:noAutofit/>
           </a:bodyPr>
           <a:p>
+            <a:pPr>
+              <a:lnSpc>
+                <a:spcPct val="100000"/>
+              </a:lnSpc>
+            </a:pPr>
             <a:endParaRPr lang="en-US" sz="1800" b="0" u="none" strike="noStrike">
               <a:solidFill>
                 <a:srgbClr val="ffffff"/>
@@ -20858,7 +21419,7 @@
         <p:spPr>
           <a:xfrm>
             <a:off x="3474720" y="3063240"/>
-            <a:ext cx="475200" cy="475200"/>
+            <a:ext cx="474840" cy="474840"/>
           </a:xfrm>
           <a:prstGeom prst="rect">
             <a:avLst/>
@@ -20878,7 +21439,7 @@
         <p:spPr>
           <a:xfrm>
             <a:off x="3447360" y="3611880"/>
-            <a:ext cx="2468520" cy="383760"/>
+            <a:ext cx="2468160" cy="383400"/>
           </a:xfrm>
           <a:prstGeom prst="rect">
             <a:avLst/>
@@ -20939,7 +21500,7 @@
         <p:spPr>
           <a:xfrm>
             <a:off x="3447360" y="3977640"/>
-            <a:ext cx="2468520" cy="658080"/>
+            <a:ext cx="2468160" cy="657720"/>
           </a:xfrm>
           <a:prstGeom prst="rect">
             <a:avLst/>
@@ -21000,7 +21561,7 @@
         <p:spPr>
           <a:xfrm>
             <a:off x="6208920" y="2926080"/>
-            <a:ext cx="2742840" cy="1782720"/>
+            <a:ext cx="2742480" cy="1782360"/>
           </a:xfrm>
           <a:prstGeom prst="rect">
             <a:avLst/>
@@ -21030,6 +21591,11 @@
             <a:noAutofit/>
           </a:bodyPr>
           <a:p>
+            <a:pPr>
+              <a:lnSpc>
+                <a:spcPct val="100000"/>
+              </a:lnSpc>
+            </a:pPr>
             <a:endParaRPr lang="en-US" sz="1800" b="0" u="none" strike="noStrike">
               <a:solidFill>
                 <a:srgbClr val="ffffff"/>
@@ -21054,7 +21620,7 @@
         <p:spPr>
           <a:xfrm>
             <a:off x="6373440" y="3063240"/>
-            <a:ext cx="475200" cy="475200"/>
+            <a:ext cx="474840" cy="474840"/>
           </a:xfrm>
           <a:prstGeom prst="rect">
             <a:avLst/>
@@ -21074,7 +21640,7 @@
         <p:spPr>
           <a:xfrm>
             <a:off x="6346080" y="3611880"/>
-            <a:ext cx="2468520" cy="383760"/>
+            <a:ext cx="2468160" cy="383400"/>
           </a:xfrm>
           <a:prstGeom prst="rect">
             <a:avLst/>
@@ -21135,7 +21701,7 @@
         <p:spPr>
           <a:xfrm>
             <a:off x="6346080" y="3977640"/>
-            <a:ext cx="2468520" cy="658080"/>
+            <a:ext cx="2468160" cy="657720"/>
           </a:xfrm>
           <a:prstGeom prst="rect">
             <a:avLst/>
@@ -21233,7 +21799,7 @@
         <p:spPr>
           <a:xfrm>
             <a:off x="0" y="0"/>
-            <a:ext cx="164160" cy="5143320"/>
+            <a:ext cx="163800" cy="5142960"/>
           </a:xfrm>
           <a:prstGeom prst="rect">
             <a:avLst/>
@@ -21256,6 +21822,11 @@
             <a:noAutofit/>
           </a:bodyPr>
           <a:p>
+            <a:pPr>
+              <a:lnSpc>
+                <a:spcPct val="100000"/>
+              </a:lnSpc>
+            </a:pPr>
             <a:endParaRPr lang="en-US" sz="1800" b="0" u="none" strike="noStrike">
               <a:solidFill>
                 <a:srgbClr val="000000"/>
@@ -21276,7 +21847,7 @@
         <p:spPr>
           <a:xfrm>
             <a:off x="411480" y="255960"/>
-            <a:ext cx="8229240" cy="347040"/>
+            <a:ext cx="8228880" cy="346680"/>
           </a:xfrm>
           <a:prstGeom prst="rect">
             <a:avLst/>
@@ -21337,7 +21908,7 @@
         <p:spPr>
           <a:xfrm>
             <a:off x="411480" y="567000"/>
-            <a:ext cx="8229240" cy="548280"/>
+            <a:ext cx="8228880" cy="547920"/>
           </a:xfrm>
           <a:prstGeom prst="rect">
             <a:avLst/>
@@ -21398,7 +21969,7 @@
         <p:spPr>
           <a:xfrm>
             <a:off x="411480" y="1298520"/>
-            <a:ext cx="4160160" cy="456840"/>
+            <a:ext cx="4159800" cy="456480"/>
           </a:xfrm>
           <a:prstGeom prst="rect">
             <a:avLst/>
@@ -21421,6 +21992,11 @@
             <a:noAutofit/>
           </a:bodyPr>
           <a:p>
+            <a:pPr>
+              <a:lnSpc>
+                <a:spcPct val="100000"/>
+              </a:lnSpc>
+            </a:pPr>
             <a:endParaRPr lang="en-US" sz="1800" b="0" u="none" strike="noStrike">
               <a:solidFill>
                 <a:srgbClr val="ffffff"/>
@@ -21441,7 +22017,7 @@
         <p:spPr>
           <a:xfrm>
             <a:off x="594360" y="1353240"/>
-            <a:ext cx="1919880" cy="328680"/>
+            <a:ext cx="1919520" cy="328320"/>
           </a:xfrm>
           <a:prstGeom prst="rect">
             <a:avLst/>
@@ -21502,7 +22078,7 @@
         <p:spPr>
           <a:xfrm>
             <a:off x="2560320" y="1353240"/>
-            <a:ext cx="1828440" cy="328680"/>
+            <a:ext cx="1828080" cy="328320"/>
           </a:xfrm>
           <a:prstGeom prst="rect">
             <a:avLst/>
@@ -21563,7 +22139,7 @@
         <p:spPr>
           <a:xfrm>
             <a:off x="411480" y="1819800"/>
-            <a:ext cx="4160160" cy="456840"/>
+            <a:ext cx="4159800" cy="456480"/>
           </a:xfrm>
           <a:prstGeom prst="rect">
             <a:avLst/>
@@ -21586,6 +22162,11 @@
             <a:noAutofit/>
           </a:bodyPr>
           <a:p>
+            <a:pPr>
+              <a:lnSpc>
+                <a:spcPct val="100000"/>
+              </a:lnSpc>
+            </a:pPr>
             <a:endParaRPr lang="en-US" sz="1800" b="0" u="none" strike="noStrike">
               <a:solidFill>
                 <a:srgbClr val="ffffff"/>
@@ -21606,7 +22187,7 @@
         <p:spPr>
           <a:xfrm>
             <a:off x="594360" y="1874520"/>
-            <a:ext cx="1919880" cy="328680"/>
+            <a:ext cx="1919520" cy="328320"/>
           </a:xfrm>
           <a:prstGeom prst="rect">
             <a:avLst/>
@@ -21667,7 +22248,7 @@
         <p:spPr>
           <a:xfrm>
             <a:off x="2560320" y="1874520"/>
-            <a:ext cx="1828440" cy="328680"/>
+            <a:ext cx="1828080" cy="328320"/>
           </a:xfrm>
           <a:prstGeom prst="rect">
             <a:avLst/>
@@ -21728,7 +22309,7 @@
         <p:spPr>
           <a:xfrm>
             <a:off x="411480" y="2340720"/>
-            <a:ext cx="4160160" cy="456840"/>
+            <a:ext cx="4159800" cy="456480"/>
           </a:xfrm>
           <a:prstGeom prst="rect">
             <a:avLst/>
@@ -21751,6 +22332,11 @@
             <a:noAutofit/>
           </a:bodyPr>
           <a:p>
+            <a:pPr>
+              <a:lnSpc>
+                <a:spcPct val="100000"/>
+              </a:lnSpc>
+            </a:pPr>
             <a:endParaRPr lang="en-US" sz="1800" b="0" u="none" strike="noStrike">
               <a:solidFill>
                 <a:srgbClr val="ffffff"/>
@@ -21771,7 +22357,7 @@
         <p:spPr>
           <a:xfrm>
             <a:off x="594360" y="2395800"/>
-            <a:ext cx="1919880" cy="328680"/>
+            <a:ext cx="1919520" cy="328320"/>
           </a:xfrm>
           <a:prstGeom prst="rect">
             <a:avLst/>
@@ -21832,7 +22418,7 @@
         <p:spPr>
           <a:xfrm>
             <a:off x="2560320" y="2395800"/>
-            <a:ext cx="1828440" cy="328680"/>
+            <a:ext cx="1828080" cy="328320"/>
           </a:xfrm>
           <a:prstGeom prst="rect">
             <a:avLst/>
@@ -21893,7 +22479,7 @@
         <p:spPr>
           <a:xfrm>
             <a:off x="411480" y="2862000"/>
-            <a:ext cx="4160160" cy="456840"/>
+            <a:ext cx="4159800" cy="456480"/>
           </a:xfrm>
           <a:prstGeom prst="rect">
             <a:avLst/>
@@ -21916,6 +22502,11 @@
             <a:noAutofit/>
           </a:bodyPr>
           <a:p>
+            <a:pPr>
+              <a:lnSpc>
+                <a:spcPct val="100000"/>
+              </a:lnSpc>
+            </a:pPr>
             <a:endParaRPr lang="en-US" sz="1800" b="0" u="none" strike="noStrike">
               <a:solidFill>
                 <a:srgbClr val="ffffff"/>
@@ -21936,7 +22527,7 @@
         <p:spPr>
           <a:xfrm>
             <a:off x="594360" y="2917080"/>
-            <a:ext cx="1919880" cy="328680"/>
+            <a:ext cx="1919520" cy="328320"/>
           </a:xfrm>
           <a:prstGeom prst="rect">
             <a:avLst/>
@@ -21997,7 +22588,7 @@
         <p:spPr>
           <a:xfrm>
             <a:off x="2560320" y="2917080"/>
-            <a:ext cx="1828440" cy="328680"/>
+            <a:ext cx="1828080" cy="328320"/>
           </a:xfrm>
           <a:prstGeom prst="rect">
             <a:avLst/>
@@ -22058,7 +22649,7 @@
         <p:spPr>
           <a:xfrm>
             <a:off x="411480" y="3383280"/>
-            <a:ext cx="4160160" cy="456840"/>
+            <a:ext cx="4159800" cy="456480"/>
           </a:xfrm>
           <a:prstGeom prst="rect">
             <a:avLst/>
@@ -22081,6 +22672,11 @@
             <a:noAutofit/>
           </a:bodyPr>
           <a:p>
+            <a:pPr>
+              <a:lnSpc>
+                <a:spcPct val="100000"/>
+              </a:lnSpc>
+            </a:pPr>
             <a:endParaRPr lang="en-US" sz="1800" b="0" u="none" strike="noStrike">
               <a:solidFill>
                 <a:srgbClr val="ffffff"/>
@@ -22101,7 +22697,7 @@
         <p:spPr>
           <a:xfrm>
             <a:off x="594360" y="3438000"/>
-            <a:ext cx="1919880" cy="328680"/>
+            <a:ext cx="1919520" cy="328320"/>
           </a:xfrm>
           <a:prstGeom prst="rect">
             <a:avLst/>
@@ -22162,7 +22758,7 @@
         <p:spPr>
           <a:xfrm>
             <a:off x="2560320" y="3438000"/>
-            <a:ext cx="1828440" cy="328680"/>
+            <a:ext cx="1828080" cy="328320"/>
           </a:xfrm>
           <a:prstGeom prst="rect">
             <a:avLst/>
@@ -22223,7 +22819,7 @@
         <p:spPr>
           <a:xfrm>
             <a:off x="411480" y="3904560"/>
-            <a:ext cx="4160160" cy="456840"/>
+            <a:ext cx="4159800" cy="456480"/>
           </a:xfrm>
           <a:prstGeom prst="rect">
             <a:avLst/>
@@ -22246,6 +22842,11 @@
             <a:noAutofit/>
           </a:bodyPr>
           <a:p>
+            <a:pPr>
+              <a:lnSpc>
+                <a:spcPct val="100000"/>
+              </a:lnSpc>
+            </a:pPr>
             <a:endParaRPr lang="en-US" sz="1800" b="0" u="none" strike="noStrike">
               <a:solidFill>
                 <a:srgbClr val="ffffff"/>
@@ -22266,7 +22867,7 @@
         <p:spPr>
           <a:xfrm>
             <a:off x="594360" y="3959280"/>
-            <a:ext cx="1919880" cy="328680"/>
+            <a:ext cx="1919520" cy="328320"/>
           </a:xfrm>
           <a:prstGeom prst="rect">
             <a:avLst/>
@@ -22327,7 +22928,7 @@
         <p:spPr>
           <a:xfrm>
             <a:off x="2560320" y="3959280"/>
-            <a:ext cx="1828440" cy="328680"/>
+            <a:ext cx="1828080" cy="328320"/>
           </a:xfrm>
           <a:prstGeom prst="rect">
             <a:avLst/>
@@ -22388,7 +22989,7 @@
         <p:spPr>
           <a:xfrm>
             <a:off x="411480" y="4425840"/>
-            <a:ext cx="4160160" cy="456840"/>
+            <a:ext cx="4159800" cy="456480"/>
           </a:xfrm>
           <a:prstGeom prst="rect">
             <a:avLst/>
@@ -22411,6 +23012,11 @@
             <a:noAutofit/>
           </a:bodyPr>
           <a:p>
+            <a:pPr>
+              <a:lnSpc>
+                <a:spcPct val="100000"/>
+              </a:lnSpc>
+            </a:pPr>
             <a:endParaRPr lang="en-US" sz="1800" b="0" u="none" strike="noStrike">
               <a:solidFill>
                 <a:srgbClr val="ffffff"/>
@@ -22431,7 +23037,7 @@
         <p:spPr>
           <a:xfrm>
             <a:off x="594360" y="4480560"/>
-            <a:ext cx="1919880" cy="328680"/>
+            <a:ext cx="1919520" cy="328320"/>
           </a:xfrm>
           <a:prstGeom prst="rect">
             <a:avLst/>
@@ -22492,7 +23098,7 @@
         <p:spPr>
           <a:xfrm>
             <a:off x="2560320" y="4480560"/>
-            <a:ext cx="1828440" cy="328680"/>
+            <a:ext cx="1828080" cy="328320"/>
           </a:xfrm>
           <a:prstGeom prst="rect">
             <a:avLst/>
@@ -22553,7 +23159,7 @@
         <p:spPr>
           <a:xfrm>
             <a:off x="4846320" y="1298520"/>
-            <a:ext cx="3931560" cy="594000"/>
+            <a:ext cx="3931200" cy="593640"/>
           </a:xfrm>
           <a:prstGeom prst="rect">
             <a:avLst/>
@@ -22583,6 +23189,11 @@
             <a:noAutofit/>
           </a:bodyPr>
           <a:p>
+            <a:pPr>
+              <a:lnSpc>
+                <a:spcPct val="100000"/>
+              </a:lnSpc>
+            </a:pPr>
             <a:endParaRPr lang="en-US" sz="1800" b="0" u="none" strike="noStrike">
               <a:solidFill>
                 <a:srgbClr val="ffffff"/>
@@ -22607,7 +23218,7 @@
         <p:spPr>
           <a:xfrm>
             <a:off x="4983480" y="1389960"/>
-            <a:ext cx="383760" cy="383760"/>
+            <a:ext cx="383400" cy="383400"/>
           </a:xfrm>
           <a:prstGeom prst="rect">
             <a:avLst/>
@@ -22627,7 +23238,7 @@
         <p:spPr>
           <a:xfrm>
             <a:off x="5486400" y="1389960"/>
-            <a:ext cx="3154320" cy="411120"/>
+            <a:ext cx="3153960" cy="410760"/>
           </a:xfrm>
           <a:prstGeom prst="rect">
             <a:avLst/>
@@ -22688,7 +23299,7 @@
         <p:spPr>
           <a:xfrm>
             <a:off x="6583680" y="1892880"/>
-            <a:ext cx="456840" cy="136800"/>
+            <a:ext cx="456480" cy="136440"/>
           </a:xfrm>
           <a:prstGeom prst="rect">
             <a:avLst/>
@@ -22749,7 +23360,7 @@
         <p:spPr>
           <a:xfrm>
             <a:off x="4846320" y="2002680"/>
-            <a:ext cx="3931560" cy="594000"/>
+            <a:ext cx="3931200" cy="593640"/>
           </a:xfrm>
           <a:prstGeom prst="rect">
             <a:avLst/>
@@ -22779,6 +23390,11 @@
             <a:noAutofit/>
           </a:bodyPr>
           <a:p>
+            <a:pPr>
+              <a:lnSpc>
+                <a:spcPct val="100000"/>
+              </a:lnSpc>
+            </a:pPr>
             <a:endParaRPr lang="en-US" sz="1800" b="0" u="none" strike="noStrike">
               <a:solidFill>
                 <a:srgbClr val="ffffff"/>
@@ -22803,7 +23419,7 @@
         <p:spPr>
           <a:xfrm>
             <a:off x="4983480" y="2094120"/>
-            <a:ext cx="383760" cy="383760"/>
+            <a:ext cx="383400" cy="383400"/>
           </a:xfrm>
           <a:prstGeom prst="rect">
             <a:avLst/>
@@ -22823,7 +23439,7 @@
         <p:spPr>
           <a:xfrm>
             <a:off x="5486400" y="2094120"/>
-            <a:ext cx="3154320" cy="411120"/>
+            <a:ext cx="3153960" cy="410760"/>
           </a:xfrm>
           <a:prstGeom prst="rect">
             <a:avLst/>
@@ -22884,7 +23500,7 @@
         <p:spPr>
           <a:xfrm>
             <a:off x="6583680" y="2597040"/>
-            <a:ext cx="456840" cy="136800"/>
+            <a:ext cx="456480" cy="136440"/>
           </a:xfrm>
           <a:prstGeom prst="rect">
             <a:avLst/>
@@ -22945,7 +23561,7 @@
         <p:spPr>
           <a:xfrm>
             <a:off x="4846320" y="2706480"/>
-            <a:ext cx="3931560" cy="594000"/>
+            <a:ext cx="3931200" cy="593640"/>
           </a:xfrm>
           <a:prstGeom prst="rect">
             <a:avLst/>
@@ -22975,6 +23591,11 @@
             <a:noAutofit/>
           </a:bodyPr>
           <a:p>
+            <a:pPr>
+              <a:lnSpc>
+                <a:spcPct val="100000"/>
+              </a:lnSpc>
+            </a:pPr>
             <a:endParaRPr lang="en-US" sz="1800" b="0" u="none" strike="noStrike">
               <a:solidFill>
                 <a:srgbClr val="ffffff"/>
@@ -22999,7 +23620,7 @@
         <p:spPr>
           <a:xfrm>
             <a:off x="4983480" y="2797920"/>
-            <a:ext cx="383760" cy="383760"/>
+            <a:ext cx="383400" cy="383400"/>
           </a:xfrm>
           <a:prstGeom prst="rect">
             <a:avLst/>
@@ -23019,7 +23640,7 @@
         <p:spPr>
           <a:xfrm>
             <a:off x="5486400" y="2797920"/>
-            <a:ext cx="3154320" cy="411120"/>
+            <a:ext cx="3153960" cy="410760"/>
           </a:xfrm>
           <a:prstGeom prst="rect">
             <a:avLst/>
@@ -23080,7 +23701,7 @@
         <p:spPr>
           <a:xfrm>
             <a:off x="6583680" y="3300840"/>
-            <a:ext cx="456840" cy="136800"/>
+            <a:ext cx="456480" cy="136440"/>
           </a:xfrm>
           <a:prstGeom prst="rect">
             <a:avLst/>
@@ -23141,7 +23762,7 @@
         <p:spPr>
           <a:xfrm>
             <a:off x="4846320" y="3410640"/>
-            <a:ext cx="3931560" cy="594000"/>
+            <a:ext cx="3931200" cy="593640"/>
           </a:xfrm>
           <a:prstGeom prst="rect">
             <a:avLst/>
@@ -23171,6 +23792,11 @@
             <a:noAutofit/>
           </a:bodyPr>
           <a:p>
+            <a:pPr>
+              <a:lnSpc>
+                <a:spcPct val="100000"/>
+              </a:lnSpc>
+            </a:pPr>
             <a:endParaRPr lang="en-US" sz="1800" b="0" u="none" strike="noStrike">
               <a:solidFill>
                 <a:srgbClr val="ffffff"/>
@@ -23195,7 +23821,7 @@
         <p:spPr>
           <a:xfrm>
             <a:off x="4983480" y="3502080"/>
-            <a:ext cx="383760" cy="383760"/>
+            <a:ext cx="383400" cy="383400"/>
           </a:xfrm>
           <a:prstGeom prst="rect">
             <a:avLst/>
@@ -23215,7 +23841,7 @@
         <p:spPr>
           <a:xfrm>
             <a:off x="5486400" y="3502080"/>
-            <a:ext cx="3154320" cy="411120"/>
+            <a:ext cx="3153960" cy="410760"/>
           </a:xfrm>
           <a:prstGeom prst="rect">
             <a:avLst/>
@@ -23276,7 +23902,7 @@
         <p:spPr>
           <a:xfrm>
             <a:off x="6583680" y="4005000"/>
-            <a:ext cx="456840" cy="136800"/>
+            <a:ext cx="456480" cy="136440"/>
           </a:xfrm>
           <a:prstGeom prst="rect">
             <a:avLst/>
@@ -23337,7 +23963,7 @@
         <p:spPr>
           <a:xfrm>
             <a:off x="4846320" y="4114800"/>
-            <a:ext cx="3931560" cy="594000"/>
+            <a:ext cx="3931200" cy="593640"/>
           </a:xfrm>
           <a:prstGeom prst="rect">
             <a:avLst/>
@@ -23367,6 +23993,11 @@
             <a:noAutofit/>
           </a:bodyPr>
           <a:p>
+            <a:pPr>
+              <a:lnSpc>
+                <a:spcPct val="100000"/>
+              </a:lnSpc>
+            </a:pPr>
             <a:endParaRPr lang="en-US" sz="1800" b="0" u="none" strike="noStrike">
               <a:solidFill>
                 <a:srgbClr val="ffffff"/>
@@ -23391,7 +24022,7 @@
         <p:spPr>
           <a:xfrm>
             <a:off x="4983480" y="4206240"/>
-            <a:ext cx="383760" cy="383760"/>
+            <a:ext cx="383400" cy="383400"/>
           </a:xfrm>
           <a:prstGeom prst="rect">
             <a:avLst/>
@@ -23411,7 +24042,7 @@
         <p:spPr>
           <a:xfrm>
             <a:off x="5486400" y="4206240"/>
-            <a:ext cx="3154320" cy="411120"/>
+            <a:ext cx="3153960" cy="410760"/>
           </a:xfrm>
           <a:prstGeom prst="rect">
             <a:avLst/>
@@ -23509,7 +24140,7 @@
         <p:spPr>
           <a:xfrm>
             <a:off x="0" y="0"/>
-            <a:ext cx="164160" cy="5143320"/>
+            <a:ext cx="163800" cy="5142960"/>
           </a:xfrm>
           <a:prstGeom prst="rect">
             <a:avLst/>
@@ -23532,6 +24163,11 @@
             <a:noAutofit/>
           </a:bodyPr>
           <a:p>
+            <a:pPr>
+              <a:lnSpc>
+                <a:spcPct val="100000"/>
+              </a:lnSpc>
+            </a:pPr>
             <a:endParaRPr lang="en-US" sz="1800" b="0" u="none" strike="noStrike">
               <a:solidFill>
                 <a:srgbClr val="ffffff"/>
@@ -23552,7 +24188,7 @@
         <p:spPr>
           <a:xfrm>
             <a:off x="411480" y="255960"/>
-            <a:ext cx="8320680" cy="347040"/>
+            <a:ext cx="8320320" cy="346680"/>
           </a:xfrm>
           <a:prstGeom prst="rect">
             <a:avLst/>
@@ -23613,7 +24249,7 @@
         <p:spPr>
           <a:xfrm>
             <a:off x="411480" y="567000"/>
-            <a:ext cx="8320680" cy="548280"/>
+            <a:ext cx="8320320" cy="547920"/>
           </a:xfrm>
           <a:prstGeom prst="rect">
             <a:avLst/>
@@ -23674,7 +24310,7 @@
         <p:spPr>
           <a:xfrm>
             <a:off x="411480" y="1234440"/>
-            <a:ext cx="1919880" cy="438480"/>
+            <a:ext cx="1919520" cy="438120"/>
           </a:xfrm>
           <a:prstGeom prst="rect">
             <a:avLst/>
@@ -23697,6 +24333,11 @@
             <a:noAutofit/>
           </a:bodyPr>
           <a:p>
+            <a:pPr>
+              <a:lnSpc>
+                <a:spcPct val="100000"/>
+              </a:lnSpc>
+            </a:pPr>
             <a:endParaRPr lang="en-US" sz="1800" b="0" u="none" strike="noStrike">
               <a:solidFill>
                 <a:srgbClr val="ffffff"/>
@@ -23717,7 +24358,7 @@
         <p:spPr>
           <a:xfrm>
             <a:off x="411480" y="1234440"/>
-            <a:ext cx="1919880" cy="438480"/>
+            <a:ext cx="1919520" cy="438120"/>
           </a:xfrm>
           <a:prstGeom prst="rect">
             <a:avLst/>
@@ -23822,7 +24463,7 @@
         <p:spPr>
           <a:xfrm>
             <a:off x="2560320" y="1234440"/>
-            <a:ext cx="1919880" cy="438480"/>
+            <a:ext cx="1919520" cy="438120"/>
           </a:xfrm>
           <a:prstGeom prst="rect">
             <a:avLst/>
@@ -23845,6 +24486,11 @@
             <a:noAutofit/>
           </a:bodyPr>
           <a:p>
+            <a:pPr>
+              <a:lnSpc>
+                <a:spcPct val="100000"/>
+              </a:lnSpc>
+            </a:pPr>
             <a:endParaRPr lang="en-US" sz="1800" b="0" u="none" strike="noStrike">
               <a:solidFill>
                 <a:srgbClr val="ffffff"/>
@@ -23865,7 +24511,7 @@
         <p:spPr>
           <a:xfrm>
             <a:off x="2560320" y="1234440"/>
-            <a:ext cx="1919880" cy="438480"/>
+            <a:ext cx="1919520" cy="438120"/>
           </a:xfrm>
           <a:prstGeom prst="rect">
             <a:avLst/>
@@ -23970,7 +24616,7 @@
         <p:spPr>
           <a:xfrm>
             <a:off x="4709160" y="1234440"/>
-            <a:ext cx="1919880" cy="438480"/>
+            <a:ext cx="1919520" cy="438120"/>
           </a:xfrm>
           <a:prstGeom prst="rect">
             <a:avLst/>
@@ -23993,6 +24639,11 @@
             <a:noAutofit/>
           </a:bodyPr>
           <a:p>
+            <a:pPr>
+              <a:lnSpc>
+                <a:spcPct val="100000"/>
+              </a:lnSpc>
+            </a:pPr>
             <a:endParaRPr lang="en-US" sz="1800" b="0" u="none" strike="noStrike">
               <a:solidFill>
                 <a:srgbClr val="ffffff"/>
@@ -24013,7 +24664,7 @@
         <p:spPr>
           <a:xfrm>
             <a:off x="4709160" y="1234440"/>
-            <a:ext cx="1919880" cy="438480"/>
+            <a:ext cx="1919520" cy="438120"/>
           </a:xfrm>
           <a:prstGeom prst="rect">
             <a:avLst/>
@@ -24118,7 +24769,7 @@
         <p:spPr>
           <a:xfrm>
             <a:off x="6858000" y="1234440"/>
-            <a:ext cx="1919880" cy="438480"/>
+            <a:ext cx="1919520" cy="438120"/>
           </a:xfrm>
           <a:prstGeom prst="rect">
             <a:avLst/>
@@ -24141,6 +24792,11 @@
             <a:noAutofit/>
           </a:bodyPr>
           <a:p>
+            <a:pPr>
+              <a:lnSpc>
+                <a:spcPct val="100000"/>
+              </a:lnSpc>
+            </a:pPr>
             <a:endParaRPr lang="en-US" sz="1800" b="0" u="none" strike="noStrike">
               <a:solidFill>
                 <a:srgbClr val="ffffff"/>
@@ -24161,7 +24817,7 @@
         <p:spPr>
           <a:xfrm>
             <a:off x="6858000" y="1234440"/>
-            <a:ext cx="1919880" cy="438480"/>
+            <a:ext cx="1919520" cy="438120"/>
           </a:xfrm>
           <a:prstGeom prst="rect">
             <a:avLst/>
@@ -24309,7 +24965,7 @@
         <p:spPr>
           <a:xfrm>
             <a:off x="3337560" y="1801440"/>
-            <a:ext cx="182520" cy="164160"/>
+            <a:ext cx="182160" cy="163800"/>
           </a:xfrm>
           <a:prstGeom prst="rect">
             <a:avLst/>
@@ -24370,7 +25026,7 @@
         <p:spPr>
           <a:xfrm>
             <a:off x="1398960" y="1645920"/>
-            <a:ext cx="2102760" cy="219240"/>
+            <a:ext cx="2102400" cy="218880"/>
           </a:xfrm>
           <a:prstGeom prst="rect">
             <a:avLst/>
@@ -24474,7 +25130,7 @@
         <p:spPr>
           <a:xfrm>
             <a:off x="5486400" y="2167200"/>
-            <a:ext cx="182520" cy="164160"/>
+            <a:ext cx="182160" cy="163800"/>
           </a:xfrm>
           <a:prstGeom prst="rect">
             <a:avLst/>
@@ -24535,7 +25191,7 @@
         <p:spPr>
           <a:xfrm>
             <a:off x="3547800" y="2011680"/>
-            <a:ext cx="2102760" cy="219240"/>
+            <a:ext cx="2102400" cy="218880"/>
           </a:xfrm>
           <a:prstGeom prst="rect">
             <a:avLst/>
@@ -24639,7 +25295,7 @@
         <p:spPr>
           <a:xfrm>
             <a:off x="7635240" y="2532960"/>
-            <a:ext cx="182520" cy="164160"/>
+            <a:ext cx="182160" cy="163800"/>
           </a:xfrm>
           <a:prstGeom prst="rect">
             <a:avLst/>
@@ -24700,7 +25356,7 @@
         <p:spPr>
           <a:xfrm>
             <a:off x="5696640" y="2377440"/>
-            <a:ext cx="2102760" cy="219240"/>
+            <a:ext cx="2102400" cy="218880"/>
           </a:xfrm>
           <a:prstGeom prst="rect">
             <a:avLst/>
@@ -24804,7 +25460,7 @@
         <p:spPr>
           <a:xfrm>
             <a:off x="7635240" y="2898720"/>
-            <a:ext cx="182520" cy="164160"/>
+            <a:ext cx="182160" cy="163800"/>
           </a:xfrm>
           <a:prstGeom prst="rect">
             <a:avLst/>
@@ -24865,7 +25521,7 @@
         <p:spPr>
           <a:xfrm>
             <a:off x="5696640" y="2743200"/>
-            <a:ext cx="2102760" cy="219240"/>
+            <a:ext cx="2102400" cy="218880"/>
           </a:xfrm>
           <a:prstGeom prst="rect">
             <a:avLst/>
@@ -24969,7 +25625,7 @@
         <p:spPr>
           <a:xfrm>
             <a:off x="7635240" y="3264480"/>
-            <a:ext cx="182520" cy="164160"/>
+            <a:ext cx="182160" cy="163800"/>
           </a:xfrm>
           <a:prstGeom prst="rect">
             <a:avLst/>
@@ -25029,8 +25685,8 @@
         </p:nvSpPr>
         <p:spPr>
           <a:xfrm>
-            <a:off x="5696640" y="3108960"/>
-            <a:ext cx="2102760" cy="219240"/>
+            <a:off x="5696640" y="3119040"/>
+            <a:ext cx="2102400" cy="218880"/>
           </a:xfrm>
           <a:prstGeom prst="rect">
             <a:avLst/>
@@ -25134,7 +25790,7 @@
         <p:spPr>
           <a:xfrm>
             <a:off x="7635240" y="3630240"/>
-            <a:ext cx="182520" cy="164160"/>
+            <a:ext cx="182160" cy="163800"/>
           </a:xfrm>
           <a:prstGeom prst="rect">
             <a:avLst/>
@@ -25195,7 +25851,7 @@
         <p:spPr>
           <a:xfrm>
             <a:off x="5696640" y="3474720"/>
-            <a:ext cx="2102760" cy="219240"/>
+            <a:ext cx="2102400" cy="218880"/>
           </a:xfrm>
           <a:prstGeom prst="rect">
             <a:avLst/>
@@ -25300,7 +25956,7 @@
         <p:spPr>
           <a:xfrm>
             <a:off x="1389960" y="4087440"/>
-            <a:ext cx="182520" cy="164160"/>
+            <a:ext cx="182160" cy="163800"/>
           </a:xfrm>
           <a:prstGeom prst="rect">
             <a:avLst/>
@@ -25361,7 +26017,7 @@
         <p:spPr>
           <a:xfrm>
             <a:off x="1398960" y="3931920"/>
-            <a:ext cx="2102760" cy="219240"/>
+            <a:ext cx="2102400" cy="218880"/>
           </a:xfrm>
           <a:prstGeom prst="rect">
             <a:avLst/>
@@ -25421,8 +26077,8 @@
         </p:nvSpPr>
         <p:spPr>
           <a:xfrm>
-            <a:off x="6949440" y="2395800"/>
-            <a:ext cx="1828440" cy="1645560"/>
+            <a:off x="3657600" y="3498480"/>
+            <a:ext cx="1828080" cy="1645200"/>
           </a:xfrm>
           <a:prstGeom prst="rect">
             <a:avLst/>
@@ -25452,6 +26108,11 @@
             <a:noAutofit/>
           </a:bodyPr>
           <a:p>
+            <a:pPr>
+              <a:lnSpc>
+                <a:spcPct val="100000"/>
+              </a:lnSpc>
+            </a:pPr>
             <a:endParaRPr lang="en-US" sz="1800" b="0" u="none" strike="noStrike">
               <a:solidFill>
                 <a:srgbClr val="ffffff"/>
@@ -25471,8 +26132,8 @@
         </p:nvSpPr>
         <p:spPr>
           <a:xfrm>
-            <a:off x="6949440" y="2395800"/>
-            <a:ext cx="1828440" cy="319680"/>
+            <a:off x="3658320" y="3566880"/>
+            <a:ext cx="1828080" cy="319320"/>
           </a:xfrm>
           <a:prstGeom prst="rect">
             <a:avLst/>
@@ -25532,8 +26193,8 @@
         </p:nvSpPr>
         <p:spPr>
           <a:xfrm>
-            <a:off x="7086600" y="2788920"/>
-            <a:ext cx="1554120" cy="1142640"/>
+            <a:off x="3886200" y="3886200"/>
+            <a:ext cx="1553760" cy="1142280"/>
           </a:xfrm>
           <a:prstGeom prst="rect">
             <a:avLst/>
@@ -25691,7 +26352,7 @@
         <p:spPr>
           <a:xfrm>
             <a:off x="0" y="0"/>
-            <a:ext cx="164160" cy="5143320"/>
+            <a:ext cx="163800" cy="5142960"/>
           </a:xfrm>
           <a:prstGeom prst="rect">
             <a:avLst/>
@@ -25714,6 +26375,11 @@
             <a:noAutofit/>
           </a:bodyPr>
           <a:p>
+            <a:pPr>
+              <a:lnSpc>
+                <a:spcPct val="100000"/>
+              </a:lnSpc>
+            </a:pPr>
             <a:endParaRPr lang="en-US" sz="1800" b="0" u="none" strike="noStrike">
               <a:solidFill>
                 <a:srgbClr val="000000"/>
@@ -25734,7 +26400,7 @@
         <p:spPr>
           <a:xfrm>
             <a:off x="411480" y="255960"/>
-            <a:ext cx="8229240" cy="548280"/>
+            <a:ext cx="8228880" cy="547920"/>
           </a:xfrm>
           <a:prstGeom prst="rect">
             <a:avLst/>
@@ -25795,7 +26461,7 @@
         <p:spPr>
           <a:xfrm>
             <a:off x="411480" y="960120"/>
-            <a:ext cx="5028840" cy="347040"/>
+            <a:ext cx="5028480" cy="346680"/>
           </a:xfrm>
           <a:prstGeom prst="rect">
             <a:avLst/>
@@ -25856,7 +26522,7 @@
         <p:spPr>
           <a:xfrm>
             <a:off x="411480" y="1417320"/>
-            <a:ext cx="4663080" cy="804240"/>
+            <a:ext cx="4662720" cy="803880"/>
           </a:xfrm>
           <a:prstGeom prst="rect">
             <a:avLst/>
@@ -25879,6 +26545,11 @@
             <a:noAutofit/>
           </a:bodyPr>
           <a:p>
+            <a:pPr>
+              <a:lnSpc>
+                <a:spcPct val="100000"/>
+              </a:lnSpc>
+            </a:pPr>
             <a:endParaRPr lang="en-US" sz="1800" b="0" u="none" strike="noStrike">
               <a:solidFill>
                 <a:srgbClr val="ffffff"/>
@@ -25899,7 +26570,7 @@
         <p:spPr>
           <a:xfrm>
             <a:off x="411480" y="1417320"/>
-            <a:ext cx="868320" cy="804240"/>
+            <a:ext cx="867960" cy="803880"/>
           </a:xfrm>
           <a:prstGeom prst="rect">
             <a:avLst/>
@@ -25922,6 +26593,11 @@
             <a:noAutofit/>
           </a:bodyPr>
           <a:p>
+            <a:pPr>
+              <a:lnSpc>
+                <a:spcPct val="100000"/>
+              </a:lnSpc>
+            </a:pPr>
             <a:endParaRPr lang="en-US" sz="1800" b="0" u="none" strike="noStrike">
               <a:solidFill>
                 <a:srgbClr val="000000"/>
@@ -25942,7 +26618,7 @@
         <p:spPr>
           <a:xfrm>
             <a:off x="411480" y="1417320"/>
-            <a:ext cx="868320" cy="804240"/>
+            <a:ext cx="867960" cy="803880"/>
           </a:xfrm>
           <a:prstGeom prst="rect">
             <a:avLst/>
@@ -26003,7 +26679,7 @@
         <p:spPr>
           <a:xfrm>
             <a:off x="1417320" y="1508760"/>
-            <a:ext cx="2285640" cy="365400"/>
+            <a:ext cx="2285280" cy="365040"/>
           </a:xfrm>
           <a:prstGeom prst="rect">
             <a:avLst/>
@@ -26064,7 +26740,7 @@
         <p:spPr>
           <a:xfrm>
             <a:off x="1417320" y="1874520"/>
-            <a:ext cx="1005480" cy="246600"/>
+            <a:ext cx="1005120" cy="246240"/>
           </a:xfrm>
           <a:prstGeom prst="roundRect">
             <a:avLst>
@@ -26089,6 +26765,11 @@
             <a:noAutofit/>
           </a:bodyPr>
           <a:p>
+            <a:pPr>
+              <a:lnSpc>
+                <a:spcPct val="100000"/>
+              </a:lnSpc>
+            </a:pPr>
             <a:endParaRPr lang="en-US" sz="1800" b="0" u="none" strike="noStrike">
               <a:solidFill>
                 <a:srgbClr val="ffffff"/>
@@ -26109,7 +26790,7 @@
         <p:spPr>
           <a:xfrm>
             <a:off x="1417320" y="1874520"/>
-            <a:ext cx="1005480" cy="246600"/>
+            <a:ext cx="1005120" cy="246240"/>
           </a:xfrm>
           <a:prstGeom prst="rect">
             <a:avLst/>
@@ -26170,7 +26851,7 @@
         <p:spPr>
           <a:xfrm>
             <a:off x="411480" y="2404800"/>
-            <a:ext cx="4663080" cy="804240"/>
+            <a:ext cx="4662720" cy="803880"/>
           </a:xfrm>
           <a:prstGeom prst="rect">
             <a:avLst/>
@@ -26193,6 +26874,11 @@
             <a:noAutofit/>
           </a:bodyPr>
           <a:p>
+            <a:pPr>
+              <a:lnSpc>
+                <a:spcPct val="100000"/>
+              </a:lnSpc>
+            </a:pPr>
             <a:endParaRPr lang="en-US" sz="1800" b="0" u="none" strike="noStrike">
               <a:solidFill>
                 <a:srgbClr val="ffffff"/>
@@ -26213,7 +26899,7 @@
         <p:spPr>
           <a:xfrm>
             <a:off x="411480" y="2404800"/>
-            <a:ext cx="868320" cy="804240"/>
+            <a:ext cx="867960" cy="803880"/>
           </a:xfrm>
           <a:prstGeom prst="rect">
             <a:avLst/>
@@ -26236,6 +26922,11 @@
             <a:noAutofit/>
           </a:bodyPr>
           <a:p>
+            <a:pPr>
+              <a:lnSpc>
+                <a:spcPct val="100000"/>
+              </a:lnSpc>
+            </a:pPr>
             <a:endParaRPr lang="en-US" sz="1800" b="0" u="none" strike="noStrike">
               <a:solidFill>
                 <a:srgbClr val="000000"/>
@@ -26256,7 +26947,7 @@
         <p:spPr>
           <a:xfrm>
             <a:off x="411480" y="2404800"/>
-            <a:ext cx="868320" cy="804240"/>
+            <a:ext cx="867960" cy="803880"/>
           </a:xfrm>
           <a:prstGeom prst="rect">
             <a:avLst/>
@@ -26317,7 +27008,7 @@
         <p:spPr>
           <a:xfrm>
             <a:off x="1417320" y="2496240"/>
-            <a:ext cx="2285640" cy="365400"/>
+            <a:ext cx="2285280" cy="365040"/>
           </a:xfrm>
           <a:prstGeom prst="rect">
             <a:avLst/>
@@ -26378,7 +27069,7 @@
         <p:spPr>
           <a:xfrm>
             <a:off x="1417320" y="2862000"/>
-            <a:ext cx="1005480" cy="246600"/>
+            <a:ext cx="1005120" cy="246240"/>
           </a:xfrm>
           <a:prstGeom prst="roundRect">
             <a:avLst>
@@ -26403,6 +27094,11 @@
             <a:noAutofit/>
           </a:bodyPr>
           <a:p>
+            <a:pPr>
+              <a:lnSpc>
+                <a:spcPct val="100000"/>
+              </a:lnSpc>
+            </a:pPr>
             <a:endParaRPr lang="en-US" sz="1800" b="0" u="none" strike="noStrike">
               <a:solidFill>
                 <a:srgbClr val="ffffff"/>
@@ -26423,7 +27119,7 @@
         <p:spPr>
           <a:xfrm>
             <a:off x="1417320" y="2862000"/>
-            <a:ext cx="1005480" cy="246600"/>
+            <a:ext cx="1005120" cy="246240"/>
           </a:xfrm>
           <a:prstGeom prst="rect">
             <a:avLst/>
@@ -26484,7 +27180,7 @@
         <p:spPr>
           <a:xfrm>
             <a:off x="411480" y="3392280"/>
-            <a:ext cx="4663080" cy="804240"/>
+            <a:ext cx="4662720" cy="803880"/>
           </a:xfrm>
           <a:prstGeom prst="rect">
             <a:avLst/>
@@ -26507,6 +27203,11 @@
             <a:noAutofit/>
           </a:bodyPr>
           <a:p>
+            <a:pPr>
+              <a:lnSpc>
+                <a:spcPct val="100000"/>
+              </a:lnSpc>
+            </a:pPr>
             <a:endParaRPr lang="en-US" sz="1800" b="0" u="none" strike="noStrike">
               <a:solidFill>
                 <a:srgbClr val="ffffff"/>
@@ -26527,7 +27228,7 @@
         <p:spPr>
           <a:xfrm>
             <a:off x="411480" y="3392280"/>
-            <a:ext cx="868320" cy="804240"/>
+            <a:ext cx="867960" cy="803880"/>
           </a:xfrm>
           <a:prstGeom prst="rect">
             <a:avLst/>
@@ -26550,6 +27251,11 @@
             <a:noAutofit/>
           </a:bodyPr>
           <a:p>
+            <a:pPr>
+              <a:lnSpc>
+                <a:spcPct val="100000"/>
+              </a:lnSpc>
+            </a:pPr>
             <a:endParaRPr lang="en-US" sz="1800" b="0" u="none" strike="noStrike">
               <a:solidFill>
                 <a:srgbClr val="000000"/>
@@ -26570,7 +27276,7 @@
         <p:spPr>
           <a:xfrm>
             <a:off x="411480" y="3392280"/>
-            <a:ext cx="868320" cy="804240"/>
+            <a:ext cx="867960" cy="803880"/>
           </a:xfrm>
           <a:prstGeom prst="rect">
             <a:avLst/>
@@ -26631,7 +27337,7 @@
         <p:spPr>
           <a:xfrm>
             <a:off x="1417320" y="3483720"/>
-            <a:ext cx="2285640" cy="365400"/>
+            <a:ext cx="2285280" cy="365040"/>
           </a:xfrm>
           <a:prstGeom prst="rect">
             <a:avLst/>
@@ -26692,7 +27398,7 @@
         <p:spPr>
           <a:xfrm>
             <a:off x="1417320" y="3849480"/>
-            <a:ext cx="1005480" cy="246600"/>
+            <a:ext cx="1005120" cy="246240"/>
           </a:xfrm>
           <a:prstGeom prst="roundRect">
             <a:avLst>
@@ -26717,6 +27423,11 @@
             <a:noAutofit/>
           </a:bodyPr>
           <a:p>
+            <a:pPr>
+              <a:lnSpc>
+                <a:spcPct val="100000"/>
+              </a:lnSpc>
+            </a:pPr>
             <a:endParaRPr lang="en-US" sz="1800" b="0" u="none" strike="noStrike">
               <a:solidFill>
                 <a:srgbClr val="ffffff"/>
@@ -26737,7 +27448,7 @@
         <p:spPr>
           <a:xfrm>
             <a:off x="1417320" y="3849480"/>
-            <a:ext cx="1005480" cy="246600"/>
+            <a:ext cx="1005120" cy="246240"/>
           </a:xfrm>
           <a:prstGeom prst="rect">
             <a:avLst/>
@@ -26798,7 +27509,7 @@
         <p:spPr>
           <a:xfrm>
             <a:off x="411480" y="4407480"/>
-            <a:ext cx="4663080" cy="319680"/>
+            <a:ext cx="4662720" cy="319320"/>
           </a:xfrm>
           <a:prstGeom prst="rect">
             <a:avLst/>
@@ -26859,7 +27570,7 @@
         <p:spPr>
           <a:xfrm>
             <a:off x="5394960" y="960120"/>
-            <a:ext cx="3382920" cy="347040"/>
+            <a:ext cx="3382560" cy="346680"/>
           </a:xfrm>
           <a:prstGeom prst="rect">
             <a:avLst/>
@@ -26920,7 +27631,7 @@
         <p:spPr>
           <a:xfrm>
             <a:off x="5394960" y="1417320"/>
-            <a:ext cx="3382920" cy="749520"/>
+            <a:ext cx="3382560" cy="749160"/>
           </a:xfrm>
           <a:prstGeom prst="rect">
             <a:avLst/>
@@ -26943,6 +27654,11 @@
             <a:noAutofit/>
           </a:bodyPr>
           <a:p>
+            <a:pPr>
+              <a:lnSpc>
+                <a:spcPct val="100000"/>
+              </a:lnSpc>
+            </a:pPr>
             <a:endParaRPr lang="en-US" sz="1800" b="0" u="none" strike="noStrike">
               <a:solidFill>
                 <a:srgbClr val="ffffff"/>
@@ -26963,7 +27679,7 @@
         <p:spPr>
           <a:xfrm>
             <a:off x="5394960" y="1417320"/>
-            <a:ext cx="50040" cy="749520"/>
+            <a:ext cx="49680" cy="749160"/>
           </a:xfrm>
           <a:prstGeom prst="rect">
             <a:avLst/>
@@ -26986,6 +27702,11 @@
             <a:noAutofit/>
           </a:bodyPr>
           <a:p>
+            <a:pPr>
+              <a:lnSpc>
+                <a:spcPct val="100000"/>
+              </a:lnSpc>
+            </a:pPr>
             <a:endParaRPr lang="en-US" sz="1800" b="0" u="none" strike="noStrike">
               <a:solidFill>
                 <a:srgbClr val="ffffff"/>
@@ -27006,7 +27727,7 @@
         <p:spPr>
           <a:xfrm>
             <a:off x="5577840" y="1463040"/>
-            <a:ext cx="3062880" cy="273960"/>
+            <a:ext cx="3062520" cy="273600"/>
           </a:xfrm>
           <a:prstGeom prst="rect">
             <a:avLst/>
@@ -27067,7 +27788,7 @@
         <p:spPr>
           <a:xfrm>
             <a:off x="5577840" y="1764720"/>
-            <a:ext cx="3062880" cy="319680"/>
+            <a:ext cx="3062520" cy="319320"/>
           </a:xfrm>
           <a:prstGeom prst="rect">
             <a:avLst/>
@@ -27128,7 +27849,7 @@
         <p:spPr>
           <a:xfrm>
             <a:off x="5394960" y="2331720"/>
-            <a:ext cx="3382920" cy="749520"/>
+            <a:ext cx="3382560" cy="749160"/>
           </a:xfrm>
           <a:prstGeom prst="rect">
             <a:avLst/>
@@ -27151,6 +27872,11 @@
             <a:noAutofit/>
           </a:bodyPr>
           <a:p>
+            <a:pPr>
+              <a:lnSpc>
+                <a:spcPct val="100000"/>
+              </a:lnSpc>
+            </a:pPr>
             <a:endParaRPr lang="en-US" sz="1800" b="0" u="none" strike="noStrike">
               <a:solidFill>
                 <a:srgbClr val="ffffff"/>
@@ -27171,7 +27897,7 @@
         <p:spPr>
           <a:xfrm>
             <a:off x="5394960" y="2331720"/>
-            <a:ext cx="50040" cy="749520"/>
+            <a:ext cx="49680" cy="749160"/>
           </a:xfrm>
           <a:prstGeom prst="rect">
             <a:avLst/>
@@ -27194,6 +27920,11 @@
             <a:noAutofit/>
           </a:bodyPr>
           <a:p>
+            <a:pPr>
+              <a:lnSpc>
+                <a:spcPct val="100000"/>
+              </a:lnSpc>
+            </a:pPr>
             <a:endParaRPr lang="en-US" sz="1800" b="0" u="none" strike="noStrike">
               <a:solidFill>
                 <a:srgbClr val="ffffff"/>
@@ -27214,7 +27945,7 @@
         <p:spPr>
           <a:xfrm>
             <a:off x="5577840" y="2377440"/>
-            <a:ext cx="3062880" cy="273960"/>
+            <a:ext cx="3062520" cy="273600"/>
           </a:xfrm>
           <a:prstGeom prst="rect">
             <a:avLst/>
@@ -27275,7 +28006,7 @@
         <p:spPr>
           <a:xfrm>
             <a:off x="5577840" y="2679120"/>
-            <a:ext cx="3062880" cy="319680"/>
+            <a:ext cx="3062520" cy="319320"/>
           </a:xfrm>
           <a:prstGeom prst="rect">
             <a:avLst/>
@@ -27336,7 +28067,7 @@
         <p:spPr>
           <a:xfrm>
             <a:off x="5394960" y="3246120"/>
-            <a:ext cx="3382920" cy="749520"/>
+            <a:ext cx="3382560" cy="749160"/>
           </a:xfrm>
           <a:prstGeom prst="rect">
             <a:avLst/>
@@ -27359,6 +28090,11 @@
             <a:noAutofit/>
           </a:bodyPr>
           <a:p>
+            <a:pPr>
+              <a:lnSpc>
+                <a:spcPct val="100000"/>
+              </a:lnSpc>
+            </a:pPr>
             <a:endParaRPr lang="en-US" sz="1800" b="0" u="none" strike="noStrike">
               <a:solidFill>
                 <a:srgbClr val="ffffff"/>
@@ -27379,7 +28115,7 @@
         <p:spPr>
           <a:xfrm>
             <a:off x="5394960" y="3246120"/>
-            <a:ext cx="50040" cy="749520"/>
+            <a:ext cx="49680" cy="749160"/>
           </a:xfrm>
           <a:prstGeom prst="rect">
             <a:avLst/>
@@ -27402,6 +28138,11 @@
             <a:noAutofit/>
           </a:bodyPr>
           <a:p>
+            <a:pPr>
+              <a:lnSpc>
+                <a:spcPct val="100000"/>
+              </a:lnSpc>
+            </a:pPr>
             <a:endParaRPr lang="en-US" sz="1800" b="0" u="none" strike="noStrike">
               <a:solidFill>
                 <a:srgbClr val="ffffff"/>
@@ -27422,7 +28163,7 @@
         <p:spPr>
           <a:xfrm>
             <a:off x="5577840" y="3291840"/>
-            <a:ext cx="3062880" cy="273960"/>
+            <a:ext cx="3062520" cy="273600"/>
           </a:xfrm>
           <a:prstGeom prst="rect">
             <a:avLst/>
@@ -27483,7 +28224,7 @@
         <p:spPr>
           <a:xfrm>
             <a:off x="5577840" y="3593520"/>
-            <a:ext cx="3062880" cy="319680"/>
+            <a:ext cx="3062520" cy="319320"/>
           </a:xfrm>
           <a:prstGeom prst="rect">
             <a:avLst/>
@@ -27544,7 +28285,7 @@
         <p:spPr>
           <a:xfrm>
             <a:off x="5394960" y="4160520"/>
-            <a:ext cx="3382920" cy="749520"/>
+            <a:ext cx="3382560" cy="749160"/>
           </a:xfrm>
           <a:prstGeom prst="rect">
             <a:avLst/>
@@ -27567,6 +28308,11 @@
             <a:noAutofit/>
           </a:bodyPr>
           <a:p>
+            <a:pPr>
+              <a:lnSpc>
+                <a:spcPct val="100000"/>
+              </a:lnSpc>
+            </a:pPr>
             <a:endParaRPr lang="en-US" sz="1800" b="0" u="none" strike="noStrike">
               <a:solidFill>
                 <a:srgbClr val="ffffff"/>
@@ -27587,7 +28333,7 @@
         <p:spPr>
           <a:xfrm>
             <a:off x="5394960" y="4160520"/>
-            <a:ext cx="50040" cy="749520"/>
+            <a:ext cx="49680" cy="749160"/>
           </a:xfrm>
           <a:prstGeom prst="rect">
             <a:avLst/>
@@ -27610,6 +28356,11 @@
             <a:noAutofit/>
           </a:bodyPr>
           <a:p>
+            <a:pPr>
+              <a:lnSpc>
+                <a:spcPct val="100000"/>
+              </a:lnSpc>
+            </a:pPr>
             <a:endParaRPr lang="en-US" sz="1800" b="0" u="none" strike="noStrike">
               <a:solidFill>
                 <a:srgbClr val="ffffff"/>
@@ -27630,7 +28381,7 @@
         <p:spPr>
           <a:xfrm>
             <a:off x="5577840" y="4206240"/>
-            <a:ext cx="3062880" cy="273960"/>
+            <a:ext cx="3062520" cy="273600"/>
           </a:xfrm>
           <a:prstGeom prst="rect">
             <a:avLst/>
@@ -27691,7 +28442,7 @@
         <p:spPr>
           <a:xfrm>
             <a:off x="5577840" y="4507920"/>
-            <a:ext cx="3062880" cy="319680"/>
+            <a:ext cx="3062520" cy="319320"/>
           </a:xfrm>
           <a:prstGeom prst="rect">
             <a:avLst/>
